--- a/exports/pptx/lessons/middle-module-13-indic-ecology/day-07-isopanishad-mantra.pptx
+++ b/exports/pptx/lessons/middle-module-13-indic-ecology/day-07-isopanishad-mantra.pptx
@@ -17,9 +17,19 @@
     <p:sldId id="265" r:id="rId11"/>
     <p:sldId id="266" r:id="rId12"/>
     <p:sldId id="267" r:id="rId13"/>
+    <p:sldId id="268" r:id="rId14"/>
+    <p:sldId id="269" r:id="rId15"/>
+    <p:sldId id="270" r:id="rId16"/>
+    <p:sldId id="271" r:id="rId17"/>
+    <p:sldId id="272" r:id="rId18"/>
+    <p:sldId id="273" r:id="rId19"/>
+    <p:sldId id="274" r:id="rId20"/>
+    <p:sldId id="275" r:id="rId21"/>
+    <p:sldId id="276" r:id="rId22"/>
+    <p:sldId id="277" r:id="rId23"/>
   </p:sldIdLst>
   <p:notesMasterIdLst>
-    <p:notesMasterId r:id="rId14"/>
+    <p:notesMasterId r:id="rId24"/>
   </p:notesMasterIdLst>
   <p:sldSz cx="9144000" cy="5143500"/>
   <p:notesSz cx="5143500" cy="9144000"/>
@@ -819,6 +829,622 @@
 </p:notes>
 </file>
 
+<file path=ppt/notesSlides/notesSlide13.xml><?xml version="1.0" encoding="utf-8"?>
+<p:notes xmlns:a="http://schemas.openxmlformats.org/drawingml/2006/main" xmlns:r="http://schemas.openxmlformats.org/officeDocument/2006/relationships" xmlns:p="http://schemas.openxmlformats.org/presentationml/2006/main">
+  <p:cSld>
+    <p:spTree>
+      <p:nvGrpSpPr>
+        <p:cNvPr id="1" name=""/>
+        <p:cNvGrpSpPr/>
+        <p:nvPr/>
+      </p:nvGrpSpPr>
+      <p:grpSpPr>
+        <a:xfrm>
+          <a:off x="0" y="0"/>
+          <a:ext cx="0" cy="0"/>
+          <a:chOff x="0" y="0"/>
+          <a:chExt cx="0" cy="0"/>
+        </a:xfrm>
+      </p:grpSpPr>
+      <p:sp>
+        <p:nvSpPr>
+          <p:cNvPr id="2" name="Slide Image Placeholder 1"/>
+          <p:cNvSpPr>
+            <a:spLocks noGrp="1" noRot="1" noChangeAspect="1"/>
+          </p:cNvSpPr>
+          <p:nvPr>
+            <p:ph type="sldImg"/>
+          </p:nvPr>
+        </p:nvSpPr>
+        <p:spPr/>
+      </p:sp>
+      <p:sp>
+        <p:nvSpPr>
+          <p:cNvPr id="3" name="Notes Placeholder 2"/>
+          <p:cNvSpPr>
+            <a:spLocks noGrp="1"/>
+          </p:cNvSpPr>
+          <p:nvPr>
+            <p:ph type="body" idx="1"/>
+          </p:nvPr>
+        </p:nvSpPr>
+        <p:spPr/>
+        <p:txBody>
+          <a:bodyPr/>
+          <a:lstStyle/>
+          <a:p>
+            <a:r>
+              <a:rPr lang="en-US" dirty="0"/>
+              <a:t/>
+            </a:r>
+            <a:endParaRPr lang="en-US" dirty="0"/>
+          </a:p>
+        </p:txBody>
+      </p:sp>
+      <p:sp>
+        <p:nvSpPr>
+          <p:cNvPr id="4" name="Slide Number Placeholder 3"/>
+          <p:cNvSpPr>
+            <a:spLocks noGrp="1"/>
+          </p:cNvSpPr>
+          <p:nvPr>
+            <p:ph type="sldNum" sz="quarter" idx="10"/>
+          </p:nvPr>
+        </p:nvSpPr>
+        <p:spPr/>
+        <p:txBody>
+          <a:bodyPr/>
+          <a:lstStyle/>
+          <a:p>
+            <a:fld id="{F7021451-1387-4CA6-816F-3879F97B5CBC}" type="slidenum">
+              <a:rPr lang="en-US"/>
+              <a:t>13</a:t>
+            </a:fld>
+            <a:endParaRPr lang="en-US"/>
+          </a:p>
+        </p:txBody>
+      </p:sp>
+    </p:spTree>
+    <p:extLst>
+      <p:ext uri="{BB962C8B-B14F-4D97-AF65-F5344CB8AC3E}">
+        <p14:creationId xmlns:p14="http://schemas.microsoft.com/office/powerpoint/2010/main" val="1024086991"/>
+      </p:ext>
+    </p:extLst>
+  </p:cSld>
+  <p:clrMapOvr>
+    <a:masterClrMapping/>
+  </p:clrMapOvr>
+</p:notes>
+</file>
+
+<file path=ppt/notesSlides/notesSlide14.xml><?xml version="1.0" encoding="utf-8"?>
+<p:notes xmlns:a="http://schemas.openxmlformats.org/drawingml/2006/main" xmlns:r="http://schemas.openxmlformats.org/officeDocument/2006/relationships" xmlns:p="http://schemas.openxmlformats.org/presentationml/2006/main">
+  <p:cSld>
+    <p:spTree>
+      <p:nvGrpSpPr>
+        <p:cNvPr id="1" name=""/>
+        <p:cNvGrpSpPr/>
+        <p:nvPr/>
+      </p:nvGrpSpPr>
+      <p:grpSpPr>
+        <a:xfrm>
+          <a:off x="0" y="0"/>
+          <a:ext cx="0" cy="0"/>
+          <a:chOff x="0" y="0"/>
+          <a:chExt cx="0" cy="0"/>
+        </a:xfrm>
+      </p:grpSpPr>
+      <p:sp>
+        <p:nvSpPr>
+          <p:cNvPr id="2" name="Slide Image Placeholder 1"/>
+          <p:cNvSpPr>
+            <a:spLocks noGrp="1" noRot="1" noChangeAspect="1"/>
+          </p:cNvSpPr>
+          <p:nvPr>
+            <p:ph type="sldImg"/>
+          </p:nvPr>
+        </p:nvSpPr>
+        <p:spPr/>
+      </p:sp>
+      <p:sp>
+        <p:nvSpPr>
+          <p:cNvPr id="3" name="Notes Placeholder 2"/>
+          <p:cNvSpPr>
+            <a:spLocks noGrp="1"/>
+          </p:cNvSpPr>
+          <p:nvPr>
+            <p:ph type="body" idx="1"/>
+          </p:nvPr>
+        </p:nvSpPr>
+        <p:spPr/>
+        <p:txBody>
+          <a:bodyPr/>
+          <a:lstStyle/>
+          <a:p>
+            <a:r>
+              <a:rPr lang="en-US" dirty="0"/>
+              <a:t/>
+            </a:r>
+            <a:endParaRPr lang="en-US" dirty="0"/>
+          </a:p>
+        </p:txBody>
+      </p:sp>
+      <p:sp>
+        <p:nvSpPr>
+          <p:cNvPr id="4" name="Slide Number Placeholder 3"/>
+          <p:cNvSpPr>
+            <a:spLocks noGrp="1"/>
+          </p:cNvSpPr>
+          <p:nvPr>
+            <p:ph type="sldNum" sz="quarter" idx="10"/>
+          </p:nvPr>
+        </p:nvSpPr>
+        <p:spPr/>
+        <p:txBody>
+          <a:bodyPr/>
+          <a:lstStyle/>
+          <a:p>
+            <a:fld id="{F7021451-1387-4CA6-816F-3879F97B5CBC}" type="slidenum">
+              <a:rPr lang="en-US"/>
+              <a:t>14</a:t>
+            </a:fld>
+            <a:endParaRPr lang="en-US"/>
+          </a:p>
+        </p:txBody>
+      </p:sp>
+    </p:spTree>
+    <p:extLst>
+      <p:ext uri="{BB962C8B-B14F-4D97-AF65-F5344CB8AC3E}">
+        <p14:creationId xmlns:p14="http://schemas.microsoft.com/office/powerpoint/2010/main" val="1024086991"/>
+      </p:ext>
+    </p:extLst>
+  </p:cSld>
+  <p:clrMapOvr>
+    <a:masterClrMapping/>
+  </p:clrMapOvr>
+</p:notes>
+</file>
+
+<file path=ppt/notesSlides/notesSlide15.xml><?xml version="1.0" encoding="utf-8"?>
+<p:notes xmlns:a="http://schemas.openxmlformats.org/drawingml/2006/main" xmlns:r="http://schemas.openxmlformats.org/officeDocument/2006/relationships" xmlns:p="http://schemas.openxmlformats.org/presentationml/2006/main">
+  <p:cSld>
+    <p:spTree>
+      <p:nvGrpSpPr>
+        <p:cNvPr id="1" name=""/>
+        <p:cNvGrpSpPr/>
+        <p:nvPr/>
+      </p:nvGrpSpPr>
+      <p:grpSpPr>
+        <a:xfrm>
+          <a:off x="0" y="0"/>
+          <a:ext cx="0" cy="0"/>
+          <a:chOff x="0" y="0"/>
+          <a:chExt cx="0" cy="0"/>
+        </a:xfrm>
+      </p:grpSpPr>
+      <p:sp>
+        <p:nvSpPr>
+          <p:cNvPr id="2" name="Slide Image Placeholder 1"/>
+          <p:cNvSpPr>
+            <a:spLocks noGrp="1" noRot="1" noChangeAspect="1"/>
+          </p:cNvSpPr>
+          <p:nvPr>
+            <p:ph type="sldImg"/>
+          </p:nvPr>
+        </p:nvSpPr>
+        <p:spPr/>
+      </p:sp>
+      <p:sp>
+        <p:nvSpPr>
+          <p:cNvPr id="3" name="Notes Placeholder 2"/>
+          <p:cNvSpPr>
+            <a:spLocks noGrp="1"/>
+          </p:cNvSpPr>
+          <p:nvPr>
+            <p:ph type="body" idx="1"/>
+          </p:nvPr>
+        </p:nvSpPr>
+        <p:spPr/>
+        <p:txBody>
+          <a:bodyPr/>
+          <a:lstStyle/>
+          <a:p>
+            <a:r>
+              <a:rPr lang="en-US" dirty="0"/>
+              <a:t/>
+            </a:r>
+            <a:endParaRPr lang="en-US" dirty="0"/>
+          </a:p>
+        </p:txBody>
+      </p:sp>
+      <p:sp>
+        <p:nvSpPr>
+          <p:cNvPr id="4" name="Slide Number Placeholder 3"/>
+          <p:cNvSpPr>
+            <a:spLocks noGrp="1"/>
+          </p:cNvSpPr>
+          <p:nvPr>
+            <p:ph type="sldNum" sz="quarter" idx="10"/>
+          </p:nvPr>
+        </p:nvSpPr>
+        <p:spPr/>
+        <p:txBody>
+          <a:bodyPr/>
+          <a:lstStyle/>
+          <a:p>
+            <a:fld id="{F7021451-1387-4CA6-816F-3879F97B5CBC}" type="slidenum">
+              <a:rPr lang="en-US"/>
+              <a:t>15</a:t>
+            </a:fld>
+            <a:endParaRPr lang="en-US"/>
+          </a:p>
+        </p:txBody>
+      </p:sp>
+    </p:spTree>
+    <p:extLst>
+      <p:ext uri="{BB962C8B-B14F-4D97-AF65-F5344CB8AC3E}">
+        <p14:creationId xmlns:p14="http://schemas.microsoft.com/office/powerpoint/2010/main" val="1024086991"/>
+      </p:ext>
+    </p:extLst>
+  </p:cSld>
+  <p:clrMapOvr>
+    <a:masterClrMapping/>
+  </p:clrMapOvr>
+</p:notes>
+</file>
+
+<file path=ppt/notesSlides/notesSlide16.xml><?xml version="1.0" encoding="utf-8"?>
+<p:notes xmlns:a="http://schemas.openxmlformats.org/drawingml/2006/main" xmlns:r="http://schemas.openxmlformats.org/officeDocument/2006/relationships" xmlns:p="http://schemas.openxmlformats.org/presentationml/2006/main">
+  <p:cSld>
+    <p:spTree>
+      <p:nvGrpSpPr>
+        <p:cNvPr id="1" name=""/>
+        <p:cNvGrpSpPr/>
+        <p:nvPr/>
+      </p:nvGrpSpPr>
+      <p:grpSpPr>
+        <a:xfrm>
+          <a:off x="0" y="0"/>
+          <a:ext cx="0" cy="0"/>
+          <a:chOff x="0" y="0"/>
+          <a:chExt cx="0" cy="0"/>
+        </a:xfrm>
+      </p:grpSpPr>
+      <p:sp>
+        <p:nvSpPr>
+          <p:cNvPr id="2" name="Slide Image Placeholder 1"/>
+          <p:cNvSpPr>
+            <a:spLocks noGrp="1" noRot="1" noChangeAspect="1"/>
+          </p:cNvSpPr>
+          <p:nvPr>
+            <p:ph type="sldImg"/>
+          </p:nvPr>
+        </p:nvSpPr>
+        <p:spPr/>
+      </p:sp>
+      <p:sp>
+        <p:nvSpPr>
+          <p:cNvPr id="3" name="Notes Placeholder 2"/>
+          <p:cNvSpPr>
+            <a:spLocks noGrp="1"/>
+          </p:cNvSpPr>
+          <p:nvPr>
+            <p:ph type="body" idx="1"/>
+          </p:nvPr>
+        </p:nvSpPr>
+        <p:spPr/>
+        <p:txBody>
+          <a:bodyPr/>
+          <a:lstStyle/>
+          <a:p>
+            <a:r>
+              <a:rPr lang="en-US" dirty="0"/>
+              <a:t/>
+            </a:r>
+            <a:endParaRPr lang="en-US" dirty="0"/>
+          </a:p>
+        </p:txBody>
+      </p:sp>
+      <p:sp>
+        <p:nvSpPr>
+          <p:cNvPr id="4" name="Slide Number Placeholder 3"/>
+          <p:cNvSpPr>
+            <a:spLocks noGrp="1"/>
+          </p:cNvSpPr>
+          <p:nvPr>
+            <p:ph type="sldNum" sz="quarter" idx="10"/>
+          </p:nvPr>
+        </p:nvSpPr>
+        <p:spPr/>
+        <p:txBody>
+          <a:bodyPr/>
+          <a:lstStyle/>
+          <a:p>
+            <a:fld id="{F7021451-1387-4CA6-816F-3879F97B5CBC}" type="slidenum">
+              <a:rPr lang="en-US"/>
+              <a:t>16</a:t>
+            </a:fld>
+            <a:endParaRPr lang="en-US"/>
+          </a:p>
+        </p:txBody>
+      </p:sp>
+    </p:spTree>
+    <p:extLst>
+      <p:ext uri="{BB962C8B-B14F-4D97-AF65-F5344CB8AC3E}">
+        <p14:creationId xmlns:p14="http://schemas.microsoft.com/office/powerpoint/2010/main" val="1024086991"/>
+      </p:ext>
+    </p:extLst>
+  </p:cSld>
+  <p:clrMapOvr>
+    <a:masterClrMapping/>
+  </p:clrMapOvr>
+</p:notes>
+</file>
+
+<file path=ppt/notesSlides/notesSlide17.xml><?xml version="1.0" encoding="utf-8"?>
+<p:notes xmlns:a="http://schemas.openxmlformats.org/drawingml/2006/main" xmlns:r="http://schemas.openxmlformats.org/officeDocument/2006/relationships" xmlns:p="http://schemas.openxmlformats.org/presentationml/2006/main">
+  <p:cSld>
+    <p:spTree>
+      <p:nvGrpSpPr>
+        <p:cNvPr id="1" name=""/>
+        <p:cNvGrpSpPr/>
+        <p:nvPr/>
+      </p:nvGrpSpPr>
+      <p:grpSpPr>
+        <a:xfrm>
+          <a:off x="0" y="0"/>
+          <a:ext cx="0" cy="0"/>
+          <a:chOff x="0" y="0"/>
+          <a:chExt cx="0" cy="0"/>
+        </a:xfrm>
+      </p:grpSpPr>
+      <p:sp>
+        <p:nvSpPr>
+          <p:cNvPr id="2" name="Slide Image Placeholder 1"/>
+          <p:cNvSpPr>
+            <a:spLocks noGrp="1" noRot="1" noChangeAspect="1"/>
+          </p:cNvSpPr>
+          <p:nvPr>
+            <p:ph type="sldImg"/>
+          </p:nvPr>
+        </p:nvSpPr>
+        <p:spPr/>
+      </p:sp>
+      <p:sp>
+        <p:nvSpPr>
+          <p:cNvPr id="3" name="Notes Placeholder 2"/>
+          <p:cNvSpPr>
+            <a:spLocks noGrp="1"/>
+          </p:cNvSpPr>
+          <p:nvPr>
+            <p:ph type="body" idx="1"/>
+          </p:nvPr>
+        </p:nvSpPr>
+        <p:spPr/>
+        <p:txBody>
+          <a:bodyPr/>
+          <a:lstStyle/>
+          <a:p>
+            <a:r>
+              <a:rPr lang="en-US" dirty="0"/>
+              <a:t/>
+            </a:r>
+            <a:endParaRPr lang="en-US" dirty="0"/>
+          </a:p>
+        </p:txBody>
+      </p:sp>
+      <p:sp>
+        <p:nvSpPr>
+          <p:cNvPr id="4" name="Slide Number Placeholder 3"/>
+          <p:cNvSpPr>
+            <a:spLocks noGrp="1"/>
+          </p:cNvSpPr>
+          <p:nvPr>
+            <p:ph type="sldNum" sz="quarter" idx="10"/>
+          </p:nvPr>
+        </p:nvSpPr>
+        <p:spPr/>
+        <p:txBody>
+          <a:bodyPr/>
+          <a:lstStyle/>
+          <a:p>
+            <a:fld id="{F7021451-1387-4CA6-816F-3879F97B5CBC}" type="slidenum">
+              <a:rPr lang="en-US"/>
+              <a:t>17</a:t>
+            </a:fld>
+            <a:endParaRPr lang="en-US"/>
+          </a:p>
+        </p:txBody>
+      </p:sp>
+    </p:spTree>
+    <p:extLst>
+      <p:ext uri="{BB962C8B-B14F-4D97-AF65-F5344CB8AC3E}">
+        <p14:creationId xmlns:p14="http://schemas.microsoft.com/office/powerpoint/2010/main" val="1024086991"/>
+      </p:ext>
+    </p:extLst>
+  </p:cSld>
+  <p:clrMapOvr>
+    <a:masterClrMapping/>
+  </p:clrMapOvr>
+</p:notes>
+</file>
+
+<file path=ppt/notesSlides/notesSlide18.xml><?xml version="1.0" encoding="utf-8"?>
+<p:notes xmlns:a="http://schemas.openxmlformats.org/drawingml/2006/main" xmlns:r="http://schemas.openxmlformats.org/officeDocument/2006/relationships" xmlns:p="http://schemas.openxmlformats.org/presentationml/2006/main">
+  <p:cSld>
+    <p:spTree>
+      <p:nvGrpSpPr>
+        <p:cNvPr id="1" name=""/>
+        <p:cNvGrpSpPr/>
+        <p:nvPr/>
+      </p:nvGrpSpPr>
+      <p:grpSpPr>
+        <a:xfrm>
+          <a:off x="0" y="0"/>
+          <a:ext cx="0" cy="0"/>
+          <a:chOff x="0" y="0"/>
+          <a:chExt cx="0" cy="0"/>
+        </a:xfrm>
+      </p:grpSpPr>
+      <p:sp>
+        <p:nvSpPr>
+          <p:cNvPr id="2" name="Slide Image Placeholder 1"/>
+          <p:cNvSpPr>
+            <a:spLocks noGrp="1" noRot="1" noChangeAspect="1"/>
+          </p:cNvSpPr>
+          <p:nvPr>
+            <p:ph type="sldImg"/>
+          </p:nvPr>
+        </p:nvSpPr>
+        <p:spPr/>
+      </p:sp>
+      <p:sp>
+        <p:nvSpPr>
+          <p:cNvPr id="3" name="Notes Placeholder 2"/>
+          <p:cNvSpPr>
+            <a:spLocks noGrp="1"/>
+          </p:cNvSpPr>
+          <p:nvPr>
+            <p:ph type="body" idx="1"/>
+          </p:nvPr>
+        </p:nvSpPr>
+        <p:spPr/>
+        <p:txBody>
+          <a:bodyPr/>
+          <a:lstStyle/>
+          <a:p>
+            <a:r>
+              <a:rPr lang="en-US" dirty="0"/>
+              <a:t/>
+            </a:r>
+            <a:endParaRPr lang="en-US" dirty="0"/>
+          </a:p>
+        </p:txBody>
+      </p:sp>
+      <p:sp>
+        <p:nvSpPr>
+          <p:cNvPr id="4" name="Slide Number Placeholder 3"/>
+          <p:cNvSpPr>
+            <a:spLocks noGrp="1"/>
+          </p:cNvSpPr>
+          <p:nvPr>
+            <p:ph type="sldNum" sz="quarter" idx="10"/>
+          </p:nvPr>
+        </p:nvSpPr>
+        <p:spPr/>
+        <p:txBody>
+          <a:bodyPr/>
+          <a:lstStyle/>
+          <a:p>
+            <a:fld id="{F7021451-1387-4CA6-816F-3879F97B5CBC}" type="slidenum">
+              <a:rPr lang="en-US"/>
+              <a:t>18</a:t>
+            </a:fld>
+            <a:endParaRPr lang="en-US"/>
+          </a:p>
+        </p:txBody>
+      </p:sp>
+    </p:spTree>
+    <p:extLst>
+      <p:ext uri="{BB962C8B-B14F-4D97-AF65-F5344CB8AC3E}">
+        <p14:creationId xmlns:p14="http://schemas.microsoft.com/office/powerpoint/2010/main" val="1024086991"/>
+      </p:ext>
+    </p:extLst>
+  </p:cSld>
+  <p:clrMapOvr>
+    <a:masterClrMapping/>
+  </p:clrMapOvr>
+</p:notes>
+</file>
+
+<file path=ppt/notesSlides/notesSlide19.xml><?xml version="1.0" encoding="utf-8"?>
+<p:notes xmlns:a="http://schemas.openxmlformats.org/drawingml/2006/main" xmlns:r="http://schemas.openxmlformats.org/officeDocument/2006/relationships" xmlns:p="http://schemas.openxmlformats.org/presentationml/2006/main">
+  <p:cSld>
+    <p:spTree>
+      <p:nvGrpSpPr>
+        <p:cNvPr id="1" name=""/>
+        <p:cNvGrpSpPr/>
+        <p:nvPr/>
+      </p:nvGrpSpPr>
+      <p:grpSpPr>
+        <a:xfrm>
+          <a:off x="0" y="0"/>
+          <a:ext cx="0" cy="0"/>
+          <a:chOff x="0" y="0"/>
+          <a:chExt cx="0" cy="0"/>
+        </a:xfrm>
+      </p:grpSpPr>
+      <p:sp>
+        <p:nvSpPr>
+          <p:cNvPr id="2" name="Slide Image Placeholder 1"/>
+          <p:cNvSpPr>
+            <a:spLocks noGrp="1" noRot="1" noChangeAspect="1"/>
+          </p:cNvSpPr>
+          <p:nvPr>
+            <p:ph type="sldImg"/>
+          </p:nvPr>
+        </p:nvSpPr>
+        <p:spPr/>
+      </p:sp>
+      <p:sp>
+        <p:nvSpPr>
+          <p:cNvPr id="3" name="Notes Placeholder 2"/>
+          <p:cNvSpPr>
+            <a:spLocks noGrp="1"/>
+          </p:cNvSpPr>
+          <p:nvPr>
+            <p:ph type="body" idx="1"/>
+          </p:nvPr>
+        </p:nvSpPr>
+        <p:spPr/>
+        <p:txBody>
+          <a:bodyPr/>
+          <a:lstStyle/>
+          <a:p>
+            <a:r>
+              <a:rPr lang="en-US" dirty="0"/>
+              <a:t/>
+            </a:r>
+            <a:endParaRPr lang="en-US" dirty="0"/>
+          </a:p>
+        </p:txBody>
+      </p:sp>
+      <p:sp>
+        <p:nvSpPr>
+          <p:cNvPr id="4" name="Slide Number Placeholder 3"/>
+          <p:cNvSpPr>
+            <a:spLocks noGrp="1"/>
+          </p:cNvSpPr>
+          <p:nvPr>
+            <p:ph type="sldNum" sz="quarter" idx="10"/>
+          </p:nvPr>
+        </p:nvSpPr>
+        <p:spPr/>
+        <p:txBody>
+          <a:bodyPr/>
+          <a:lstStyle/>
+          <a:p>
+            <a:fld id="{F7021451-1387-4CA6-816F-3879F97B5CBC}" type="slidenum">
+              <a:rPr lang="en-US"/>
+              <a:t>19</a:t>
+            </a:fld>
+            <a:endParaRPr lang="en-US"/>
+          </a:p>
+        </p:txBody>
+      </p:sp>
+    </p:spTree>
+    <p:extLst>
+      <p:ext uri="{BB962C8B-B14F-4D97-AF65-F5344CB8AC3E}">
+        <p14:creationId xmlns:p14="http://schemas.microsoft.com/office/powerpoint/2010/main" val="1024086991"/>
+      </p:ext>
+    </p:extLst>
+  </p:cSld>
+  <p:clrMapOvr>
+    <a:masterClrMapping/>
+  </p:clrMapOvr>
+</p:notes>
+</file>
+
 <file path=ppt/notesSlides/notesSlide2.xml><?xml version="1.0" encoding="utf-8"?>
 <p:notes xmlns:a="http://schemas.openxmlformats.org/drawingml/2006/main" xmlns:r="http://schemas.openxmlformats.org/officeDocument/2006/relationships" xmlns:p="http://schemas.openxmlformats.org/presentationml/2006/main">
   <p:cSld>
@@ -889,6 +1515,270 @@
             <a:fld id="{F7021451-1387-4CA6-816F-3879F97B5CBC}" type="slidenum">
               <a:rPr lang="en-US"/>
               <a:t>2</a:t>
+            </a:fld>
+            <a:endParaRPr lang="en-US"/>
+          </a:p>
+        </p:txBody>
+      </p:sp>
+    </p:spTree>
+    <p:extLst>
+      <p:ext uri="{BB962C8B-B14F-4D97-AF65-F5344CB8AC3E}">
+        <p14:creationId xmlns:p14="http://schemas.microsoft.com/office/powerpoint/2010/main" val="1024086991"/>
+      </p:ext>
+    </p:extLst>
+  </p:cSld>
+  <p:clrMapOvr>
+    <a:masterClrMapping/>
+  </p:clrMapOvr>
+</p:notes>
+</file>
+
+<file path=ppt/notesSlides/notesSlide20.xml><?xml version="1.0" encoding="utf-8"?>
+<p:notes xmlns:a="http://schemas.openxmlformats.org/drawingml/2006/main" xmlns:r="http://schemas.openxmlformats.org/officeDocument/2006/relationships" xmlns:p="http://schemas.openxmlformats.org/presentationml/2006/main">
+  <p:cSld>
+    <p:spTree>
+      <p:nvGrpSpPr>
+        <p:cNvPr id="1" name=""/>
+        <p:cNvGrpSpPr/>
+        <p:nvPr/>
+      </p:nvGrpSpPr>
+      <p:grpSpPr>
+        <a:xfrm>
+          <a:off x="0" y="0"/>
+          <a:ext cx="0" cy="0"/>
+          <a:chOff x="0" y="0"/>
+          <a:chExt cx="0" cy="0"/>
+        </a:xfrm>
+      </p:grpSpPr>
+      <p:sp>
+        <p:nvSpPr>
+          <p:cNvPr id="2" name="Slide Image Placeholder 1"/>
+          <p:cNvSpPr>
+            <a:spLocks noGrp="1" noRot="1" noChangeAspect="1"/>
+          </p:cNvSpPr>
+          <p:nvPr>
+            <p:ph type="sldImg"/>
+          </p:nvPr>
+        </p:nvSpPr>
+        <p:spPr/>
+      </p:sp>
+      <p:sp>
+        <p:nvSpPr>
+          <p:cNvPr id="3" name="Notes Placeholder 2"/>
+          <p:cNvSpPr>
+            <a:spLocks noGrp="1"/>
+          </p:cNvSpPr>
+          <p:nvPr>
+            <p:ph type="body" idx="1"/>
+          </p:nvPr>
+        </p:nvSpPr>
+        <p:spPr/>
+        <p:txBody>
+          <a:bodyPr/>
+          <a:lstStyle/>
+          <a:p>
+            <a:r>
+              <a:rPr lang="en-US" dirty="0"/>
+              <a:t/>
+            </a:r>
+            <a:endParaRPr lang="en-US" dirty="0"/>
+          </a:p>
+        </p:txBody>
+      </p:sp>
+      <p:sp>
+        <p:nvSpPr>
+          <p:cNvPr id="4" name="Slide Number Placeholder 3"/>
+          <p:cNvSpPr>
+            <a:spLocks noGrp="1"/>
+          </p:cNvSpPr>
+          <p:nvPr>
+            <p:ph type="sldNum" sz="quarter" idx="10"/>
+          </p:nvPr>
+        </p:nvSpPr>
+        <p:spPr/>
+        <p:txBody>
+          <a:bodyPr/>
+          <a:lstStyle/>
+          <a:p>
+            <a:fld id="{F7021451-1387-4CA6-816F-3879F97B5CBC}" type="slidenum">
+              <a:rPr lang="en-US"/>
+              <a:t>20</a:t>
+            </a:fld>
+            <a:endParaRPr lang="en-US"/>
+          </a:p>
+        </p:txBody>
+      </p:sp>
+    </p:spTree>
+    <p:extLst>
+      <p:ext uri="{BB962C8B-B14F-4D97-AF65-F5344CB8AC3E}">
+        <p14:creationId xmlns:p14="http://schemas.microsoft.com/office/powerpoint/2010/main" val="1024086991"/>
+      </p:ext>
+    </p:extLst>
+  </p:cSld>
+  <p:clrMapOvr>
+    <a:masterClrMapping/>
+  </p:clrMapOvr>
+</p:notes>
+</file>
+
+<file path=ppt/notesSlides/notesSlide21.xml><?xml version="1.0" encoding="utf-8"?>
+<p:notes xmlns:a="http://schemas.openxmlformats.org/drawingml/2006/main" xmlns:r="http://schemas.openxmlformats.org/officeDocument/2006/relationships" xmlns:p="http://schemas.openxmlformats.org/presentationml/2006/main">
+  <p:cSld>
+    <p:spTree>
+      <p:nvGrpSpPr>
+        <p:cNvPr id="1" name=""/>
+        <p:cNvGrpSpPr/>
+        <p:nvPr/>
+      </p:nvGrpSpPr>
+      <p:grpSpPr>
+        <a:xfrm>
+          <a:off x="0" y="0"/>
+          <a:ext cx="0" cy="0"/>
+          <a:chOff x="0" y="0"/>
+          <a:chExt cx="0" cy="0"/>
+        </a:xfrm>
+      </p:grpSpPr>
+      <p:sp>
+        <p:nvSpPr>
+          <p:cNvPr id="2" name="Slide Image Placeholder 1"/>
+          <p:cNvSpPr>
+            <a:spLocks noGrp="1" noRot="1" noChangeAspect="1"/>
+          </p:cNvSpPr>
+          <p:nvPr>
+            <p:ph type="sldImg"/>
+          </p:nvPr>
+        </p:nvSpPr>
+        <p:spPr/>
+      </p:sp>
+      <p:sp>
+        <p:nvSpPr>
+          <p:cNvPr id="3" name="Notes Placeholder 2"/>
+          <p:cNvSpPr>
+            <a:spLocks noGrp="1"/>
+          </p:cNvSpPr>
+          <p:nvPr>
+            <p:ph type="body" idx="1"/>
+          </p:nvPr>
+        </p:nvSpPr>
+        <p:spPr/>
+        <p:txBody>
+          <a:bodyPr/>
+          <a:lstStyle/>
+          <a:p>
+            <a:r>
+              <a:rPr lang="en-US" dirty="0"/>
+              <a:t/>
+            </a:r>
+            <a:endParaRPr lang="en-US" dirty="0"/>
+          </a:p>
+        </p:txBody>
+      </p:sp>
+      <p:sp>
+        <p:nvSpPr>
+          <p:cNvPr id="4" name="Slide Number Placeholder 3"/>
+          <p:cNvSpPr>
+            <a:spLocks noGrp="1"/>
+          </p:cNvSpPr>
+          <p:nvPr>
+            <p:ph type="sldNum" sz="quarter" idx="10"/>
+          </p:nvPr>
+        </p:nvSpPr>
+        <p:spPr/>
+        <p:txBody>
+          <a:bodyPr/>
+          <a:lstStyle/>
+          <a:p>
+            <a:fld id="{F7021451-1387-4CA6-816F-3879F97B5CBC}" type="slidenum">
+              <a:rPr lang="en-US"/>
+              <a:t>21</a:t>
+            </a:fld>
+            <a:endParaRPr lang="en-US"/>
+          </a:p>
+        </p:txBody>
+      </p:sp>
+    </p:spTree>
+    <p:extLst>
+      <p:ext uri="{BB962C8B-B14F-4D97-AF65-F5344CB8AC3E}">
+        <p14:creationId xmlns:p14="http://schemas.microsoft.com/office/powerpoint/2010/main" val="1024086991"/>
+      </p:ext>
+    </p:extLst>
+  </p:cSld>
+  <p:clrMapOvr>
+    <a:masterClrMapping/>
+  </p:clrMapOvr>
+</p:notes>
+</file>
+
+<file path=ppt/notesSlides/notesSlide22.xml><?xml version="1.0" encoding="utf-8"?>
+<p:notes xmlns:a="http://schemas.openxmlformats.org/drawingml/2006/main" xmlns:r="http://schemas.openxmlformats.org/officeDocument/2006/relationships" xmlns:p="http://schemas.openxmlformats.org/presentationml/2006/main">
+  <p:cSld>
+    <p:spTree>
+      <p:nvGrpSpPr>
+        <p:cNvPr id="1" name=""/>
+        <p:cNvGrpSpPr/>
+        <p:nvPr/>
+      </p:nvGrpSpPr>
+      <p:grpSpPr>
+        <a:xfrm>
+          <a:off x="0" y="0"/>
+          <a:ext cx="0" cy="0"/>
+          <a:chOff x="0" y="0"/>
+          <a:chExt cx="0" cy="0"/>
+        </a:xfrm>
+      </p:grpSpPr>
+      <p:sp>
+        <p:nvSpPr>
+          <p:cNvPr id="2" name="Slide Image Placeholder 1"/>
+          <p:cNvSpPr>
+            <a:spLocks noGrp="1" noRot="1" noChangeAspect="1"/>
+          </p:cNvSpPr>
+          <p:nvPr>
+            <p:ph type="sldImg"/>
+          </p:nvPr>
+        </p:nvSpPr>
+        <p:spPr/>
+      </p:sp>
+      <p:sp>
+        <p:nvSpPr>
+          <p:cNvPr id="3" name="Notes Placeholder 2"/>
+          <p:cNvSpPr>
+            <a:spLocks noGrp="1"/>
+          </p:cNvSpPr>
+          <p:nvPr>
+            <p:ph type="body" idx="1"/>
+          </p:nvPr>
+        </p:nvSpPr>
+        <p:spPr/>
+        <p:txBody>
+          <a:bodyPr/>
+          <a:lstStyle/>
+          <a:p>
+            <a:r>
+              <a:rPr lang="en-US" dirty="0"/>
+              <a:t/>
+            </a:r>
+            <a:endParaRPr lang="en-US" dirty="0"/>
+          </a:p>
+        </p:txBody>
+      </p:sp>
+      <p:sp>
+        <p:nvSpPr>
+          <p:cNvPr id="4" name="Slide Number Placeholder 3"/>
+          <p:cNvSpPr>
+            <a:spLocks noGrp="1"/>
+          </p:cNvSpPr>
+          <p:nvPr>
+            <p:ph type="sldNum" sz="quarter" idx="10"/>
+          </p:nvPr>
+        </p:nvSpPr>
+        <p:spPr/>
+        <p:txBody>
+          <a:bodyPr/>
+          <a:lstStyle/>
+          <a:p>
+            <a:fld id="{F7021451-1387-4CA6-816F-3879F97B5CBC}" type="slidenum">
+              <a:rPr lang="en-US"/>
+              <a:t>22</a:t>
             </a:fld>
             <a:endParaRPr lang="en-US"/>
           </a:p>
@@ -2140,148 +3030,6 @@
         </p:nvSpPr>
         <p:spPr>
           <a:xfrm>
-            <a:off x="406301" y="1223963"/>
-            <a:ext cx="8498026" cy="274290"/>
-          </a:xfrm>
-          <a:prstGeom prst="rect">
-            <a:avLst/>
-          </a:prstGeom>
-          <a:noFill/>
-          <a:ln/>
-        </p:spPr>
-        <p:txBody>
-          <a:bodyPr wrap="square" lIns="0" tIns="0" rIns="0" bIns="0" rtlCol="0" anchor="t"/>
-          <a:lstStyle/>
-          <a:p>
-            <a:pPr algn="l" indent="0" marL="0">
-              <a:lnSpc>
-                <a:spcPts val="2160"/>
-              </a:lnSpc>
-              <a:spcBef>
-                <a:spcPts val="600"/>
-              </a:spcBef>
-              <a:spcAft>
-                <a:spcPts val="800"/>
-              </a:spcAft>
-              <a:buNone/>
-            </a:pPr>
-            <a:r>
-              <a:rPr lang="en-US" sz="1800" b="1" dirty="0">
-                <a:solidFill>
-                  <a:srgbClr val="FE4447"/>
-                </a:solidFill>
-                <a:latin typeface="Georgia" pitchFamily="34" charset="0"/>
-                <a:ea typeface="Georgia" pitchFamily="34" charset="-122"/>
-                <a:cs typeface="Georgia" pitchFamily="34" charset="-120"/>
-              </a:rPr>
-              <a:t>Learning objective</a:t>
-            </a:r>
-            <a:endParaRPr lang="en-US" sz="1800" dirty="0"/>
-          </a:p>
-        </p:txBody>
-      </p:sp>
-      <p:sp>
-        <p:nvSpPr>
-          <p:cNvPr id="6" name="Text 4"/>
-          <p:cNvSpPr/>
-          <p:nvPr/>
-        </p:nvSpPr>
-        <p:spPr>
-          <a:xfrm>
-            <a:off x="406301" y="1637854"/>
-            <a:ext cx="8498026" cy="426541"/>
-          </a:xfrm>
-          <a:prstGeom prst="rect">
-            <a:avLst/>
-          </a:prstGeom>
-          <a:noFill/>
-          <a:ln/>
-        </p:spPr>
-        <p:txBody>
-          <a:bodyPr wrap="square" lIns="0" tIns="0" rIns="0" bIns="0" rtlCol="0" anchor="t"/>
-          <a:lstStyle/>
-          <a:p>
-            <a:pPr algn="l" indent="0" marL="0">
-              <a:lnSpc>
-                <a:spcPts val="1680"/>
-              </a:lnSpc>
-              <a:spcBef>
-                <a:spcPts val="300"/>
-              </a:spcBef>
-              <a:spcAft>
-                <a:spcPts val="300"/>
-              </a:spcAft>
-              <a:buNone/>
-            </a:pPr>
-            <a:r>
-              <a:rPr lang="en-US" sz="1200" dirty="0">
-                <a:solidFill>
-                  <a:srgbClr val="1C2833"/>
-                </a:solidFill>
-                <a:latin typeface="Arial" pitchFamily="34" charset="0"/>
-                <a:ea typeface="Arial" pitchFamily="34" charset="-122"/>
-                <a:cs typeface="Arial" pitchFamily="34" charset="-120"/>
-              </a:rPr>
-              <a:t>Students recite </a:t>
-            </a:r>
-            <a:pPr algn="l" indent="0" marL="0">
-              <a:lnSpc>
-                <a:spcPts val="1680"/>
-              </a:lnSpc>
-              <a:spcBef>
-                <a:spcPts val="300"/>
-              </a:spcBef>
-              <a:spcAft>
-                <a:spcPts val="300"/>
-              </a:spcAft>
-              <a:buNone/>
-            </a:pPr>
-            <a:r>
-              <a:rPr lang="en-US" sz="1200" i="1" dirty="0">
-                <a:solidFill>
-                  <a:srgbClr val="1C2833"/>
-                </a:solidFill>
-                <a:latin typeface="Arial" pitchFamily="34" charset="0"/>
-                <a:ea typeface="Arial" pitchFamily="34" charset="-122"/>
-                <a:cs typeface="Arial" pitchFamily="34" charset="-120"/>
-              </a:rPr>
-              <a:t>Iṣopaniṣad</a:t>
-            </a:r>
-            <a:pPr algn="l" indent="0" marL="0">
-              <a:lnSpc>
-                <a:spcPts val="1680"/>
-              </a:lnSpc>
-              <a:spcBef>
-                <a:spcPts val="300"/>
-              </a:spcBef>
-              <a:spcAft>
-                <a:spcPts val="300"/>
-              </a:spcAft>
-              <a:buNone/>
-            </a:pPr>
-            <a:r>
-              <a:rPr lang="en-US" sz="1200" dirty="0">
-                <a:solidFill>
-                  <a:srgbClr val="1C2833"/>
-                </a:solidFill>
-                <a:latin typeface="Arial" pitchFamily="34" charset="0"/>
-                <a:ea typeface="Arial" pitchFamily="34" charset="-122"/>
-                <a:cs typeface="Arial" pitchFamily="34" charset="-120"/>
-              </a:rPr>
-              <a:t> mantra 1, identify the three injunctions it contains (treat all as enveloped by the divine; enjoy by renouncing; do not covet), and apply the "use, don't grab" ethic to one specific consumption habit of their own.</a:t>
-            </a:r>
-            <a:endParaRPr lang="en-US" sz="1200" dirty="0"/>
-          </a:p>
-        </p:txBody>
-      </p:sp>
-      <p:sp>
-        <p:nvSpPr>
-          <p:cNvPr id="7" name="Text 5"/>
-          <p:cNvSpPr/>
-          <p:nvPr/>
-        </p:nvSpPr>
-        <p:spPr>
-          <a:xfrm>
             <a:off x="406301" y="4434929"/>
             <a:ext cx="8498026" cy="213271"/>
           </a:xfrm>
@@ -2426,7 +3174,7 @@
                 <a:ea typeface="Georgia" pitchFamily="34" charset="-122"/>
                 <a:cs typeface="Georgia" pitchFamily="34" charset="-120"/>
               </a:rPr>
-              <a:t>Differentiation</a:t>
+              <a:t>Core (20 min) (cont.)</a:t>
             </a:r>
             <a:endParaRPr lang="en-US" sz="1800" dirty="0"/>
           </a:p>
@@ -2441,7 +3189,7 @@
         <p:spPr>
           <a:xfrm>
             <a:off x="634901" y="883593"/>
-            <a:ext cx="8102798" cy="1142702"/>
+            <a:ext cx="8102798" cy="487561"/>
           </a:xfrm>
           <a:prstGeom prst="rect">
             <a:avLst/>
@@ -2463,16 +3211,25 @@
               <a:buSzPct val="100000"/>
               <a:buChar char="•"/>
             </a:pPr>
-            <a:r>
-              <a:rPr lang="en-US" sz="1200" b="1" dirty="0">
-                <a:solidFill>
-                  <a:srgbClr val="1C2833"/>
-                </a:solidFill>
-                <a:latin typeface="Arial" pitchFamily="34" charset="0"/>
-                <a:ea typeface="Arial" pitchFamily="34" charset="-122"/>
-                <a:cs typeface="Arial" pitchFamily="34" charset="-120"/>
-              </a:rPr>
-              <a:t>One tier up:</a:t>
+            <a:pPr algn="l" indent="0" marL="0">
+              <a:lnSpc>
+                <a:spcPts val="1620"/>
+              </a:lnSpc>
+              <a:spcAft>
+                <a:spcPts val="300"/>
+              </a:spcAft>
+              <a:buNone/>
+            </a:pPr>
+            <a:r>
+              <a:rPr lang="en-US" sz="1200" i="1" dirty="0">
+                <a:solidFill>
+                  <a:srgbClr val="1C2833"/>
+                </a:solidFill>
+                <a:latin typeface="Arial" pitchFamily="34" charset="0"/>
+                <a:ea typeface="Arial" pitchFamily="34" charset="-122"/>
+                <a:cs typeface="Arial" pitchFamily="34" charset="-120"/>
+              </a:rPr>
+              <a:t>The phrase</a:t>
             </a:r>
             <a:pPr algn="l" indent="0" marL="0">
               <a:lnSpc>
@@ -2492,50 +3249,32 @@
                 <a:ea typeface="Arial" pitchFamily="34" charset="-122"/>
                 <a:cs typeface="Arial" pitchFamily="34" charset="-120"/>
               </a:rPr>
-              <a:t> Compare </a:t>
-            </a:r>
-            <a:pPr algn="l" indent="0" marL="0">
-              <a:lnSpc>
-                <a:spcPts val="1620"/>
-              </a:lnSpc>
-              <a:spcAft>
-                <a:spcPts val="300"/>
-              </a:spcAft>
-              <a:buNone/>
-            </a:pPr>
-            <a:r>
-              <a:rPr lang="en-US" sz="1200" i="1" dirty="0">
-                <a:solidFill>
-                  <a:srgbClr val="1C2833"/>
-                </a:solidFill>
-                <a:latin typeface="Arial" pitchFamily="34" charset="0"/>
-                <a:ea typeface="Arial" pitchFamily="34" charset="-122"/>
-                <a:cs typeface="Arial" pitchFamily="34" charset="-120"/>
-              </a:rPr>
-              <a:t>tena tyaktena bhuñjīthāḥ</a:t>
-            </a:r>
-            <a:pPr algn="l" indent="0" marL="0">
-              <a:lnSpc>
-                <a:spcPts val="1620"/>
-              </a:lnSpc>
-              <a:spcAft>
-                <a:spcPts val="300"/>
-              </a:spcAft>
-              <a:buNone/>
-            </a:pPr>
-            <a:r>
-              <a:rPr lang="en-US" sz="1200" dirty="0">
-                <a:solidFill>
-                  <a:srgbClr val="1C2833"/>
-                </a:solidFill>
-                <a:latin typeface="Arial" pitchFamily="34" charset="0"/>
-                <a:ea typeface="Arial" pitchFamily="34" charset="-122"/>
-                <a:cs typeface="Arial" pitchFamily="34" charset="-120"/>
-              </a:rPr>
-              <a:t> with the modern concept of "the commons" (a resource shared by a community, with rules against private grabbing). Elinor Ostrom won the 2009 Nobel in Economics for showing how communities self-organise to manage commons. What does the Upaniṣad add that economics doesn't?</a:t>
+              <a:t>tena tyaktena bhuñjīthāḥ*** is the most quoted half-line. Two readings exist among traditional commentators:</a:t>
             </a:r>
             <a:endParaRPr lang="en-US" sz="1200" dirty="0"/>
           </a:p>
+        </p:txBody>
+      </p:sp>
+      <p:sp>
+        <p:nvSpPr>
+          <p:cNvPr id="5" name="Text 3"/>
+          <p:cNvSpPr/>
+          <p:nvPr/>
+        </p:nvSpPr>
+        <p:spPr>
+          <a:xfrm>
+            <a:off x="634901" y="1472654"/>
+            <a:ext cx="8102798" cy="731341"/>
+          </a:xfrm>
+          <a:prstGeom prst="rect">
+            <a:avLst/>
+          </a:prstGeom>
+          <a:noFill/>
+          <a:ln/>
+        </p:spPr>
+        <p:txBody>
+          <a:bodyPr wrap="square" lIns="0" tIns="0" rIns="0" bIns="0" rtlCol="0" anchor="t"/>
+          <a:lstStyle/>
           <a:p>
             <a:pPr algn="l" marL="342900" indent="-342900">
               <a:lnSpc>
@@ -2556,7 +3295,7 @@
                 <a:ea typeface="Arial" pitchFamily="34" charset="-122"/>
                 <a:cs typeface="Arial" pitchFamily="34" charset="-120"/>
               </a:rPr>
-              <a:t>One tier down:</a:t>
+              <a:t>Śaṅkara's reading:</a:t>
             </a:r>
             <a:pPr algn="l" indent="0" marL="0">
               <a:lnSpc>
@@ -2576,12 +3315,107 @@
                 <a:ea typeface="Arial" pitchFamily="34" charset="-122"/>
                 <a:cs typeface="Arial" pitchFamily="34" charset="-120"/>
               </a:rPr>
-              <a:t> Memorise just the second half of the mantra: </a:t>
-            </a:r>
-            <a:pPr algn="l" indent="0" marL="0">
-              <a:lnSpc>
-                <a:spcPts val="1620"/>
-              </a:lnSpc>
+              <a:t> "renounce, then enjoy." First give up the sense of ownership; then use.</a:t>
+            </a:r>
+            <a:endParaRPr lang="en-US" sz="1200" dirty="0"/>
+          </a:p>
+          <a:p>
+            <a:pPr algn="l" marL="342900" indent="-342900">
+              <a:lnSpc>
+                <a:spcPts val="1620"/>
+              </a:lnSpc>
+              <a:spcAft>
+                <a:spcPts val="300"/>
+              </a:spcAft>
+              <a:buSzPct val="100000"/>
+              <a:buChar char="•"/>
+            </a:pPr>
+            <a:r>
+              <a:rPr lang="en-US" sz="1200" b="1" dirty="0">
+                <a:solidFill>
+                  <a:srgbClr val="1C2833"/>
+                </a:solidFill>
+                <a:latin typeface="Arial" pitchFamily="34" charset="0"/>
+                <a:ea typeface="Arial" pitchFamily="34" charset="-122"/>
+                <a:cs typeface="Arial" pitchFamily="34" charset="-120"/>
+              </a:rPr>
+              <a:t>Other commentators:</a:t>
+            </a:r>
+            <a:pPr algn="l" indent="0" marL="0">
+              <a:lnSpc>
+                <a:spcPts val="1620"/>
+              </a:lnSpc>
+              <a:spcAft>
+                <a:spcPts val="300"/>
+              </a:spcAft>
+              <a:buNone/>
+            </a:pPr>
+            <a:r>
+              <a:rPr lang="en-US" sz="1200" dirty="0">
+                <a:solidFill>
+                  <a:srgbClr val="1C2833"/>
+                </a:solidFill>
+                <a:latin typeface="Arial" pitchFamily="34" charset="0"/>
+                <a:ea typeface="Arial" pitchFamily="34" charset="-122"/>
+                <a:cs typeface="Arial" pitchFamily="34" charset="-120"/>
+              </a:rPr>
+              <a:t> "enjoy what is left over." First the gods, the ancestors, and the community get their share; then enjoy what remains.</a:t>
+            </a:r>
+            <a:endParaRPr lang="en-US" sz="1200" dirty="0"/>
+          </a:p>
+        </p:txBody>
+      </p:sp>
+      <p:sp>
+        <p:nvSpPr>
+          <p:cNvPr id="6" name="Text 4"/>
+          <p:cNvSpPr/>
+          <p:nvPr/>
+        </p:nvSpPr>
+        <p:spPr>
+          <a:xfrm>
+            <a:off x="406301" y="2292846"/>
+            <a:ext cx="8498026" cy="213271"/>
+          </a:xfrm>
+          <a:prstGeom prst="rect">
+            <a:avLst/>
+          </a:prstGeom>
+          <a:noFill/>
+          <a:ln/>
+        </p:spPr>
+        <p:txBody>
+          <a:bodyPr wrap="square" lIns="0" tIns="0" rIns="0" bIns="0" rtlCol="0" anchor="t"/>
+          <a:lstStyle/>
+          <a:p>
+            <a:pPr algn="l" indent="0" marL="0">
+              <a:lnSpc>
+                <a:spcPts val="1680"/>
+              </a:lnSpc>
+              <a:spcBef>
+                <a:spcPts val="300"/>
+              </a:spcBef>
+              <a:spcAft>
+                <a:spcPts val="300"/>
+              </a:spcAft>
+              <a:buNone/>
+            </a:pPr>
+            <a:r>
+              <a:rPr lang="en-US" sz="1200" dirty="0">
+                <a:solidFill>
+                  <a:srgbClr val="1C2833"/>
+                </a:solidFill>
+                <a:latin typeface="Arial" pitchFamily="34" charset="0"/>
+                <a:ea typeface="Arial" pitchFamily="34" charset="-122"/>
+                <a:cs typeface="Arial" pitchFamily="34" charset="-120"/>
+              </a:rPr>
+              <a:t>Both readings produce the same ecological ethic: </a:t>
+            </a:r>
+            <a:pPr algn="l" indent="0" marL="0">
+              <a:lnSpc>
+                <a:spcPts val="1680"/>
+              </a:lnSpc>
+              <a:spcBef>
+                <a:spcPts val="300"/>
+              </a:spcBef>
               <a:spcAft>
                 <a:spcPts val="300"/>
               </a:spcAft>
@@ -2596,12 +3430,15 @@
                 <a:ea typeface="Arial" pitchFamily="34" charset="-122"/>
                 <a:cs typeface="Arial" pitchFamily="34" charset="-120"/>
               </a:rPr>
-              <a:t>"By renouncing, enjoy. Do not covet anyone's wealth."</a:t>
-            </a:r>
-            <a:pPr algn="l" indent="0" marL="0">
-              <a:lnSpc>
-                <a:spcPts val="1620"/>
-              </a:lnSpc>
+              <a:t>use, do not grab</a:t>
+            </a:r>
+            <a:pPr algn="l" indent="0" marL="0">
+              <a:lnSpc>
+                <a:spcPts val="1680"/>
+              </a:lnSpc>
+              <a:spcBef>
+                <a:spcPts val="300"/>
+              </a:spcBef>
               <a:spcAft>
                 <a:spcPts val="300"/>
               </a:spcAft>
@@ -2616,7 +3453,7 @@
                 <a:ea typeface="Arial" pitchFamily="34" charset="-122"/>
                 <a:cs typeface="Arial" pitchFamily="34" charset="-120"/>
               </a:rPr>
-              <a:t> That's the practical rule.</a:t>
+              <a:t>.</a:t>
             </a:r>
             <a:endParaRPr lang="en-US" sz="1200" dirty="0"/>
           </a:p>
@@ -2624,7 +3461,7 @@
       </p:sp>
       <p:sp>
         <p:nvSpPr>
-          <p:cNvPr id="5" name="Text 3"/>
+          <p:cNvPr id="7" name="Text 5"/>
           <p:cNvSpPr/>
           <p:nvPr/>
         </p:nvSpPr>
@@ -2774,7 +3611,7 @@
                 <a:ea typeface="Georgia" pitchFamily="34" charset="-122"/>
                 <a:cs typeface="Georgia" pitchFamily="34" charset="-120"/>
               </a:rPr>
-              <a:t>Teacher notes</a:t>
+              <a:t>Core (20 min) (cont.)</a:t>
             </a:r>
             <a:endParaRPr lang="en-US" sz="1800" dirty="0"/>
           </a:p>
@@ -2788,8 +3625,8 @@
         </p:nvSpPr>
         <p:spPr>
           <a:xfrm>
-            <a:off x="406301" y="870942"/>
-            <a:ext cx="8498026" cy="853083"/>
+            <a:off x="634901" y="883593"/>
+            <a:ext cx="8102798" cy="693241"/>
           </a:xfrm>
           <a:prstGeom prst="rect">
             <a:avLst/>
@@ -2801,284 +3638,6 @@
           <a:bodyPr wrap="square" lIns="0" tIns="0" rIns="0" bIns="0" rtlCol="0" anchor="t"/>
           <a:lstStyle/>
           <a:p>
-            <a:pPr algn="l" indent="0" marL="0">
-              <a:lnSpc>
-                <a:spcPts val="1680"/>
-              </a:lnSpc>
-              <a:spcBef>
-                <a:spcPts val="300"/>
-              </a:spcBef>
-              <a:spcAft>
-                <a:spcPts val="300"/>
-              </a:spcAft>
-              <a:buNone/>
-            </a:pPr>
-            <a:r>
-              <a:rPr lang="en-US" sz="1200" dirty="0">
-                <a:solidFill>
-                  <a:srgbClr val="1C2833"/>
-                </a:solidFill>
-                <a:latin typeface="Arial" pitchFamily="34" charset="0"/>
-                <a:ea typeface="Arial" pitchFamily="34" charset="-122"/>
-                <a:cs typeface="Arial" pitchFamily="34" charset="-120"/>
-              </a:rPr>
-              <a:t>– The Sanskrit </a:t>
-            </a:r>
-            <a:pPr algn="l" indent="0" marL="0">
-              <a:lnSpc>
-                <a:spcPts val="1680"/>
-              </a:lnSpc>
-              <a:spcBef>
-                <a:spcPts val="300"/>
-              </a:spcBef>
-              <a:spcAft>
-                <a:spcPts val="300"/>
-              </a:spcAft>
-              <a:buNone/>
-            </a:pPr>
-            <a:r>
-              <a:rPr lang="en-US" sz="1200" i="1" dirty="0">
-                <a:solidFill>
-                  <a:srgbClr val="1C2833"/>
-                </a:solidFill>
-                <a:latin typeface="Arial" pitchFamily="34" charset="0"/>
-                <a:ea typeface="Arial" pitchFamily="34" charset="-122"/>
-                <a:cs typeface="Arial" pitchFamily="34" charset="-120"/>
-              </a:rPr>
-              <a:t>bhuñjīthāḥ</a:t>
-            </a:r>
-            <a:pPr algn="l" indent="0" marL="0">
-              <a:lnSpc>
-                <a:spcPts val="1680"/>
-              </a:lnSpc>
-              <a:spcBef>
-                <a:spcPts val="300"/>
-              </a:spcBef>
-              <a:spcAft>
-                <a:spcPts val="300"/>
-              </a:spcAft>
-              <a:buNone/>
-            </a:pPr>
-            <a:r>
-              <a:rPr lang="en-US" sz="1200" dirty="0">
-                <a:solidFill>
-                  <a:srgbClr val="1C2833"/>
-                </a:solidFill>
-                <a:latin typeface="Arial" pitchFamily="34" charset="0"/>
-                <a:ea typeface="Arial" pitchFamily="34" charset="-122"/>
-                <a:cs typeface="Arial" pitchFamily="34" charset="-120"/>
-              </a:rPr>
-              <a:t> is the optative form of </a:t>
-            </a:r>
-            <a:pPr algn="l" indent="0" marL="0">
-              <a:lnSpc>
-                <a:spcPts val="1680"/>
-              </a:lnSpc>
-              <a:spcBef>
-                <a:spcPts val="300"/>
-              </a:spcBef>
-              <a:spcAft>
-                <a:spcPts val="300"/>
-              </a:spcAft>
-              <a:buNone/>
-            </a:pPr>
-            <a:r>
-              <a:rPr lang="en-US" sz="1200" i="1" dirty="0">
-                <a:solidFill>
-                  <a:srgbClr val="1C2833"/>
-                </a:solidFill>
-                <a:latin typeface="Arial" pitchFamily="34" charset="0"/>
-                <a:ea typeface="Arial" pitchFamily="34" charset="-122"/>
-                <a:cs typeface="Arial" pitchFamily="34" charset="-120"/>
-              </a:rPr>
-              <a:t>bhuj</a:t>
-            </a:r>
-            <a:pPr algn="l" indent="0" marL="0">
-              <a:lnSpc>
-                <a:spcPts val="1680"/>
-              </a:lnSpc>
-              <a:spcBef>
-                <a:spcPts val="300"/>
-              </a:spcBef>
-              <a:spcAft>
-                <a:spcPts val="300"/>
-              </a:spcAft>
-              <a:buNone/>
-            </a:pPr>
-            <a:r>
-              <a:rPr lang="en-US" sz="1200" dirty="0">
-                <a:solidFill>
-                  <a:srgbClr val="1C2833"/>
-                </a:solidFill>
-                <a:latin typeface="Arial" pitchFamily="34" charset="0"/>
-                <a:ea typeface="Arial" pitchFamily="34" charset="-122"/>
-                <a:cs typeface="Arial" pitchFamily="34" charset="-120"/>
-              </a:rPr>
-              <a:t> — "to enjoy, eat, partake." Translators often use "enjoy"; "use" or "partake" works equally well. – Some students will ask, "But this is asking me to give up things — isn't that asceticism?" Push back gently: no, the verse says </a:t>
-            </a:r>
-            <a:pPr algn="l" indent="0" marL="0">
-              <a:lnSpc>
-                <a:spcPts val="1680"/>
-              </a:lnSpc>
-              <a:spcBef>
-                <a:spcPts val="300"/>
-              </a:spcBef>
-              <a:spcAft>
-                <a:spcPts val="300"/>
-              </a:spcAft>
-              <a:buNone/>
-            </a:pPr>
-            <a:r>
-              <a:rPr lang="en-US" sz="1200" i="1" dirty="0">
-                <a:solidFill>
-                  <a:srgbClr val="1C2833"/>
-                </a:solidFill>
-                <a:latin typeface="Arial" pitchFamily="34" charset="0"/>
-                <a:ea typeface="Arial" pitchFamily="34" charset="-122"/>
-                <a:cs typeface="Arial" pitchFamily="34" charset="-120"/>
-              </a:rPr>
-              <a:t>enjoy</a:t>
-            </a:r>
-            <a:pPr algn="l" indent="0" marL="0">
-              <a:lnSpc>
-                <a:spcPts val="1680"/>
-              </a:lnSpc>
-              <a:spcBef>
-                <a:spcPts val="300"/>
-              </a:spcBef>
-              <a:spcAft>
-                <a:spcPts val="300"/>
-              </a:spcAft>
-              <a:buNone/>
-            </a:pPr>
-            <a:r>
-              <a:rPr lang="en-US" sz="1200" dirty="0">
-                <a:solidFill>
-                  <a:srgbClr val="1C2833"/>
-                </a:solidFill>
-                <a:latin typeface="Arial" pitchFamily="34" charset="0"/>
-                <a:ea typeface="Arial" pitchFamily="34" charset="-122"/>
-                <a:cs typeface="Arial" pitchFamily="34" charset="-120"/>
-              </a:rPr>
-              <a:t>. The renunciation is of </a:t>
-            </a:r>
-            <a:pPr algn="l" indent="0" marL="0">
-              <a:lnSpc>
-                <a:spcPts val="1680"/>
-              </a:lnSpc>
-              <a:spcBef>
-                <a:spcPts val="300"/>
-              </a:spcBef>
-              <a:spcAft>
-                <a:spcPts val="300"/>
-              </a:spcAft>
-              <a:buNone/>
-            </a:pPr>
-            <a:r>
-              <a:rPr lang="en-US" sz="1200" i="1" dirty="0">
-                <a:solidFill>
-                  <a:srgbClr val="1C2833"/>
-                </a:solidFill>
-                <a:latin typeface="Arial" pitchFamily="34" charset="0"/>
-                <a:ea typeface="Arial" pitchFamily="34" charset="-122"/>
-                <a:cs typeface="Arial" pitchFamily="34" charset="-120"/>
-              </a:rPr>
-              <a:t>grasping</a:t>
-            </a:r>
-            <a:pPr algn="l" indent="0" marL="0">
-              <a:lnSpc>
-                <a:spcPts val="1680"/>
-              </a:lnSpc>
-              <a:spcBef>
-                <a:spcPts val="300"/>
-              </a:spcBef>
-              <a:spcAft>
-                <a:spcPts val="300"/>
-              </a:spcAft>
-              <a:buNone/>
-            </a:pPr>
-            <a:r>
-              <a:rPr lang="en-US" sz="1200" dirty="0">
-                <a:solidFill>
-                  <a:srgbClr val="1C2833"/>
-                </a:solidFill>
-                <a:latin typeface="Arial" pitchFamily="34" charset="0"/>
-                <a:ea typeface="Arial" pitchFamily="34" charset="-122"/>
-                <a:cs typeface="Arial" pitchFamily="34" charset="-120"/>
-              </a:rPr>
-              <a:t>, not of using. You can enjoy your meal; the renunciation is the </a:t>
-            </a:r>
-            <a:pPr algn="l" indent="0" marL="0">
-              <a:lnSpc>
-                <a:spcPts val="1680"/>
-              </a:lnSpc>
-              <a:spcBef>
-                <a:spcPts val="300"/>
-              </a:spcBef>
-              <a:spcAft>
-                <a:spcPts val="300"/>
-              </a:spcAft>
-              <a:buNone/>
-            </a:pPr>
-            <a:r>
-              <a:rPr lang="en-US" sz="1200" i="1" dirty="0">
-                <a:solidFill>
-                  <a:srgbClr val="1C2833"/>
-                </a:solidFill>
-                <a:latin typeface="Arial" pitchFamily="34" charset="0"/>
-                <a:ea typeface="Arial" pitchFamily="34" charset="-122"/>
-                <a:cs typeface="Arial" pitchFamily="34" charset="-120"/>
-              </a:rPr>
-              <a:t>attitude</a:t>
-            </a:r>
-            <a:pPr algn="l" indent="0" marL="0">
-              <a:lnSpc>
-                <a:spcPts val="1680"/>
-              </a:lnSpc>
-              <a:spcBef>
-                <a:spcPts val="300"/>
-              </a:spcBef>
-              <a:spcAft>
-                <a:spcPts val="300"/>
-              </a:spcAft>
-              <a:buNone/>
-            </a:pPr>
-            <a:r>
-              <a:rPr lang="en-US" sz="1200" dirty="0">
-                <a:solidFill>
-                  <a:srgbClr val="1C2833"/>
-                </a:solidFill>
-                <a:latin typeface="Arial" pitchFamily="34" charset="0"/>
-                <a:ea typeface="Arial" pitchFamily="34" charset="-122"/>
-                <a:cs typeface="Arial" pitchFamily="34" charset="-120"/>
-              </a:rPr>
-              <a:t> that says "this is mine and only mine."</a:t>
-            </a:r>
-            <a:endParaRPr lang="en-US" sz="1200" dirty="0"/>
-          </a:p>
-        </p:txBody>
-      </p:sp>
-      <p:sp>
-        <p:nvSpPr>
-          <p:cNvPr id="5" name="Text 3"/>
-          <p:cNvSpPr/>
-          <p:nvPr/>
-        </p:nvSpPr>
-        <p:spPr>
-          <a:xfrm>
-            <a:off x="634901" y="1812875"/>
-            <a:ext cx="8102798" cy="487561"/>
-          </a:xfrm>
-          <a:prstGeom prst="rect">
-            <a:avLst/>
-          </a:prstGeom>
-          <a:noFill/>
-          <a:ln/>
-        </p:spPr>
-        <p:txBody>
-          <a:bodyPr wrap="square" lIns="0" tIns="0" rIns="0" bIns="0" rtlCol="0" anchor="t"/>
-          <a:lstStyle/>
-          <a:p>
             <a:pPr algn="l" marL="342900" indent="-342900">
               <a:lnSpc>
                 <a:spcPts val="1620"/>
@@ -3090,6 +3649,46 @@
               <a:buChar char="•"/>
             </a:pPr>
             <a:r>
+              <a:rPr lang="en-US" sz="1200" b="1" dirty="0">
+                <a:solidFill>
+                  <a:srgbClr val="1C2833"/>
+                </a:solidFill>
+                <a:latin typeface="Arial" pitchFamily="34" charset="0"/>
+                <a:ea typeface="Arial" pitchFamily="34" charset="-122"/>
+                <a:cs typeface="Arial" pitchFamily="34" charset="-120"/>
+              </a:rPr>
+              <a:t>Why this is ecology.</a:t>
+            </a:r>
+            <a:pPr algn="l" indent="0" marL="0">
+              <a:lnSpc>
+                <a:spcPts val="1620"/>
+              </a:lnSpc>
+              <a:spcAft>
+                <a:spcPts val="300"/>
+              </a:spcAft>
+              <a:buNone/>
+            </a:pPr>
+            <a:r>
+              <a:rPr lang="en-US" sz="1200" dirty="0">
+                <a:solidFill>
+                  <a:srgbClr val="1C2833"/>
+                </a:solidFill>
+                <a:latin typeface="Arial" pitchFamily="34" charset="0"/>
+                <a:ea typeface="Arial" pitchFamily="34" charset="-122"/>
+                <a:cs typeface="Arial" pitchFamily="34" charset="-120"/>
+              </a:rPr>
+              <a:t> Modern environmental crises — climate, biodiversity loss, water shortage — are not crises of "use." They are crises of "grab." Every human civilisation has used the environment. Most cultures, including the Indic tradition, accepted that use as necessary. But the Indic tradition (in this verse) sets a clear limit: </a:t>
+            </a:r>
+            <a:pPr algn="l" indent="0" marL="0">
+              <a:lnSpc>
+                <a:spcPts val="1620"/>
+              </a:lnSpc>
+              <a:spcAft>
+                <a:spcPts val="300"/>
+              </a:spcAft>
+              <a:buNone/>
+            </a:pPr>
+            <a:r>
               <a:rPr lang="en-US" sz="1200" i="1" dirty="0">
                 <a:solidFill>
                   <a:srgbClr val="1C2833"/>
@@ -3098,7 +3697,7 @@
                 <a:ea typeface="Arial" pitchFamily="34" charset="-122"/>
                 <a:cs typeface="Arial" pitchFamily="34" charset="-120"/>
               </a:rPr>
-              <a:t>gṛdhaḥ</a:t>
+              <a:t>use is fine, grab is not</a:t>
             </a:r>
             <a:pPr algn="l" indent="0" marL="0">
               <a:lnSpc>
@@ -3118,47 +3717,7 @@
                 <a:ea typeface="Arial" pitchFamily="34" charset="-122"/>
                 <a:cs typeface="Arial" pitchFamily="34" charset="-120"/>
               </a:rPr>
-              <a:t> (the second-person prohibition: "do not grab") shares a root with "vulture" (</a:t>
-            </a:r>
-            <a:pPr algn="l" indent="0" marL="0">
-              <a:lnSpc>
-                <a:spcPts val="1620"/>
-              </a:lnSpc>
-              <a:spcAft>
-                <a:spcPts val="300"/>
-              </a:spcAft>
-              <a:buNone/>
-            </a:pPr>
-            <a:r>
-              <a:rPr lang="en-US" sz="1200" i="1" dirty="0">
-                <a:solidFill>
-                  <a:srgbClr val="1C2833"/>
-                </a:solidFill>
-                <a:latin typeface="Arial" pitchFamily="34" charset="0"/>
-                <a:ea typeface="Arial" pitchFamily="34" charset="-122"/>
-                <a:cs typeface="Arial" pitchFamily="34" charset="-120"/>
-              </a:rPr>
-              <a:t>gṛdhra</a:t>
-            </a:r>
-            <a:pPr algn="l" indent="0" marL="0">
-              <a:lnSpc>
-                <a:spcPts val="1620"/>
-              </a:lnSpc>
-              <a:spcAft>
-                <a:spcPts val="300"/>
-              </a:spcAft>
-              <a:buNone/>
-            </a:pPr>
-            <a:r>
-              <a:rPr lang="en-US" sz="1200" dirty="0">
-                <a:solidFill>
-                  <a:srgbClr val="1C2833"/>
-                </a:solidFill>
-                <a:latin typeface="Arial" pitchFamily="34" charset="0"/>
-                <a:ea typeface="Arial" pitchFamily="34" charset="-122"/>
-                <a:cs typeface="Arial" pitchFamily="34" charset="-120"/>
-              </a:rPr>
-              <a:t>). The image is sharp. You can use it.</a:t>
+              <a:t>.</a:t>
             </a:r>
             <a:endParaRPr lang="en-US" sz="1200" dirty="0"/>
           </a:p>
@@ -3166,101 +3725,7 @@
       </p:sp>
       <p:sp>
         <p:nvSpPr>
-          <p:cNvPr id="6" name="Text 4"/>
-          <p:cNvSpPr/>
-          <p:nvPr/>
-        </p:nvSpPr>
-        <p:spPr>
-          <a:xfrm>
-            <a:off x="406301" y="2389287"/>
-            <a:ext cx="8498026" cy="426541"/>
-          </a:xfrm>
-          <a:prstGeom prst="rect">
-            <a:avLst/>
-          </a:prstGeom>
-          <a:noFill/>
-          <a:ln/>
-        </p:spPr>
-        <p:txBody>
-          <a:bodyPr wrap="square" lIns="0" tIns="0" rIns="0" bIns="0" rtlCol="0" anchor="t"/>
-          <a:lstStyle/>
-          <a:p>
-            <a:pPr algn="l" indent="0" marL="0">
-              <a:lnSpc>
-                <a:spcPts val="1680"/>
-              </a:lnSpc>
-              <a:spcBef>
-                <a:spcPts val="300"/>
-              </a:spcBef>
-              <a:spcAft>
-                <a:spcPts val="300"/>
-              </a:spcAft>
-              <a:buNone/>
-            </a:pPr>
-            <a:r>
-              <a:rPr lang="en-US" sz="1200" dirty="0">
-                <a:solidFill>
-                  <a:srgbClr val="1C2833"/>
-                </a:solidFill>
-                <a:latin typeface="Arial" pitchFamily="34" charset="0"/>
-                <a:ea typeface="Arial" pitchFamily="34" charset="-122"/>
-                <a:cs typeface="Arial" pitchFamily="34" charset="-120"/>
-              </a:rPr>
-              <a:t>– Avoid moralising. The exercise is about </a:t>
-            </a:r>
-            <a:pPr algn="l" indent="0" marL="0">
-              <a:lnSpc>
-                <a:spcPts val="1680"/>
-              </a:lnSpc>
-              <a:spcBef>
-                <a:spcPts val="300"/>
-              </a:spcBef>
-              <a:spcAft>
-                <a:spcPts val="300"/>
-              </a:spcAft>
-              <a:buNone/>
-            </a:pPr>
-            <a:r>
-              <a:rPr lang="en-US" sz="1200" i="1" dirty="0">
-                <a:solidFill>
-                  <a:srgbClr val="1C2833"/>
-                </a:solidFill>
-                <a:latin typeface="Arial" pitchFamily="34" charset="0"/>
-                <a:ea typeface="Arial" pitchFamily="34" charset="-122"/>
-                <a:cs typeface="Arial" pitchFamily="34" charset="-120"/>
-              </a:rPr>
-              <a:t>noticing</a:t>
-            </a:r>
-            <a:pPr algn="l" indent="0" marL="0">
-              <a:lnSpc>
-                <a:spcPts val="1680"/>
-              </a:lnSpc>
-              <a:spcBef>
-                <a:spcPts val="300"/>
-              </a:spcBef>
-              <a:spcAft>
-                <a:spcPts val="300"/>
-              </a:spcAft>
-              <a:buNone/>
-            </a:pPr>
-            <a:r>
-              <a:rPr lang="en-US" sz="1200" dirty="0">
-                <a:solidFill>
-                  <a:srgbClr val="1C2833"/>
-                </a:solidFill>
-                <a:latin typeface="Arial" pitchFamily="34" charset="0"/>
-                <a:ea typeface="Arial" pitchFamily="34" charset="-122"/>
-                <a:cs typeface="Arial" pitchFamily="34" charset="-120"/>
-              </a:rPr>
-              <a:t> the distinction between use and grab. Most adults haven't done this exercise. The students will do it more honestly than we will.</a:t>
-            </a:r>
-            <a:endParaRPr lang="en-US" sz="1200" dirty="0"/>
-          </a:p>
-        </p:txBody>
-      </p:sp>
-      <p:sp>
-        <p:nvSpPr>
-          <p:cNvPr id="7" name="Text 5"/>
+          <p:cNvPr id="5" name="Text 3"/>
           <p:cNvSpPr/>
           <p:nvPr/>
         </p:nvSpPr>
@@ -3410,7 +3875,7 @@
                 <a:ea typeface="Georgia" pitchFamily="34" charset="-122"/>
                 <a:cs typeface="Georgia" pitchFamily="34" charset="-120"/>
               </a:rPr>
-              <a:t>Citation(s) used in this lesson</a:t>
+              <a:t>Core (20 min) (cont.)</a:t>
             </a:r>
             <a:endParaRPr lang="en-US" sz="1800" dirty="0"/>
           </a:p>
@@ -3447,16 +3912,25 @@
               <a:buSzPct val="100000"/>
               <a:buChar char="•"/>
             </a:pPr>
-            <a:r>
-              <a:rPr lang="en-US" sz="1200" b="1" dirty="0">
-                <a:solidFill>
-                  <a:srgbClr val="1C2833"/>
-                </a:solidFill>
-                <a:latin typeface="Arial" pitchFamily="34" charset="0"/>
-                <a:ea typeface="Arial" pitchFamily="34" charset="-122"/>
-                <a:cs typeface="Arial" pitchFamily="34" charset="-120"/>
-              </a:rPr>
-              <a:t>Īśa Upaniṣad mantra 1</a:t>
+            <a:pPr algn="l" indent="0" marL="0">
+              <a:lnSpc>
+                <a:spcPts val="1620"/>
+              </a:lnSpc>
+              <a:spcAft>
+                <a:spcPts val="300"/>
+              </a:spcAft>
+              <a:buNone/>
+            </a:pPr>
+            <a:r>
+              <a:rPr lang="en-US" sz="1200" i="1" dirty="0">
+                <a:solidFill>
+                  <a:srgbClr val="1C2833"/>
+                </a:solidFill>
+                <a:latin typeface="Arial" pitchFamily="34" charset="0"/>
+                <a:ea typeface="Arial" pitchFamily="34" charset="-122"/>
+                <a:cs typeface="Arial" pitchFamily="34" charset="-120"/>
+              </a:rPr>
+              <a:t>Link to</a:t>
             </a:r>
             <a:pPr algn="l" indent="0" marL="0">
               <a:lnSpc>
@@ -3476,7 +3950,147 @@
                 <a:ea typeface="Arial" pitchFamily="34" charset="-122"/>
                 <a:cs typeface="Arial" pitchFamily="34" charset="-120"/>
               </a:rPr>
-              <a:t> — quoted in IAST with translation. Text per the standard Mādhyandina recension; identical to Śukla Yajur Veda 40.1.</a:t>
+              <a:t>ahiṁsā</a:t>
+            </a:r>
+            <a:pPr algn="l" indent="0" marL="0">
+              <a:lnSpc>
+                <a:spcPts val="1620"/>
+              </a:lnSpc>
+              <a:spcAft>
+                <a:spcPts val="300"/>
+              </a:spcAft>
+              <a:buNone/>
+            </a:pPr>
+            <a:r>
+              <a:rPr lang="en-US" sz="1200" i="1" dirty="0">
+                <a:solidFill>
+                  <a:srgbClr val="1C2833"/>
+                </a:solidFill>
+                <a:latin typeface="Arial" pitchFamily="34" charset="0"/>
+                <a:ea typeface="Arial" pitchFamily="34" charset="-122"/>
+                <a:cs typeface="Arial" pitchFamily="34" charset="-120"/>
+              </a:rPr>
+              <a:t>.</a:t>
+            </a:r>
+            <a:pPr algn="l" indent="0" marL="0">
+              <a:lnSpc>
+                <a:spcPts val="1620"/>
+              </a:lnSpc>
+              <a:spcAft>
+                <a:spcPts val="300"/>
+              </a:spcAft>
+              <a:buNone/>
+            </a:pPr>
+            <a:r>
+              <a:rPr lang="en-US" sz="1200" i="1" dirty="0">
+                <a:solidFill>
+                  <a:srgbClr val="1C2833"/>
+                </a:solidFill>
+                <a:latin typeface="Arial" pitchFamily="34" charset="0"/>
+                <a:ea typeface="Arial" pitchFamily="34" charset="-122"/>
+                <a:cs typeface="Arial" pitchFamily="34" charset="-120"/>
+              </a:rPr>
+              <a:t> The first of Patañjali's</a:t>
+            </a:r>
+            <a:pPr algn="l" indent="0" marL="0">
+              <a:lnSpc>
+                <a:spcPts val="1620"/>
+              </a:lnSpc>
+              <a:spcAft>
+                <a:spcPts val="300"/>
+              </a:spcAft>
+              <a:buNone/>
+            </a:pPr>
+            <a:r>
+              <a:rPr lang="en-US" sz="1200" dirty="0">
+                <a:solidFill>
+                  <a:srgbClr val="1C2833"/>
+                </a:solidFill>
+                <a:latin typeface="Arial" pitchFamily="34" charset="0"/>
+                <a:ea typeface="Arial" pitchFamily="34" charset="-122"/>
+                <a:cs typeface="Arial" pitchFamily="34" charset="-120"/>
+              </a:rPr>
+              <a:t>yamas</a:t>
+            </a:r>
+            <a:pPr algn="l" indent="0" marL="0">
+              <a:lnSpc>
+                <a:spcPts val="1620"/>
+              </a:lnSpc>
+              <a:spcAft>
+                <a:spcPts val="300"/>
+              </a:spcAft>
+              <a:buNone/>
+            </a:pPr>
+            <a:r>
+              <a:rPr lang="en-US" sz="1200" i="1" dirty="0">
+                <a:solidFill>
+                  <a:srgbClr val="1C2833"/>
+                </a:solidFill>
+                <a:latin typeface="Arial" pitchFamily="34" charset="0"/>
+                <a:ea typeface="Arial" pitchFamily="34" charset="-122"/>
+                <a:cs typeface="Arial" pitchFamily="34" charset="-120"/>
+              </a:rPr>
+              <a:t> (eight-limbed yoga, from Module 8) is</a:t>
+            </a:r>
+            <a:pPr algn="l" indent="0" marL="0">
+              <a:lnSpc>
+                <a:spcPts val="1620"/>
+              </a:lnSpc>
+              <a:spcAft>
+                <a:spcPts val="300"/>
+              </a:spcAft>
+              <a:buNone/>
+            </a:pPr>
+            <a:r>
+              <a:rPr lang="en-US" sz="1200" dirty="0">
+                <a:solidFill>
+                  <a:srgbClr val="1C2833"/>
+                </a:solidFill>
+                <a:latin typeface="Arial" pitchFamily="34" charset="0"/>
+                <a:ea typeface="Arial" pitchFamily="34" charset="-122"/>
+                <a:cs typeface="Arial" pitchFamily="34" charset="-120"/>
+              </a:rPr>
+              <a:t>ahiṁsā</a:t>
+            </a:r>
+            <a:pPr algn="l" indent="0" marL="0">
+              <a:lnSpc>
+                <a:spcPts val="1620"/>
+              </a:lnSpc>
+              <a:spcAft>
+                <a:spcPts val="300"/>
+              </a:spcAft>
+              <a:buNone/>
+            </a:pPr>
+            <a:r>
+              <a:rPr lang="en-US" sz="1200" i="1" dirty="0">
+                <a:solidFill>
+                  <a:srgbClr val="1C2833"/>
+                </a:solidFill>
+                <a:latin typeface="Arial" pitchFamily="34" charset="0"/>
+                <a:ea typeface="Arial" pitchFamily="34" charset="-122"/>
+                <a:cs typeface="Arial" pitchFamily="34" charset="-120"/>
+              </a:rPr>
+              <a:t> — non-harm. Indic ethics extends</a:t>
+            </a:r>
+            <a:pPr algn="l" indent="0" marL="0">
+              <a:lnSpc>
+                <a:spcPts val="1620"/>
+              </a:lnSpc>
+              <a:spcAft>
+                <a:spcPts val="300"/>
+              </a:spcAft>
+              <a:buNone/>
+            </a:pPr>
+            <a:r>
+              <a:rPr lang="en-US" sz="1200" dirty="0">
+                <a:solidFill>
+                  <a:srgbClr val="1C2833"/>
+                </a:solidFill>
+                <a:latin typeface="Arial" pitchFamily="34" charset="0"/>
+                <a:ea typeface="Arial" pitchFamily="34" charset="-122"/>
+                <a:cs typeface="Arial" pitchFamily="34" charset="-120"/>
+              </a:rPr>
+              <a:t>ahiṁsā* beyond humans:</a:t>
             </a:r>
             <a:endParaRPr lang="en-US" sz="1200" dirty="0"/>
           </a:p>
@@ -3490,8 +4104,8 @@
         </p:nvSpPr>
         <p:spPr>
           <a:xfrm>
-            <a:off x="406301" y="1460004"/>
-            <a:ext cx="8498026" cy="222796"/>
+            <a:off x="634901" y="1472654"/>
+            <a:ext cx="8102798" cy="769441"/>
           </a:xfrm>
           <a:prstGeom prst="rect">
             <a:avLst/>
@@ -3503,6 +4117,100 @@
           <a:bodyPr wrap="square" lIns="0" tIns="0" rIns="0" bIns="0" rtlCol="0" anchor="t"/>
           <a:lstStyle/>
           <a:p>
+            <a:pPr algn="l" marL="342900" indent="-342900">
+              <a:lnSpc>
+                <a:spcPts val="1620"/>
+              </a:lnSpc>
+              <a:spcAft>
+                <a:spcPts val="300"/>
+              </a:spcAft>
+              <a:buSzPct val="100000"/>
+              <a:buChar char="•"/>
+            </a:pPr>
+            <a:r>
+              <a:rPr lang="en-US" sz="1200" dirty="0">
+                <a:solidFill>
+                  <a:srgbClr val="1C2833"/>
+                </a:solidFill>
+                <a:latin typeface="Arial" pitchFamily="34" charset="0"/>
+                <a:ea typeface="Arial" pitchFamily="34" charset="-122"/>
+                <a:cs typeface="Arial" pitchFamily="34" charset="-120"/>
+              </a:rPr>
+              <a:t>Don't kill what you don't need to kill.</a:t>
+            </a:r>
+            <a:endParaRPr lang="en-US" sz="1200" dirty="0"/>
+          </a:p>
+          <a:p>
+            <a:pPr algn="l" marL="342900" indent="-342900">
+              <a:lnSpc>
+                <a:spcPts val="1620"/>
+              </a:lnSpc>
+              <a:spcAft>
+                <a:spcPts val="300"/>
+              </a:spcAft>
+              <a:buSzPct val="100000"/>
+              <a:buChar char="•"/>
+            </a:pPr>
+            <a:r>
+              <a:rPr lang="en-US" sz="1200" dirty="0">
+                <a:solidFill>
+                  <a:srgbClr val="1C2833"/>
+                </a:solidFill>
+                <a:latin typeface="Arial" pitchFamily="34" charset="0"/>
+                <a:ea typeface="Arial" pitchFamily="34" charset="-122"/>
+                <a:cs typeface="Arial" pitchFamily="34" charset="-120"/>
+              </a:rPr>
+              <a:t>Don't waste what you took.</a:t>
+            </a:r>
+            <a:endParaRPr lang="en-US" sz="1200" dirty="0"/>
+          </a:p>
+          <a:p>
+            <a:pPr algn="l" marL="342900" indent="-342900">
+              <a:lnSpc>
+                <a:spcPts val="1620"/>
+              </a:lnSpc>
+              <a:spcAft>
+                <a:spcPts val="300"/>
+              </a:spcAft>
+              <a:buSzPct val="100000"/>
+              <a:buChar char="•"/>
+            </a:pPr>
+            <a:r>
+              <a:rPr lang="en-US" sz="1200" dirty="0">
+                <a:solidFill>
+                  <a:srgbClr val="1C2833"/>
+                </a:solidFill>
+                <a:latin typeface="Arial" pitchFamily="34" charset="0"/>
+                <a:ea typeface="Arial" pitchFamily="34" charset="-122"/>
+                <a:cs typeface="Arial" pitchFamily="34" charset="-120"/>
+              </a:rPr>
+              <a:t>Don't take from a being's last resource.</a:t>
+            </a:r>
+            <a:endParaRPr lang="en-US" sz="1200" dirty="0"/>
+          </a:p>
+        </p:txBody>
+      </p:sp>
+      <p:sp>
+        <p:nvSpPr>
+          <p:cNvPr id="6" name="Text 4"/>
+          <p:cNvSpPr/>
+          <p:nvPr/>
+        </p:nvSpPr>
+        <p:spPr>
+          <a:xfrm>
+            <a:off x="406301" y="4434929"/>
+            <a:ext cx="8498026" cy="213271"/>
+          </a:xfrm>
+          <a:prstGeom prst="rect">
+            <a:avLst/>
+          </a:prstGeom>
+          <a:noFill/>
+          <a:ln/>
+        </p:spPr>
+        <p:txBody>
+          <a:bodyPr wrap="square" lIns="0" tIns="0" rIns="0" bIns="0" rtlCol="0" anchor="t"/>
+          <a:lstStyle/>
+          <a:p>
             <a:pPr algn="l" indent="0" marL="0">
               <a:lnSpc>
                 <a:spcPts val="1680"/>
@@ -3524,8 +4232,143 @@
                 <a:ea typeface="Arial" pitchFamily="34" charset="-122"/>
                 <a:cs typeface="Arial" pitchFamily="34" charset="-120"/>
               </a:rPr>
-              <a:t>– See </a:t>
-            </a:r>
+              <a:t>Middle ·  · IKS Curriculum</a:t>
+            </a:r>
+            <a:endParaRPr lang="en-US" sz="1200" dirty="0"/>
+          </a:p>
+        </p:txBody>
+      </p:sp>
+    </p:spTree>
+  </p:cSld>
+  <p:clrMapOvr>
+    <a:masterClrMapping/>
+  </p:clrMapOvr>
+</p:sld>
+</file>
+
+<file path=ppt/slides/slide13.xml><?xml version="1.0" encoding="utf-8"?>
+<p:sld xmlns:a="http://schemas.openxmlformats.org/drawingml/2006/main" xmlns:r="http://schemas.openxmlformats.org/officeDocument/2006/relationships" xmlns:p="http://schemas.openxmlformats.org/presentationml/2006/main">
+  <p:cSld name="Slide 13">
+    <p:bg>
+      <p:bgPr>
+        <a:solidFill>
+          <a:srgbClr val="FFFFFF"/>
+        </a:solidFill>
+      </p:bgPr>
+    </p:bg>
+    <p:spTree>
+      <p:nvGrpSpPr>
+        <p:cNvPr id="1" name=""/>
+        <p:cNvGrpSpPr/>
+        <p:nvPr/>
+      </p:nvGrpSpPr>
+      <p:grpSpPr>
+        <a:xfrm>
+          <a:off x="0" y="0"/>
+          <a:ext cx="0" cy="0"/>
+          <a:chOff x="0" y="0"/>
+          <a:chExt cx="0" cy="0"/>
+        </a:xfrm>
+      </p:grpSpPr>
+      <p:sp>
+        <p:nvSpPr>
+          <p:cNvPr id="2" name="Text 0"/>
+          <p:cNvSpPr/>
+          <p:nvPr/>
+        </p:nvSpPr>
+        <p:spPr>
+          <a:xfrm>
+            <a:off x="0" y="0"/>
+            <a:ext cx="9144000" cy="101501"/>
+          </a:xfrm>
+          <a:prstGeom prst="rect">
+            <a:avLst/>
+          </a:prstGeom>
+          <a:solidFill>
+            <a:srgbClr val="277884"/>
+          </a:solidFill>
+          <a:ln/>
+        </p:spPr>
+        <p:txBody>
+          <a:bodyPr wrap="square" rtlCol="0" anchor="ctr"/>
+          <a:lstStyle/>
+          <a:p>
+            <a:pPr indent="0" marL="0">
+              <a:buNone/>
+            </a:pPr>
+            <a:endParaRPr lang="en-US" dirty="0"/>
+          </a:p>
+        </p:txBody>
+      </p:sp>
+      <p:sp>
+        <p:nvSpPr>
+          <p:cNvPr id="3" name="Text 1"/>
+          <p:cNvSpPr/>
+          <p:nvPr/>
+        </p:nvSpPr>
+        <p:spPr>
+          <a:xfrm>
+            <a:off x="406301" y="457051"/>
+            <a:ext cx="8498026" cy="274290"/>
+          </a:xfrm>
+          <a:prstGeom prst="rect">
+            <a:avLst/>
+          </a:prstGeom>
+          <a:noFill/>
+          <a:ln/>
+        </p:spPr>
+        <p:txBody>
+          <a:bodyPr wrap="square" lIns="0" tIns="0" rIns="0" bIns="0" rtlCol="0" anchor="t"/>
+          <a:lstStyle/>
+          <a:p>
+            <a:pPr algn="l" indent="0" marL="0">
+              <a:lnSpc>
+                <a:spcPts val="2160"/>
+              </a:lnSpc>
+              <a:spcBef>
+                <a:spcPts val="600"/>
+              </a:spcBef>
+              <a:spcAft>
+                <a:spcPts val="800"/>
+              </a:spcAft>
+              <a:buNone/>
+            </a:pPr>
+            <a:r>
+              <a:rPr lang="en-US" sz="1800" b="1" dirty="0">
+                <a:solidFill>
+                  <a:srgbClr val="FE4447"/>
+                </a:solidFill>
+                <a:latin typeface="Georgia" pitchFamily="34" charset="0"/>
+                <a:ea typeface="Georgia" pitchFamily="34" charset="-122"/>
+                <a:cs typeface="Georgia" pitchFamily="34" charset="-120"/>
+              </a:rPr>
+              <a:t>Core (20 min) (cont.)</a:t>
+            </a:r>
+            <a:endParaRPr lang="en-US" sz="1800" dirty="0"/>
+          </a:p>
+        </p:txBody>
+      </p:sp>
+      <p:sp>
+        <p:nvSpPr>
+          <p:cNvPr id="4" name="Text 2"/>
+          <p:cNvSpPr/>
+          <p:nvPr/>
+        </p:nvSpPr>
+        <p:spPr>
+          <a:xfrm>
+            <a:off x="406301" y="870942"/>
+            <a:ext cx="8498026" cy="426541"/>
+          </a:xfrm>
+          <a:prstGeom prst="rect">
+            <a:avLst/>
+          </a:prstGeom>
+          <a:noFill/>
+          <a:ln/>
+        </p:spPr>
+        <p:txBody>
+          <a:bodyPr wrap="square" lIns="0" tIns="0" rIns="0" bIns="0" rtlCol="0" anchor="t"/>
+          <a:lstStyle/>
+          <a:p>
             <a:pPr algn="l" indent="0" marL="0">
               <a:lnSpc>
                 <a:spcPts val="1680"/>
@@ -3547,8 +4390,33 @@
                 <a:ea typeface="Arial" pitchFamily="34" charset="-122"/>
                 <a:cs typeface="Arial" pitchFamily="34" charset="-120"/>
               </a:rPr>
-              <a:t>sources.md</a:t>
-            </a:r>
+              <a:t>This is why traditional dietary patterns avoided gratuitous killing; why old laws forbade cutting fruit trees during fruiting; why traditional kitchens kept a portion of cooked rice aside for crows.</a:t>
+            </a:r>
+            <a:endParaRPr lang="en-US" sz="1200" dirty="0"/>
+          </a:p>
+        </p:txBody>
+      </p:sp>
+      <p:sp>
+        <p:nvSpPr>
+          <p:cNvPr id="5" name="Text 3"/>
+          <p:cNvSpPr/>
+          <p:nvPr/>
+        </p:nvSpPr>
+        <p:spPr>
+          <a:xfrm>
+            <a:off x="406301" y="1373684"/>
+            <a:ext cx="8498026" cy="213271"/>
+          </a:xfrm>
+          <a:prstGeom prst="rect">
+            <a:avLst/>
+          </a:prstGeom>
+          <a:noFill/>
+          <a:ln/>
+        </p:spPr>
+        <p:txBody>
+          <a:bodyPr wrap="square" lIns="0" tIns="0" rIns="0" bIns="0" rtlCol="0" anchor="t"/>
+          <a:lstStyle/>
+          <a:p>
             <a:pPr algn="l" indent="0" marL="0">
               <a:lnSpc>
                 <a:spcPts val="1680"/>
@@ -3570,7 +4438,53 @@
                 <a:ea typeface="Arial" pitchFamily="34" charset="-122"/>
                 <a:cs typeface="Arial" pitchFamily="34" charset="-120"/>
               </a:rPr>
-              <a:t> for editions used.</a:t>
+              <a:t>These are </a:t>
+            </a:r>
+            <a:pPr algn="l" indent="0" marL="0">
+              <a:lnSpc>
+                <a:spcPts val="1680"/>
+              </a:lnSpc>
+              <a:spcBef>
+                <a:spcPts val="300"/>
+              </a:spcBef>
+              <a:spcAft>
+                <a:spcPts val="300"/>
+              </a:spcAft>
+              <a:buNone/>
+            </a:pPr>
+            <a:r>
+              <a:rPr lang="en-US" sz="1200" i="1" dirty="0">
+                <a:solidFill>
+                  <a:srgbClr val="1C2833"/>
+                </a:solidFill>
+                <a:latin typeface="Arial" pitchFamily="34" charset="0"/>
+                <a:ea typeface="Arial" pitchFamily="34" charset="-122"/>
+                <a:cs typeface="Arial" pitchFamily="34" charset="-120"/>
+              </a:rPr>
+              <a:t>ahiṁsā-shaped</a:t>
+            </a:r>
+            <a:pPr algn="l" indent="0" marL="0">
+              <a:lnSpc>
+                <a:spcPts val="1680"/>
+              </a:lnSpc>
+              <a:spcBef>
+                <a:spcPts val="300"/>
+              </a:spcBef>
+              <a:spcAft>
+                <a:spcPts val="300"/>
+              </a:spcAft>
+              <a:buNone/>
+            </a:pPr>
+            <a:r>
+              <a:rPr lang="en-US" sz="1200" dirty="0">
+                <a:solidFill>
+                  <a:srgbClr val="1C2833"/>
+                </a:solidFill>
+                <a:latin typeface="Arial" pitchFamily="34" charset="0"/>
+                <a:ea typeface="Arial" pitchFamily="34" charset="-122"/>
+                <a:cs typeface="Arial" pitchFamily="34" charset="-120"/>
+              </a:rPr>
+              <a:t> practices, not just rituals.</a:t>
             </a:r>
             <a:endParaRPr lang="en-US" sz="1200" dirty="0"/>
           </a:p>
@@ -3579,6 +4493,2225 @@
       <p:sp>
         <p:nvSpPr>
           <p:cNvPr id="6" name="Text 4"/>
+          <p:cNvSpPr/>
+          <p:nvPr/>
+        </p:nvSpPr>
+        <p:spPr>
+          <a:xfrm>
+            <a:off x="406301" y="4434929"/>
+            <a:ext cx="8498026" cy="213271"/>
+          </a:xfrm>
+          <a:prstGeom prst="rect">
+            <a:avLst/>
+          </a:prstGeom>
+          <a:noFill/>
+          <a:ln/>
+        </p:spPr>
+        <p:txBody>
+          <a:bodyPr wrap="square" lIns="0" tIns="0" rIns="0" bIns="0" rtlCol="0" anchor="t"/>
+          <a:lstStyle/>
+          <a:p>
+            <a:pPr algn="l" indent="0" marL="0">
+              <a:lnSpc>
+                <a:spcPts val="1680"/>
+              </a:lnSpc>
+              <a:spcBef>
+                <a:spcPts val="300"/>
+              </a:spcBef>
+              <a:spcAft>
+                <a:spcPts val="300"/>
+              </a:spcAft>
+              <a:buNone/>
+            </a:pPr>
+            <a:r>
+              <a:rPr lang="en-US" sz="1200" dirty="0">
+                <a:solidFill>
+                  <a:srgbClr val="1C2833"/>
+                </a:solidFill>
+                <a:latin typeface="Arial" pitchFamily="34" charset="0"/>
+                <a:ea typeface="Arial" pitchFamily="34" charset="-122"/>
+                <a:cs typeface="Arial" pitchFamily="34" charset="-120"/>
+              </a:rPr>
+              <a:t>Middle ·  · IKS Curriculum</a:t>
+            </a:r>
+            <a:endParaRPr lang="en-US" sz="1200" dirty="0"/>
+          </a:p>
+        </p:txBody>
+      </p:sp>
+    </p:spTree>
+  </p:cSld>
+  <p:clrMapOvr>
+    <a:masterClrMapping/>
+  </p:clrMapOvr>
+</p:sld>
+</file>
+
+<file path=ppt/slides/slide14.xml><?xml version="1.0" encoding="utf-8"?>
+<p:sld xmlns:a="http://schemas.openxmlformats.org/drawingml/2006/main" xmlns:r="http://schemas.openxmlformats.org/officeDocument/2006/relationships" xmlns:p="http://schemas.openxmlformats.org/presentationml/2006/main">
+  <p:cSld name="Slide 14">
+    <p:bg>
+      <p:bgPr>
+        <a:solidFill>
+          <a:srgbClr val="FFFFFF"/>
+        </a:solidFill>
+      </p:bgPr>
+    </p:bg>
+    <p:spTree>
+      <p:nvGrpSpPr>
+        <p:cNvPr id="1" name=""/>
+        <p:cNvGrpSpPr/>
+        <p:nvPr/>
+      </p:nvGrpSpPr>
+      <p:grpSpPr>
+        <a:xfrm>
+          <a:off x="0" y="0"/>
+          <a:ext cx="0" cy="0"/>
+          <a:chOff x="0" y="0"/>
+          <a:chExt cx="0" cy="0"/>
+        </a:xfrm>
+      </p:grpSpPr>
+      <p:sp>
+        <p:nvSpPr>
+          <p:cNvPr id="2" name="Text 0"/>
+          <p:cNvSpPr/>
+          <p:nvPr/>
+        </p:nvSpPr>
+        <p:spPr>
+          <a:xfrm>
+            <a:off x="0" y="0"/>
+            <a:ext cx="9144000" cy="101501"/>
+          </a:xfrm>
+          <a:prstGeom prst="rect">
+            <a:avLst/>
+          </a:prstGeom>
+          <a:solidFill>
+            <a:srgbClr val="277884"/>
+          </a:solidFill>
+          <a:ln/>
+        </p:spPr>
+        <p:txBody>
+          <a:bodyPr wrap="square" rtlCol="0" anchor="ctr"/>
+          <a:lstStyle/>
+          <a:p>
+            <a:pPr indent="0" marL="0">
+              <a:buNone/>
+            </a:pPr>
+            <a:endParaRPr lang="en-US" dirty="0"/>
+          </a:p>
+        </p:txBody>
+      </p:sp>
+      <p:sp>
+        <p:nvSpPr>
+          <p:cNvPr id="3" name="Text 1"/>
+          <p:cNvSpPr/>
+          <p:nvPr/>
+        </p:nvSpPr>
+        <p:spPr>
+          <a:xfrm>
+            <a:off x="406301" y="457051"/>
+            <a:ext cx="8498026" cy="274290"/>
+          </a:xfrm>
+          <a:prstGeom prst="rect">
+            <a:avLst/>
+          </a:prstGeom>
+          <a:noFill/>
+          <a:ln/>
+        </p:spPr>
+        <p:txBody>
+          <a:bodyPr wrap="square" lIns="0" tIns="0" rIns="0" bIns="0" rtlCol="0" anchor="t"/>
+          <a:lstStyle/>
+          <a:p>
+            <a:pPr algn="l" indent="0" marL="0">
+              <a:lnSpc>
+                <a:spcPts val="2160"/>
+              </a:lnSpc>
+              <a:spcBef>
+                <a:spcPts val="600"/>
+              </a:spcBef>
+              <a:spcAft>
+                <a:spcPts val="800"/>
+              </a:spcAft>
+              <a:buNone/>
+            </a:pPr>
+            <a:r>
+              <a:rPr lang="en-US" sz="1800" b="1" dirty="0">
+                <a:solidFill>
+                  <a:srgbClr val="FE4447"/>
+                </a:solidFill>
+                <a:latin typeface="Georgia" pitchFamily="34" charset="0"/>
+                <a:ea typeface="Georgia" pitchFamily="34" charset="-122"/>
+                <a:cs typeface="Georgia" pitchFamily="34" charset="-120"/>
+              </a:rPr>
+              <a:t>Activity (15 min) — "What do I grab without asking?"</a:t>
+            </a:r>
+            <a:endParaRPr lang="en-US" sz="1800" dirty="0"/>
+          </a:p>
+        </p:txBody>
+      </p:sp>
+      <p:sp>
+        <p:nvSpPr>
+          <p:cNvPr id="4" name="Text 2"/>
+          <p:cNvSpPr/>
+          <p:nvPr/>
+        </p:nvSpPr>
+        <p:spPr>
+          <a:xfrm>
+            <a:off x="634901" y="883593"/>
+            <a:ext cx="8102798" cy="2194024"/>
+          </a:xfrm>
+          <a:prstGeom prst="rect">
+            <a:avLst/>
+          </a:prstGeom>
+          <a:noFill/>
+          <a:ln/>
+        </p:spPr>
+        <p:txBody>
+          <a:bodyPr wrap="square" lIns="0" tIns="0" rIns="0" bIns="0" rtlCol="0" anchor="t"/>
+          <a:lstStyle/>
+          <a:p>
+            <a:pPr algn="l" marL="342900" indent="-342900">
+              <a:lnSpc>
+                <a:spcPts val="1620"/>
+              </a:lnSpc>
+              <a:spcAft>
+                <a:spcPts val="300"/>
+              </a:spcAft>
+              <a:buSzPct val="100000"/>
+              <a:buChar char="•"/>
+            </a:pPr>
+            <a:r>
+              <a:rPr lang="en-US" sz="1200" dirty="0">
+                <a:solidFill>
+                  <a:srgbClr val="1C2833"/>
+                </a:solidFill>
+                <a:latin typeface="Arial" pitchFamily="34" charset="0"/>
+                <a:ea typeface="Arial" pitchFamily="34" charset="-122"/>
+                <a:cs typeface="Arial" pitchFamily="34" charset="-120"/>
+              </a:rPr>
+              <a:t>Each student takes 5 minutes alone with their notebook.</a:t>
+            </a:r>
+            <a:endParaRPr lang="en-US" sz="1200" dirty="0"/>
+          </a:p>
+          <a:p>
+            <a:pPr algn="l" marL="342900" indent="-342900">
+              <a:lnSpc>
+                <a:spcPts val="1620"/>
+              </a:lnSpc>
+              <a:spcAft>
+                <a:spcPts val="300"/>
+              </a:spcAft>
+              <a:buSzPct val="100000"/>
+              <a:buChar char="•"/>
+            </a:pPr>
+            <a:r>
+              <a:rPr lang="en-US" sz="1200" dirty="0">
+                <a:solidFill>
+                  <a:srgbClr val="1C2833"/>
+                </a:solidFill>
+                <a:latin typeface="Arial" pitchFamily="34" charset="0"/>
+                <a:ea typeface="Arial" pitchFamily="34" charset="-122"/>
+                <a:cs typeface="Arial" pitchFamily="34" charset="-120"/>
+              </a:rPr>
+              <a:t>Prompt: </a:t>
+            </a:r>
+            <a:pPr algn="l" indent="0" marL="0">
+              <a:lnSpc>
+                <a:spcPts val="1620"/>
+              </a:lnSpc>
+              <a:spcAft>
+                <a:spcPts val="300"/>
+              </a:spcAft>
+              <a:buNone/>
+            </a:pPr>
+            <a:r>
+              <a:rPr lang="en-US" sz="1200" i="1" dirty="0">
+                <a:solidFill>
+                  <a:srgbClr val="1C2833"/>
+                </a:solidFill>
+                <a:latin typeface="Arial" pitchFamily="34" charset="0"/>
+                <a:ea typeface="Arial" pitchFamily="34" charset="-122"/>
+                <a:cs typeface="Arial" pitchFamily="34" charset="-120"/>
+              </a:rPr>
+              <a:t>"List five specific things you took today without asking — and decide, for each, whether you 'used' it or 'grabbed' it."</a:t>
+            </a:r>
+            <a:endParaRPr lang="en-US" sz="1200" dirty="0"/>
+          </a:p>
+          <a:p>
+            <a:pPr algn="l" marL="342900" indent="-342900">
+              <a:lnSpc>
+                <a:spcPts val="1620"/>
+              </a:lnSpc>
+              <a:spcAft>
+                <a:spcPts val="300"/>
+              </a:spcAft>
+              <a:buSzPct val="100000"/>
+              <a:buChar char="•"/>
+            </a:pPr>
+            <a:r>
+              <a:rPr lang="en-US" sz="1200" dirty="0">
+                <a:solidFill>
+                  <a:srgbClr val="1C2833"/>
+                </a:solidFill>
+                <a:latin typeface="Arial" pitchFamily="34" charset="0"/>
+                <a:ea typeface="Arial" pitchFamily="34" charset="-122"/>
+                <a:cs typeface="Arial" pitchFamily="34" charset="-120"/>
+              </a:rPr>
+              <a:t>Examples to seed:</a:t>
+            </a:r>
+            <a:endParaRPr lang="en-US" sz="1200" dirty="0"/>
+          </a:p>
+          <a:p>
+            <a:pPr algn="l" marL="342900" indent="-342900">
+              <a:lnSpc>
+                <a:spcPts val="1620"/>
+              </a:lnSpc>
+              <a:spcAft>
+                <a:spcPts val="300"/>
+              </a:spcAft>
+              <a:buSzPct val="100000"/>
+              <a:buChar char="•"/>
+            </a:pPr>
+            <a:r>
+              <a:rPr lang="en-US" sz="1200" dirty="0">
+                <a:solidFill>
+                  <a:srgbClr val="1C2833"/>
+                </a:solidFill>
+                <a:latin typeface="Arial" pitchFamily="34" charset="0"/>
+                <a:ea typeface="Arial" pitchFamily="34" charset="-122"/>
+                <a:cs typeface="Arial" pitchFamily="34" charset="-120"/>
+              </a:rPr>
+              <a:t>Took 5 sheets of printer paper for 2 sheets of work. ← Grab.</a:t>
+            </a:r>
+            <a:endParaRPr lang="en-US" sz="1200" dirty="0"/>
+          </a:p>
+          <a:p>
+            <a:pPr algn="l" marL="342900" indent="-342900">
+              <a:lnSpc>
+                <a:spcPts val="1620"/>
+              </a:lnSpc>
+              <a:spcAft>
+                <a:spcPts val="300"/>
+              </a:spcAft>
+              <a:buSzPct val="100000"/>
+              <a:buChar char="•"/>
+            </a:pPr>
+            <a:r>
+              <a:rPr lang="en-US" sz="1200" dirty="0">
+                <a:solidFill>
+                  <a:srgbClr val="1C2833"/>
+                </a:solidFill>
+                <a:latin typeface="Arial" pitchFamily="34" charset="0"/>
+                <a:ea typeface="Arial" pitchFamily="34" charset="-122"/>
+                <a:cs typeface="Arial" pitchFamily="34" charset="-120"/>
+              </a:rPr>
+              <a:t>Drank a glass of water at the school cooler. ← Use.</a:t>
+            </a:r>
+            <a:endParaRPr lang="en-US" sz="1200" dirty="0"/>
+          </a:p>
+          <a:p>
+            <a:pPr algn="l" marL="342900" indent="-342900">
+              <a:lnSpc>
+                <a:spcPts val="1620"/>
+              </a:lnSpc>
+              <a:spcAft>
+                <a:spcPts val="300"/>
+              </a:spcAft>
+              <a:buSzPct val="100000"/>
+              <a:buChar char="•"/>
+            </a:pPr>
+            <a:r>
+              <a:rPr lang="en-US" sz="1200" dirty="0">
+                <a:solidFill>
+                  <a:srgbClr val="1C2833"/>
+                </a:solidFill>
+                <a:latin typeface="Arial" pitchFamily="34" charset="0"/>
+                <a:ea typeface="Arial" pitchFamily="34" charset="-122"/>
+                <a:cs typeface="Arial" pitchFamily="34" charset="-120"/>
+              </a:rPr>
+              <a:t>Threw away half a plate of food at lunch. ← Grab.</a:t>
+            </a:r>
+            <a:endParaRPr lang="en-US" sz="1200" dirty="0"/>
+          </a:p>
+          <a:p>
+            <a:pPr algn="l" marL="342900" indent="-342900">
+              <a:lnSpc>
+                <a:spcPts val="1620"/>
+              </a:lnSpc>
+              <a:spcAft>
+                <a:spcPts val="300"/>
+              </a:spcAft>
+              <a:buSzPct val="100000"/>
+              <a:buChar char="•"/>
+            </a:pPr>
+            <a:r>
+              <a:rPr lang="en-US" sz="1200" dirty="0">
+                <a:solidFill>
+                  <a:srgbClr val="1C2833"/>
+                </a:solidFill>
+                <a:latin typeface="Arial" pitchFamily="34" charset="0"/>
+                <a:ea typeface="Arial" pitchFamily="34" charset="-122"/>
+                <a:cs typeface="Arial" pitchFamily="34" charset="-120"/>
+              </a:rPr>
+              <a:t>Listened to a teacher's full explanation. ← Use.</a:t>
+            </a:r>
+            <a:endParaRPr lang="en-US" sz="1200" dirty="0"/>
+          </a:p>
+          <a:p>
+            <a:pPr algn="l" marL="342900" indent="-342900">
+              <a:lnSpc>
+                <a:spcPts val="1620"/>
+              </a:lnSpc>
+              <a:spcAft>
+                <a:spcPts val="300"/>
+              </a:spcAft>
+              <a:buSzPct val="100000"/>
+              <a:buChar char="•"/>
+            </a:pPr>
+            <a:r>
+              <a:rPr lang="en-US" sz="1200" dirty="0">
+                <a:solidFill>
+                  <a:srgbClr val="1C2833"/>
+                </a:solidFill>
+                <a:latin typeface="Arial" pitchFamily="34" charset="0"/>
+                <a:ea typeface="Arial" pitchFamily="34" charset="-122"/>
+                <a:cs typeface="Arial" pitchFamily="34" charset="-120"/>
+              </a:rPr>
+              <a:t>Cut a flower off the plant for fun. ← Grab.</a:t>
+            </a:r>
+            <a:endParaRPr lang="en-US" sz="1200" dirty="0"/>
+          </a:p>
+        </p:txBody>
+      </p:sp>
+      <p:sp>
+        <p:nvSpPr>
+          <p:cNvPr id="5" name="Text 3"/>
+          <p:cNvSpPr/>
+          <p:nvPr/>
+        </p:nvSpPr>
+        <p:spPr>
+          <a:xfrm>
+            <a:off x="406301" y="4434929"/>
+            <a:ext cx="8498026" cy="213271"/>
+          </a:xfrm>
+          <a:prstGeom prst="rect">
+            <a:avLst/>
+          </a:prstGeom>
+          <a:noFill/>
+          <a:ln/>
+        </p:spPr>
+        <p:txBody>
+          <a:bodyPr wrap="square" lIns="0" tIns="0" rIns="0" bIns="0" rtlCol="0" anchor="t"/>
+          <a:lstStyle/>
+          <a:p>
+            <a:pPr algn="l" indent="0" marL="0">
+              <a:lnSpc>
+                <a:spcPts val="1680"/>
+              </a:lnSpc>
+              <a:spcBef>
+                <a:spcPts val="300"/>
+              </a:spcBef>
+              <a:spcAft>
+                <a:spcPts val="300"/>
+              </a:spcAft>
+              <a:buNone/>
+            </a:pPr>
+            <a:r>
+              <a:rPr lang="en-US" sz="1200" dirty="0">
+                <a:solidFill>
+                  <a:srgbClr val="1C2833"/>
+                </a:solidFill>
+                <a:latin typeface="Arial" pitchFamily="34" charset="0"/>
+                <a:ea typeface="Arial" pitchFamily="34" charset="-122"/>
+                <a:cs typeface="Arial" pitchFamily="34" charset="-120"/>
+              </a:rPr>
+              <a:t>Middle ·  · IKS Curriculum</a:t>
+            </a:r>
+            <a:endParaRPr lang="en-US" sz="1200" dirty="0"/>
+          </a:p>
+        </p:txBody>
+      </p:sp>
+    </p:spTree>
+  </p:cSld>
+  <p:clrMapOvr>
+    <a:masterClrMapping/>
+  </p:clrMapOvr>
+</p:sld>
+</file>
+
+<file path=ppt/slides/slide15.xml><?xml version="1.0" encoding="utf-8"?>
+<p:sld xmlns:a="http://schemas.openxmlformats.org/drawingml/2006/main" xmlns:r="http://schemas.openxmlformats.org/officeDocument/2006/relationships" xmlns:p="http://schemas.openxmlformats.org/presentationml/2006/main">
+  <p:cSld name="Slide 15">
+    <p:bg>
+      <p:bgPr>
+        <a:solidFill>
+          <a:srgbClr val="FFFFFF"/>
+        </a:solidFill>
+      </p:bgPr>
+    </p:bg>
+    <p:spTree>
+      <p:nvGrpSpPr>
+        <p:cNvPr id="1" name=""/>
+        <p:cNvGrpSpPr/>
+        <p:nvPr/>
+      </p:nvGrpSpPr>
+      <p:grpSpPr>
+        <a:xfrm>
+          <a:off x="0" y="0"/>
+          <a:ext cx="0" cy="0"/>
+          <a:chOff x="0" y="0"/>
+          <a:chExt cx="0" cy="0"/>
+        </a:xfrm>
+      </p:grpSpPr>
+      <p:sp>
+        <p:nvSpPr>
+          <p:cNvPr id="2" name="Text 0"/>
+          <p:cNvSpPr/>
+          <p:nvPr/>
+        </p:nvSpPr>
+        <p:spPr>
+          <a:xfrm>
+            <a:off x="0" y="0"/>
+            <a:ext cx="9144000" cy="101501"/>
+          </a:xfrm>
+          <a:prstGeom prst="rect">
+            <a:avLst/>
+          </a:prstGeom>
+          <a:solidFill>
+            <a:srgbClr val="277884"/>
+          </a:solidFill>
+          <a:ln/>
+        </p:spPr>
+        <p:txBody>
+          <a:bodyPr wrap="square" rtlCol="0" anchor="ctr"/>
+          <a:lstStyle/>
+          <a:p>
+            <a:pPr indent="0" marL="0">
+              <a:buNone/>
+            </a:pPr>
+            <a:endParaRPr lang="en-US" dirty="0"/>
+          </a:p>
+        </p:txBody>
+      </p:sp>
+      <p:sp>
+        <p:nvSpPr>
+          <p:cNvPr id="3" name="Text 1"/>
+          <p:cNvSpPr/>
+          <p:nvPr/>
+        </p:nvSpPr>
+        <p:spPr>
+          <a:xfrm>
+            <a:off x="406301" y="457051"/>
+            <a:ext cx="8498026" cy="274290"/>
+          </a:xfrm>
+          <a:prstGeom prst="rect">
+            <a:avLst/>
+          </a:prstGeom>
+          <a:noFill/>
+          <a:ln/>
+        </p:spPr>
+        <p:txBody>
+          <a:bodyPr wrap="square" lIns="0" tIns="0" rIns="0" bIns="0" rtlCol="0" anchor="t"/>
+          <a:lstStyle/>
+          <a:p>
+            <a:pPr algn="l" indent="0" marL="0">
+              <a:lnSpc>
+                <a:spcPts val="2160"/>
+              </a:lnSpc>
+              <a:spcBef>
+                <a:spcPts val="600"/>
+              </a:spcBef>
+              <a:spcAft>
+                <a:spcPts val="800"/>
+              </a:spcAft>
+              <a:buNone/>
+            </a:pPr>
+            <a:r>
+              <a:rPr lang="en-US" sz="1800" b="1" dirty="0">
+                <a:solidFill>
+                  <a:srgbClr val="FE4447"/>
+                </a:solidFill>
+                <a:latin typeface="Georgia" pitchFamily="34" charset="0"/>
+                <a:ea typeface="Georgia" pitchFamily="34" charset="-122"/>
+                <a:cs typeface="Georgia" pitchFamily="34" charset="-120"/>
+              </a:rPr>
+              <a:t>Activity (15 min) — "What do I grab without asking?" (cont.)</a:t>
+            </a:r>
+            <a:endParaRPr lang="en-US" sz="1800" dirty="0"/>
+          </a:p>
+        </p:txBody>
+      </p:sp>
+      <p:sp>
+        <p:nvSpPr>
+          <p:cNvPr id="4" name="Text 2"/>
+          <p:cNvSpPr/>
+          <p:nvPr/>
+        </p:nvSpPr>
+        <p:spPr>
+          <a:xfrm>
+            <a:off x="634901" y="883593"/>
+            <a:ext cx="8102798" cy="731341"/>
+          </a:xfrm>
+          <a:prstGeom prst="rect">
+            <a:avLst/>
+          </a:prstGeom>
+          <a:noFill/>
+          <a:ln/>
+        </p:spPr>
+        <p:txBody>
+          <a:bodyPr wrap="square" lIns="0" tIns="0" rIns="0" bIns="0" rtlCol="0" anchor="t"/>
+          <a:lstStyle/>
+          <a:p>
+            <a:pPr algn="l" marL="342900" indent="-342900">
+              <a:lnSpc>
+                <a:spcPts val="1620"/>
+              </a:lnSpc>
+              <a:spcAft>
+                <a:spcPts val="300"/>
+              </a:spcAft>
+              <a:buSzPct val="100000"/>
+              <a:buChar char="•"/>
+            </a:pPr>
+            <a:r>
+              <a:rPr lang="en-US" sz="1200" dirty="0">
+                <a:solidFill>
+                  <a:srgbClr val="1C2833"/>
+                </a:solidFill>
+                <a:latin typeface="Arial" pitchFamily="34" charset="0"/>
+                <a:ea typeface="Arial" pitchFamily="34" charset="-122"/>
+                <a:cs typeface="Arial" pitchFamily="34" charset="-120"/>
+              </a:rPr>
+              <a:t>Pairs share two from their list. Pairs help each other classify.</a:t>
+            </a:r>
+            <a:endParaRPr lang="en-US" sz="1200" dirty="0"/>
+          </a:p>
+          <a:p>
+            <a:pPr algn="l" marL="342900" indent="-342900">
+              <a:lnSpc>
+                <a:spcPts val="1620"/>
+              </a:lnSpc>
+              <a:spcAft>
+                <a:spcPts val="300"/>
+              </a:spcAft>
+              <a:buSzPct val="100000"/>
+              <a:buChar char="•"/>
+            </a:pPr>
+            <a:r>
+              <a:rPr lang="en-US" sz="1200" b="1" dirty="0">
+                <a:solidFill>
+                  <a:srgbClr val="1C2833"/>
+                </a:solidFill>
+                <a:latin typeface="Arial" pitchFamily="34" charset="0"/>
+                <a:ea typeface="Arial" pitchFamily="34" charset="-122"/>
+                <a:cs typeface="Arial" pitchFamily="34" charset="-120"/>
+              </a:rPr>
+              <a:t>Whole-class discussion (5 min):</a:t>
+            </a:r>
+            <a:pPr algn="l" indent="0" marL="0">
+              <a:lnSpc>
+                <a:spcPts val="1620"/>
+              </a:lnSpc>
+              <a:spcAft>
+                <a:spcPts val="300"/>
+              </a:spcAft>
+              <a:buNone/>
+            </a:pPr>
+            <a:r>
+              <a:rPr lang="en-US" sz="1200" dirty="0">
+                <a:solidFill>
+                  <a:srgbClr val="1C2833"/>
+                </a:solidFill>
+                <a:latin typeface="Arial" pitchFamily="34" charset="0"/>
+                <a:ea typeface="Arial" pitchFamily="34" charset="-122"/>
+                <a:cs typeface="Arial" pitchFamily="34" charset="-120"/>
+              </a:rPr>
+              <a:t> </a:t>
+            </a:r>
+            <a:pPr algn="l" indent="0" marL="0">
+              <a:lnSpc>
+                <a:spcPts val="1620"/>
+              </a:lnSpc>
+              <a:spcAft>
+                <a:spcPts val="300"/>
+              </a:spcAft>
+              <a:buNone/>
+            </a:pPr>
+            <a:r>
+              <a:rPr lang="en-US" sz="1200" i="1" dirty="0">
+                <a:solidFill>
+                  <a:srgbClr val="1C2833"/>
+                </a:solidFill>
+                <a:latin typeface="Arial" pitchFamily="34" charset="0"/>
+                <a:ea typeface="Arial" pitchFamily="34" charset="-122"/>
+                <a:cs typeface="Arial" pitchFamily="34" charset="-120"/>
+              </a:rPr>
+              <a:t>"Of the grabs we listed — which is the easiest one to stop? Which is the hardest? Why?"</a:t>
+            </a:r>
+            <a:endParaRPr lang="en-US" sz="1200" dirty="0"/>
+          </a:p>
+        </p:txBody>
+      </p:sp>
+      <p:sp>
+        <p:nvSpPr>
+          <p:cNvPr id="5" name="Text 3"/>
+          <p:cNvSpPr/>
+          <p:nvPr/>
+        </p:nvSpPr>
+        <p:spPr>
+          <a:xfrm>
+            <a:off x="406301" y="4434929"/>
+            <a:ext cx="8498026" cy="213271"/>
+          </a:xfrm>
+          <a:prstGeom prst="rect">
+            <a:avLst/>
+          </a:prstGeom>
+          <a:noFill/>
+          <a:ln/>
+        </p:spPr>
+        <p:txBody>
+          <a:bodyPr wrap="square" lIns="0" tIns="0" rIns="0" bIns="0" rtlCol="0" anchor="t"/>
+          <a:lstStyle/>
+          <a:p>
+            <a:pPr algn="l" indent="0" marL="0">
+              <a:lnSpc>
+                <a:spcPts val="1680"/>
+              </a:lnSpc>
+              <a:spcBef>
+                <a:spcPts val="300"/>
+              </a:spcBef>
+              <a:spcAft>
+                <a:spcPts val="300"/>
+              </a:spcAft>
+              <a:buNone/>
+            </a:pPr>
+            <a:r>
+              <a:rPr lang="en-US" sz="1200" dirty="0">
+                <a:solidFill>
+                  <a:srgbClr val="1C2833"/>
+                </a:solidFill>
+                <a:latin typeface="Arial" pitchFamily="34" charset="0"/>
+                <a:ea typeface="Arial" pitchFamily="34" charset="-122"/>
+                <a:cs typeface="Arial" pitchFamily="34" charset="-120"/>
+              </a:rPr>
+              <a:t>Middle ·  · IKS Curriculum</a:t>
+            </a:r>
+            <a:endParaRPr lang="en-US" sz="1200" dirty="0"/>
+          </a:p>
+        </p:txBody>
+      </p:sp>
+    </p:spTree>
+  </p:cSld>
+  <p:clrMapOvr>
+    <a:masterClrMapping/>
+  </p:clrMapOvr>
+</p:sld>
+</file>
+
+<file path=ppt/slides/slide16.xml><?xml version="1.0" encoding="utf-8"?>
+<p:sld xmlns:a="http://schemas.openxmlformats.org/drawingml/2006/main" xmlns:r="http://schemas.openxmlformats.org/officeDocument/2006/relationships" xmlns:p="http://schemas.openxmlformats.org/presentationml/2006/main">
+  <p:cSld name="Slide 16">
+    <p:bg>
+      <p:bgPr>
+        <a:solidFill>
+          <a:srgbClr val="FFFFFF"/>
+        </a:solidFill>
+      </p:bgPr>
+    </p:bg>
+    <p:spTree>
+      <p:nvGrpSpPr>
+        <p:cNvPr id="1" name=""/>
+        <p:cNvGrpSpPr/>
+        <p:nvPr/>
+      </p:nvGrpSpPr>
+      <p:grpSpPr>
+        <a:xfrm>
+          <a:off x="0" y="0"/>
+          <a:ext cx="0" cy="0"/>
+          <a:chOff x="0" y="0"/>
+          <a:chExt cx="0" cy="0"/>
+        </a:xfrm>
+      </p:grpSpPr>
+      <p:sp>
+        <p:nvSpPr>
+          <p:cNvPr id="2" name="Text 0"/>
+          <p:cNvSpPr/>
+          <p:nvPr/>
+        </p:nvSpPr>
+        <p:spPr>
+          <a:xfrm>
+            <a:off x="0" y="0"/>
+            <a:ext cx="9144000" cy="101501"/>
+          </a:xfrm>
+          <a:prstGeom prst="rect">
+            <a:avLst/>
+          </a:prstGeom>
+          <a:solidFill>
+            <a:srgbClr val="277884"/>
+          </a:solidFill>
+          <a:ln/>
+        </p:spPr>
+        <p:txBody>
+          <a:bodyPr wrap="square" rtlCol="0" anchor="ctr"/>
+          <a:lstStyle/>
+          <a:p>
+            <a:pPr indent="0" marL="0">
+              <a:buNone/>
+            </a:pPr>
+            <a:endParaRPr lang="en-US" dirty="0"/>
+          </a:p>
+        </p:txBody>
+      </p:sp>
+      <p:sp>
+        <p:nvSpPr>
+          <p:cNvPr id="3" name="Text 1"/>
+          <p:cNvSpPr/>
+          <p:nvPr/>
+        </p:nvSpPr>
+        <p:spPr>
+          <a:xfrm>
+            <a:off x="406301" y="457051"/>
+            <a:ext cx="8498026" cy="274290"/>
+          </a:xfrm>
+          <a:prstGeom prst="rect">
+            <a:avLst/>
+          </a:prstGeom>
+          <a:noFill/>
+          <a:ln/>
+        </p:spPr>
+        <p:txBody>
+          <a:bodyPr wrap="square" lIns="0" tIns="0" rIns="0" bIns="0" rtlCol="0" anchor="t"/>
+          <a:lstStyle/>
+          <a:p>
+            <a:pPr algn="l" indent="0" marL="0">
+              <a:lnSpc>
+                <a:spcPts val="2160"/>
+              </a:lnSpc>
+              <a:spcBef>
+                <a:spcPts val="600"/>
+              </a:spcBef>
+              <a:spcAft>
+                <a:spcPts val="800"/>
+              </a:spcAft>
+              <a:buNone/>
+            </a:pPr>
+            <a:r>
+              <a:rPr lang="en-US" sz="1800" b="1" dirty="0">
+                <a:solidFill>
+                  <a:srgbClr val="FE4447"/>
+                </a:solidFill>
+                <a:latin typeface="Georgia" pitchFamily="34" charset="0"/>
+                <a:ea typeface="Georgia" pitchFamily="34" charset="-122"/>
+                <a:cs typeface="Georgia" pitchFamily="34" charset="-120"/>
+              </a:rPr>
+              <a:t>Wrap-up (5 min)</a:t>
+            </a:r>
+            <a:endParaRPr lang="en-US" sz="1800" dirty="0"/>
+          </a:p>
+        </p:txBody>
+      </p:sp>
+      <p:sp>
+        <p:nvSpPr>
+          <p:cNvPr id="4" name="Text 2"/>
+          <p:cNvSpPr/>
+          <p:nvPr/>
+        </p:nvSpPr>
+        <p:spPr>
+          <a:xfrm>
+            <a:off x="634901" y="883593"/>
+            <a:ext cx="8102798" cy="937022"/>
+          </a:xfrm>
+          <a:prstGeom prst="rect">
+            <a:avLst/>
+          </a:prstGeom>
+          <a:noFill/>
+          <a:ln/>
+        </p:spPr>
+        <p:txBody>
+          <a:bodyPr wrap="square" lIns="0" tIns="0" rIns="0" bIns="0" rtlCol="0" anchor="t"/>
+          <a:lstStyle/>
+          <a:p>
+            <a:pPr algn="l" marL="342900" indent="-342900">
+              <a:lnSpc>
+                <a:spcPts val="1620"/>
+              </a:lnSpc>
+              <a:spcAft>
+                <a:spcPts val="300"/>
+              </a:spcAft>
+              <a:buSzPct val="100000"/>
+              <a:buChar char="•"/>
+            </a:pPr>
+            <a:r>
+              <a:rPr lang="en-US" sz="1200" b="1" dirty="0">
+                <a:solidFill>
+                  <a:srgbClr val="1C2833"/>
+                </a:solidFill>
+                <a:latin typeface="Arial" pitchFamily="34" charset="0"/>
+                <a:ea typeface="Arial" pitchFamily="34" charset="-122"/>
+                <a:cs typeface="Arial" pitchFamily="34" charset="-120"/>
+              </a:rPr>
+              <a:t>Exit ticket</a:t>
+            </a:r>
+            <a:pPr algn="l" indent="0" marL="0">
+              <a:lnSpc>
+                <a:spcPts val="1620"/>
+              </a:lnSpc>
+              <a:spcAft>
+                <a:spcPts val="300"/>
+              </a:spcAft>
+              <a:buNone/>
+            </a:pPr>
+            <a:r>
+              <a:rPr lang="en-US" sz="1200" dirty="0">
+                <a:solidFill>
+                  <a:srgbClr val="1C2833"/>
+                </a:solidFill>
+                <a:latin typeface="Arial" pitchFamily="34" charset="0"/>
+                <a:ea typeface="Arial" pitchFamily="34" charset="-122"/>
+                <a:cs typeface="Arial" pitchFamily="34" charset="-120"/>
+              </a:rPr>
+              <a:t> (slip of paper): </a:t>
+            </a:r>
+            <a:pPr algn="l" indent="0" marL="0">
+              <a:lnSpc>
+                <a:spcPts val="1620"/>
+              </a:lnSpc>
+              <a:spcAft>
+                <a:spcPts val="300"/>
+              </a:spcAft>
+              <a:buNone/>
+            </a:pPr>
+            <a:r>
+              <a:rPr lang="en-US" sz="1200" i="1" dirty="0">
+                <a:solidFill>
+                  <a:srgbClr val="1C2833"/>
+                </a:solidFill>
+                <a:latin typeface="Arial" pitchFamily="34" charset="0"/>
+                <a:ea typeface="Arial" pitchFamily="34" charset="-122"/>
+                <a:cs typeface="Arial" pitchFamily="34" charset="-120"/>
+              </a:rPr>
+              <a:t>"My one specific habit-grab from now on will be a use, not a grab. Specifically: I will _______ instead of _______."</a:t>
+            </a:r>
+            <a:endParaRPr lang="en-US" sz="1200" dirty="0"/>
+          </a:p>
+          <a:p>
+            <a:pPr algn="l" marL="342900" indent="-342900">
+              <a:lnSpc>
+                <a:spcPts val="1620"/>
+              </a:lnSpc>
+              <a:spcAft>
+                <a:spcPts val="300"/>
+              </a:spcAft>
+              <a:buSzPct val="100000"/>
+              <a:buChar char="•"/>
+            </a:pPr>
+            <a:r>
+              <a:rPr lang="en-US" sz="1200" dirty="0">
+                <a:solidFill>
+                  <a:srgbClr val="1C2833"/>
+                </a:solidFill>
+                <a:latin typeface="Arial" pitchFamily="34" charset="0"/>
+                <a:ea typeface="Arial" pitchFamily="34" charset="-122"/>
+                <a:cs typeface="Arial" pitchFamily="34" charset="-120"/>
+              </a:rPr>
+              <a:t>Preview Day 8: </a:t>
+            </a:r>
+            <a:pPr algn="l" indent="0" marL="0">
+              <a:lnSpc>
+                <a:spcPts val="1620"/>
+              </a:lnSpc>
+              <a:spcAft>
+                <a:spcPts val="300"/>
+              </a:spcAft>
+              <a:buNone/>
+            </a:pPr>
+            <a:r>
+              <a:rPr lang="en-US" sz="1200" i="1" dirty="0">
+                <a:solidFill>
+                  <a:srgbClr val="1C2833"/>
+                </a:solidFill>
+                <a:latin typeface="Arial" pitchFamily="34" charset="0"/>
+                <a:ea typeface="Arial" pitchFamily="34" charset="-122"/>
+                <a:cs typeface="Arial" pitchFamily="34" charset="-120"/>
+              </a:rPr>
+              <a:t>"Tomorrow we look at the biggest grab humanity is collectively making — climate change. Then we put the framework to work."</a:t>
+            </a:r>
+            <a:endParaRPr lang="en-US" sz="1200" dirty="0"/>
+          </a:p>
+        </p:txBody>
+      </p:sp>
+      <p:sp>
+        <p:nvSpPr>
+          <p:cNvPr id="5" name="Text 3"/>
+          <p:cNvSpPr/>
+          <p:nvPr/>
+        </p:nvSpPr>
+        <p:spPr>
+          <a:xfrm>
+            <a:off x="406301" y="4434929"/>
+            <a:ext cx="8498026" cy="213271"/>
+          </a:xfrm>
+          <a:prstGeom prst="rect">
+            <a:avLst/>
+          </a:prstGeom>
+          <a:noFill/>
+          <a:ln/>
+        </p:spPr>
+        <p:txBody>
+          <a:bodyPr wrap="square" lIns="0" tIns="0" rIns="0" bIns="0" rtlCol="0" anchor="t"/>
+          <a:lstStyle/>
+          <a:p>
+            <a:pPr algn="l" indent="0" marL="0">
+              <a:lnSpc>
+                <a:spcPts val="1680"/>
+              </a:lnSpc>
+              <a:spcBef>
+                <a:spcPts val="300"/>
+              </a:spcBef>
+              <a:spcAft>
+                <a:spcPts val="300"/>
+              </a:spcAft>
+              <a:buNone/>
+            </a:pPr>
+            <a:r>
+              <a:rPr lang="en-US" sz="1200" dirty="0">
+                <a:solidFill>
+                  <a:srgbClr val="1C2833"/>
+                </a:solidFill>
+                <a:latin typeface="Arial" pitchFamily="34" charset="0"/>
+                <a:ea typeface="Arial" pitchFamily="34" charset="-122"/>
+                <a:cs typeface="Arial" pitchFamily="34" charset="-120"/>
+              </a:rPr>
+              <a:t>Middle ·  · IKS Curriculum</a:t>
+            </a:r>
+            <a:endParaRPr lang="en-US" sz="1200" dirty="0"/>
+          </a:p>
+        </p:txBody>
+      </p:sp>
+    </p:spTree>
+  </p:cSld>
+  <p:clrMapOvr>
+    <a:masterClrMapping/>
+  </p:clrMapOvr>
+</p:sld>
+</file>
+
+<file path=ppt/slides/slide17.xml><?xml version="1.0" encoding="utf-8"?>
+<p:sld xmlns:a="http://schemas.openxmlformats.org/drawingml/2006/main" xmlns:r="http://schemas.openxmlformats.org/officeDocument/2006/relationships" xmlns:p="http://schemas.openxmlformats.org/presentationml/2006/main">
+  <p:cSld name="Slide 17">
+    <p:bg>
+      <p:bgPr>
+        <a:solidFill>
+          <a:srgbClr val="FFFFFF"/>
+        </a:solidFill>
+      </p:bgPr>
+    </p:bg>
+    <p:spTree>
+      <p:nvGrpSpPr>
+        <p:cNvPr id="1" name=""/>
+        <p:cNvGrpSpPr/>
+        <p:nvPr/>
+      </p:nvGrpSpPr>
+      <p:grpSpPr>
+        <a:xfrm>
+          <a:off x="0" y="0"/>
+          <a:ext cx="0" cy="0"/>
+          <a:chOff x="0" y="0"/>
+          <a:chExt cx="0" cy="0"/>
+        </a:xfrm>
+      </p:grpSpPr>
+      <p:sp>
+        <p:nvSpPr>
+          <p:cNvPr id="2" name="Text 0"/>
+          <p:cNvSpPr/>
+          <p:nvPr/>
+        </p:nvSpPr>
+        <p:spPr>
+          <a:xfrm>
+            <a:off x="0" y="0"/>
+            <a:ext cx="9144000" cy="101501"/>
+          </a:xfrm>
+          <a:prstGeom prst="rect">
+            <a:avLst/>
+          </a:prstGeom>
+          <a:solidFill>
+            <a:srgbClr val="277884"/>
+          </a:solidFill>
+          <a:ln/>
+        </p:spPr>
+        <p:txBody>
+          <a:bodyPr wrap="square" rtlCol="0" anchor="ctr"/>
+          <a:lstStyle/>
+          <a:p>
+            <a:pPr indent="0" marL="0">
+              <a:buNone/>
+            </a:pPr>
+            <a:endParaRPr lang="en-US" dirty="0"/>
+          </a:p>
+        </p:txBody>
+      </p:sp>
+      <p:sp>
+        <p:nvSpPr>
+          <p:cNvPr id="3" name="Text 1"/>
+          <p:cNvSpPr/>
+          <p:nvPr/>
+        </p:nvSpPr>
+        <p:spPr>
+          <a:xfrm>
+            <a:off x="406301" y="457051"/>
+            <a:ext cx="8498026" cy="274290"/>
+          </a:xfrm>
+          <a:prstGeom prst="rect">
+            <a:avLst/>
+          </a:prstGeom>
+          <a:noFill/>
+          <a:ln/>
+        </p:spPr>
+        <p:txBody>
+          <a:bodyPr wrap="square" lIns="0" tIns="0" rIns="0" bIns="0" rtlCol="0" anchor="t"/>
+          <a:lstStyle/>
+          <a:p>
+            <a:pPr algn="l" indent="0" marL="0">
+              <a:lnSpc>
+                <a:spcPts val="2160"/>
+              </a:lnSpc>
+              <a:spcBef>
+                <a:spcPts val="600"/>
+              </a:spcBef>
+              <a:spcAft>
+                <a:spcPts val="800"/>
+              </a:spcAft>
+              <a:buNone/>
+            </a:pPr>
+            <a:r>
+              <a:rPr lang="en-US" sz="1800" b="1" dirty="0">
+                <a:solidFill>
+                  <a:srgbClr val="FE4447"/>
+                </a:solidFill>
+                <a:latin typeface="Georgia" pitchFamily="34" charset="0"/>
+                <a:ea typeface="Georgia" pitchFamily="34" charset="-122"/>
+                <a:cs typeface="Georgia" pitchFamily="34" charset="-120"/>
+              </a:rPr>
+              <a:t>Student-facing content</a:t>
+            </a:r>
+            <a:endParaRPr lang="en-US" sz="1800" dirty="0"/>
+          </a:p>
+        </p:txBody>
+      </p:sp>
+      <p:sp>
+        <p:nvSpPr>
+          <p:cNvPr id="4" name="Text 2"/>
+          <p:cNvSpPr/>
+          <p:nvPr/>
+        </p:nvSpPr>
+        <p:spPr>
+          <a:xfrm>
+            <a:off x="406301" y="883593"/>
+            <a:ext cx="8331398" cy="2919413"/>
+          </a:xfrm>
+          <a:prstGeom prst="rect">
+            <a:avLst/>
+          </a:prstGeom>
+          <a:solidFill>
+            <a:srgbClr val="F4F8F9"/>
+          </a:solidFill>
+          <a:ln/>
+        </p:spPr>
+        <p:txBody>
+          <a:bodyPr wrap="square" rtlCol="0" anchor="ctr"/>
+          <a:lstStyle/>
+          <a:p>
+            <a:pPr indent="0" marL="0">
+              <a:buNone/>
+            </a:pPr>
+            <a:endParaRPr lang="en-US" dirty="0"/>
+          </a:p>
+        </p:txBody>
+      </p:sp>
+      <p:sp>
+        <p:nvSpPr>
+          <p:cNvPr id="5" name="Shape 3"/>
+          <p:cNvSpPr/>
+          <p:nvPr/>
+        </p:nvSpPr>
+        <p:spPr>
+          <a:xfrm>
+            <a:off x="434876" y="883593"/>
+            <a:ext cx="0" cy="2919413"/>
+          </a:xfrm>
+          <a:prstGeom prst="line">
+            <a:avLst/>
+          </a:prstGeom>
+          <a:noFill/>
+          <a:ln w="57150">
+            <a:solidFill>
+              <a:srgbClr val="FE4447"/>
+            </a:solidFill>
+            <a:prstDash val="solid"/>
+          </a:ln>
+        </p:spPr>
+      </p:sp>
+      <p:sp>
+        <p:nvSpPr>
+          <p:cNvPr id="6" name="Text 4"/>
+          <p:cNvSpPr/>
+          <p:nvPr/>
+        </p:nvSpPr>
+        <p:spPr>
+          <a:xfrm>
+            <a:off x="692051" y="1074093"/>
+            <a:ext cx="7973389" cy="230981"/>
+          </a:xfrm>
+          <a:prstGeom prst="rect">
+            <a:avLst/>
+          </a:prstGeom>
+          <a:noFill/>
+          <a:ln/>
+        </p:spPr>
+        <p:txBody>
+          <a:bodyPr wrap="square" lIns="0" tIns="0" rIns="0" bIns="0" rtlCol="0" anchor="t"/>
+          <a:lstStyle/>
+          <a:p>
+            <a:pPr algn="l" indent="0" marL="0">
+              <a:lnSpc>
+                <a:spcPts val="1820"/>
+              </a:lnSpc>
+              <a:spcBef>
+                <a:spcPts val="300"/>
+              </a:spcBef>
+              <a:spcAft>
+                <a:spcPts val="300"/>
+              </a:spcAft>
+              <a:buNone/>
+            </a:pPr>
+            <a:r>
+              <a:rPr lang="en-US" sz="1300" b="1" i="1" dirty="0">
+                <a:solidFill>
+                  <a:srgbClr val="1C2833"/>
+                </a:solidFill>
+                <a:latin typeface="Georgia" pitchFamily="34" charset="0"/>
+                <a:ea typeface="Georgia" pitchFamily="34" charset="-122"/>
+                <a:cs typeface="Georgia" pitchFamily="34" charset="-120"/>
+              </a:rPr>
+              <a:t>Iṣopaniṣad mantra 1:</a:t>
+            </a:r>
+            <a:endParaRPr lang="en-US" sz="1300" dirty="0"/>
+          </a:p>
+        </p:txBody>
+      </p:sp>
+      <p:sp>
+        <p:nvSpPr>
+          <p:cNvPr id="7" name="Text 5"/>
+          <p:cNvSpPr/>
+          <p:nvPr/>
+        </p:nvSpPr>
+        <p:spPr>
+          <a:xfrm>
+            <a:off x="692051" y="1343174"/>
+            <a:ext cx="7973389" cy="692944"/>
+          </a:xfrm>
+          <a:prstGeom prst="rect">
+            <a:avLst/>
+          </a:prstGeom>
+          <a:noFill/>
+          <a:ln/>
+        </p:spPr>
+        <p:txBody>
+          <a:bodyPr wrap="square" lIns="0" tIns="0" rIns="0" bIns="0" rtlCol="0" anchor="t"/>
+          <a:lstStyle/>
+          <a:p>
+            <a:pPr algn="l" indent="0" marL="0">
+              <a:lnSpc>
+                <a:spcPts val="1820"/>
+              </a:lnSpc>
+              <a:spcBef>
+                <a:spcPts val="300"/>
+              </a:spcBef>
+              <a:spcAft>
+                <a:spcPts val="300"/>
+              </a:spcAft>
+              <a:buNone/>
+            </a:pPr>
+            <a:r>
+              <a:rPr lang="en-US" sz="1300" dirty="0">
+                <a:solidFill>
+                  <a:srgbClr val="1C2833"/>
+                </a:solidFill>
+                <a:latin typeface="Georgia" pitchFamily="34" charset="0"/>
+                <a:ea typeface="Georgia" pitchFamily="34" charset="-122"/>
+                <a:cs typeface="Georgia" pitchFamily="34" charset="-120"/>
+              </a:rPr>
+              <a:t>&gt; "</a:t>
+            </a:r>
+            <a:pPr algn="l" indent="0" marL="0">
+              <a:lnSpc>
+                <a:spcPts val="1820"/>
+              </a:lnSpc>
+              <a:spcBef>
+                <a:spcPts val="300"/>
+              </a:spcBef>
+              <a:spcAft>
+                <a:spcPts val="300"/>
+              </a:spcAft>
+              <a:buNone/>
+            </a:pPr>
+            <a:r>
+              <a:rPr lang="en-US" sz="1300" i="1" dirty="0">
+                <a:solidFill>
+                  <a:srgbClr val="1C2833"/>
+                </a:solidFill>
+                <a:latin typeface="Georgia" pitchFamily="34" charset="0"/>
+                <a:ea typeface="Georgia" pitchFamily="34" charset="-122"/>
+                <a:cs typeface="Georgia" pitchFamily="34" charset="-120"/>
+              </a:rPr>
+              <a:t>īśāvāsyam idaṁ sarvaṁ yat kiñca jagatyāṁ jagat / &gt; tena tyaktena bhuñjīthā mā gṛdhaḥ kasya svid dhanam //</a:t>
+            </a:r>
+            <a:pPr algn="l" indent="0" marL="0">
+              <a:lnSpc>
+                <a:spcPts val="1820"/>
+              </a:lnSpc>
+              <a:spcBef>
+                <a:spcPts val="300"/>
+              </a:spcBef>
+              <a:spcAft>
+                <a:spcPts val="300"/>
+              </a:spcAft>
+              <a:buNone/>
+            </a:pPr>
+            <a:r>
+              <a:rPr lang="en-US" sz="1300" dirty="0">
+                <a:solidFill>
+                  <a:srgbClr val="1C2833"/>
+                </a:solidFill>
+                <a:latin typeface="Georgia" pitchFamily="34" charset="0"/>
+                <a:ea typeface="Georgia" pitchFamily="34" charset="-122"/>
+                <a:cs typeface="Georgia" pitchFamily="34" charset="-120"/>
+              </a:rPr>
+              <a:t>" &gt; &gt; "All this — whatever moves in this moving world — is enveloped by the Lord. &gt; By that renunciation, enjoy. Do not covet anyone's wealth."</a:t>
+            </a:r>
+            <a:endParaRPr lang="en-US" sz="1300" dirty="0"/>
+          </a:p>
+        </p:txBody>
+      </p:sp>
+      <p:sp>
+        <p:nvSpPr>
+          <p:cNvPr id="8" name="Text 6"/>
+          <p:cNvSpPr/>
+          <p:nvPr/>
+        </p:nvSpPr>
+        <p:spPr>
+          <a:xfrm>
+            <a:off x="692051" y="2074218"/>
+            <a:ext cx="7973389" cy="230981"/>
+          </a:xfrm>
+          <a:prstGeom prst="rect">
+            <a:avLst/>
+          </a:prstGeom>
+          <a:noFill/>
+          <a:ln/>
+        </p:spPr>
+        <p:txBody>
+          <a:bodyPr wrap="square" lIns="0" tIns="0" rIns="0" bIns="0" rtlCol="0" anchor="t"/>
+          <a:lstStyle/>
+          <a:p>
+            <a:pPr algn="l" indent="0" marL="0">
+              <a:lnSpc>
+                <a:spcPts val="1820"/>
+              </a:lnSpc>
+              <a:spcBef>
+                <a:spcPts val="300"/>
+              </a:spcBef>
+              <a:spcAft>
+                <a:spcPts val="300"/>
+              </a:spcAft>
+              <a:buNone/>
+            </a:pPr>
+            <a:r>
+              <a:rPr lang="en-US" sz="1300" i="1" dirty="0">
+                <a:solidFill>
+                  <a:srgbClr val="1C2833"/>
+                </a:solidFill>
+                <a:latin typeface="Georgia" pitchFamily="34" charset="0"/>
+                <a:ea typeface="Georgia" pitchFamily="34" charset="-122"/>
+                <a:cs typeface="Georgia" pitchFamily="34" charset="-120"/>
+              </a:rPr>
+              <a:t>The verse gives three rules:</a:t>
+            </a:r>
+            <a:endParaRPr lang="en-US" sz="1300" dirty="0"/>
+          </a:p>
+        </p:txBody>
+      </p:sp>
+      <p:sp>
+        <p:nvSpPr>
+          <p:cNvPr id="9" name="Text 7"/>
+          <p:cNvSpPr/>
+          <p:nvPr/>
+        </p:nvSpPr>
+        <p:spPr>
+          <a:xfrm>
+            <a:off x="692051" y="2343299"/>
+            <a:ext cx="7973389" cy="230981"/>
+          </a:xfrm>
+          <a:prstGeom prst="rect">
+            <a:avLst/>
+          </a:prstGeom>
+          <a:noFill/>
+          <a:ln/>
+        </p:spPr>
+        <p:txBody>
+          <a:bodyPr wrap="square" lIns="0" tIns="0" rIns="0" bIns="0" rtlCol="0" anchor="t"/>
+          <a:lstStyle/>
+          <a:p>
+            <a:pPr algn="l" indent="0" marL="0">
+              <a:lnSpc>
+                <a:spcPts val="1820"/>
+              </a:lnSpc>
+              <a:spcBef>
+                <a:spcPts val="300"/>
+              </a:spcBef>
+              <a:spcAft>
+                <a:spcPts val="300"/>
+              </a:spcAft>
+              <a:buNone/>
+            </a:pPr>
+            <a:r>
+              <a:rPr lang="en-US" sz="1300" i="1" dirty="0">
+                <a:solidFill>
+                  <a:srgbClr val="1C2833"/>
+                </a:solidFill>
+                <a:latin typeface="Georgia" pitchFamily="34" charset="0"/>
+                <a:ea typeface="Georgia" pitchFamily="34" charset="-122"/>
+                <a:cs typeface="Georgia" pitchFamily="34" charset="-120"/>
+              </a:rPr>
+              <a:t>Nothing is yours by default.</a:t>
+            </a:r>
+            <a:endParaRPr lang="en-US" sz="1300" dirty="0"/>
+          </a:p>
+        </p:txBody>
+      </p:sp>
+      <p:sp>
+        <p:nvSpPr>
+          <p:cNvPr id="10" name="Text 8"/>
+          <p:cNvSpPr/>
+          <p:nvPr/>
+        </p:nvSpPr>
+        <p:spPr>
+          <a:xfrm>
+            <a:off x="692051" y="2612380"/>
+            <a:ext cx="7973389" cy="230981"/>
+          </a:xfrm>
+          <a:prstGeom prst="rect">
+            <a:avLst/>
+          </a:prstGeom>
+          <a:noFill/>
+          <a:ln/>
+        </p:spPr>
+        <p:txBody>
+          <a:bodyPr wrap="square" lIns="0" tIns="0" rIns="0" bIns="0" rtlCol="0" anchor="t"/>
+          <a:lstStyle/>
+          <a:p>
+            <a:pPr algn="l" indent="0" marL="0">
+              <a:lnSpc>
+                <a:spcPts val="1820"/>
+              </a:lnSpc>
+              <a:spcBef>
+                <a:spcPts val="300"/>
+              </a:spcBef>
+              <a:spcAft>
+                <a:spcPts val="300"/>
+              </a:spcAft>
+              <a:buNone/>
+            </a:pPr>
+            <a:r>
+              <a:rPr lang="en-US" sz="1300" i="1" dirty="0">
+                <a:solidFill>
+                  <a:srgbClr val="1C2833"/>
+                </a:solidFill>
+                <a:latin typeface="Georgia" pitchFamily="34" charset="0"/>
+                <a:ea typeface="Georgia" pitchFamily="34" charset="-122"/>
+                <a:cs typeface="Georgia" pitchFamily="34" charset="-120"/>
+              </a:rPr>
+              <a:t>Use what is given. Don't claim more.</a:t>
+            </a:r>
+            <a:endParaRPr lang="en-US" sz="1300" dirty="0"/>
+          </a:p>
+        </p:txBody>
+      </p:sp>
+      <p:sp>
+        <p:nvSpPr>
+          <p:cNvPr id="11" name="Text 9"/>
+          <p:cNvSpPr/>
+          <p:nvPr/>
+        </p:nvSpPr>
+        <p:spPr>
+          <a:xfrm>
+            <a:off x="692051" y="2881461"/>
+            <a:ext cx="7973389" cy="230981"/>
+          </a:xfrm>
+          <a:prstGeom prst="rect">
+            <a:avLst/>
+          </a:prstGeom>
+          <a:noFill/>
+          <a:ln/>
+        </p:spPr>
+        <p:txBody>
+          <a:bodyPr wrap="square" lIns="0" tIns="0" rIns="0" bIns="0" rtlCol="0" anchor="t"/>
+          <a:lstStyle/>
+          <a:p>
+            <a:pPr algn="l" indent="0" marL="0">
+              <a:lnSpc>
+                <a:spcPts val="1820"/>
+              </a:lnSpc>
+              <a:spcBef>
+                <a:spcPts val="300"/>
+              </a:spcBef>
+              <a:spcAft>
+                <a:spcPts val="300"/>
+              </a:spcAft>
+              <a:buNone/>
+            </a:pPr>
+            <a:r>
+              <a:rPr lang="en-US" sz="1300" i="1" dirty="0">
+                <a:solidFill>
+                  <a:srgbClr val="1C2833"/>
+                </a:solidFill>
+                <a:latin typeface="Georgia" pitchFamily="34" charset="0"/>
+                <a:ea typeface="Georgia" pitchFamily="34" charset="-122"/>
+                <a:cs typeface="Georgia" pitchFamily="34" charset="-120"/>
+              </a:rPr>
+              <a:t>Don't grab from anyone — human, being, or planet.</a:t>
+            </a:r>
+            <a:endParaRPr lang="en-US" sz="1300" dirty="0"/>
+          </a:p>
+        </p:txBody>
+      </p:sp>
+      <p:sp>
+        <p:nvSpPr>
+          <p:cNvPr id="12" name="Text 10"/>
+          <p:cNvSpPr/>
+          <p:nvPr/>
+        </p:nvSpPr>
+        <p:spPr>
+          <a:xfrm>
+            <a:off x="692051" y="3150543"/>
+            <a:ext cx="7973389" cy="461963"/>
+          </a:xfrm>
+          <a:prstGeom prst="rect">
+            <a:avLst/>
+          </a:prstGeom>
+          <a:noFill/>
+          <a:ln/>
+        </p:spPr>
+        <p:txBody>
+          <a:bodyPr wrap="square" lIns="0" tIns="0" rIns="0" bIns="0" rtlCol="0" anchor="t"/>
+          <a:lstStyle/>
+          <a:p>
+            <a:pPr algn="l" indent="0" marL="0">
+              <a:lnSpc>
+                <a:spcPts val="1820"/>
+              </a:lnSpc>
+              <a:spcBef>
+                <a:spcPts val="300"/>
+              </a:spcBef>
+              <a:spcAft>
+                <a:spcPts val="300"/>
+              </a:spcAft>
+              <a:buNone/>
+            </a:pPr>
+            <a:r>
+              <a:rPr lang="en-US" sz="1300" dirty="0">
+                <a:solidFill>
+                  <a:srgbClr val="1C2833"/>
+                </a:solidFill>
+                <a:latin typeface="Georgia" pitchFamily="34" charset="0"/>
+                <a:ea typeface="Georgia" pitchFamily="34" charset="-122"/>
+                <a:cs typeface="Georgia" pitchFamily="34" charset="-120"/>
+              </a:rPr>
+              <a:t>The Indic tradition extended </a:t>
+            </a:r>
+            <a:pPr algn="l" indent="0" marL="0">
+              <a:lnSpc>
+                <a:spcPts val="1820"/>
+              </a:lnSpc>
+              <a:spcBef>
+                <a:spcPts val="300"/>
+              </a:spcBef>
+              <a:spcAft>
+                <a:spcPts val="300"/>
+              </a:spcAft>
+              <a:buNone/>
+            </a:pPr>
+            <a:r>
+              <a:rPr lang="en-US" sz="1300" i="1" dirty="0">
+                <a:solidFill>
+                  <a:srgbClr val="1C2833"/>
+                </a:solidFill>
+                <a:latin typeface="Georgia" pitchFamily="34" charset="0"/>
+                <a:ea typeface="Georgia" pitchFamily="34" charset="-122"/>
+                <a:cs typeface="Georgia" pitchFamily="34" charset="-120"/>
+              </a:rPr>
+              <a:t>ahiṁsā</a:t>
+            </a:r>
+            <a:pPr algn="l" indent="0" marL="0">
+              <a:lnSpc>
+                <a:spcPts val="1820"/>
+              </a:lnSpc>
+              <a:spcBef>
+                <a:spcPts val="300"/>
+              </a:spcBef>
+              <a:spcAft>
+                <a:spcPts val="300"/>
+              </a:spcAft>
+              <a:buNone/>
+            </a:pPr>
+            <a:r>
+              <a:rPr lang="en-US" sz="1300" dirty="0">
+                <a:solidFill>
+                  <a:srgbClr val="1C2833"/>
+                </a:solidFill>
+                <a:latin typeface="Georgia" pitchFamily="34" charset="0"/>
+                <a:ea typeface="Georgia" pitchFamily="34" charset="-122"/>
+                <a:cs typeface="Georgia" pitchFamily="34" charset="-120"/>
+              </a:rPr>
+              <a:t> (non-harm) to all of life. Don't harm what you don't need to harm. Don't waste what you took. Don't take from a being's last resource.</a:t>
+            </a:r>
+            <a:endParaRPr lang="en-US" sz="1300" dirty="0"/>
+          </a:p>
+        </p:txBody>
+      </p:sp>
+      <p:sp>
+        <p:nvSpPr>
+          <p:cNvPr id="13" name="Text 11"/>
+          <p:cNvSpPr/>
+          <p:nvPr/>
+        </p:nvSpPr>
+        <p:spPr>
+          <a:xfrm>
+            <a:off x="406301" y="4434929"/>
+            <a:ext cx="8498026" cy="213271"/>
+          </a:xfrm>
+          <a:prstGeom prst="rect">
+            <a:avLst/>
+          </a:prstGeom>
+          <a:noFill/>
+          <a:ln/>
+        </p:spPr>
+        <p:txBody>
+          <a:bodyPr wrap="square" lIns="0" tIns="0" rIns="0" bIns="0" rtlCol="0" anchor="t"/>
+          <a:lstStyle/>
+          <a:p>
+            <a:pPr algn="l" indent="0" marL="0">
+              <a:lnSpc>
+                <a:spcPts val="1680"/>
+              </a:lnSpc>
+              <a:spcBef>
+                <a:spcPts val="300"/>
+              </a:spcBef>
+              <a:spcAft>
+                <a:spcPts val="300"/>
+              </a:spcAft>
+              <a:buNone/>
+            </a:pPr>
+            <a:r>
+              <a:rPr lang="en-US" sz="1200" dirty="0">
+                <a:solidFill>
+                  <a:srgbClr val="1C2833"/>
+                </a:solidFill>
+                <a:latin typeface="Arial" pitchFamily="34" charset="0"/>
+                <a:ea typeface="Arial" pitchFamily="34" charset="-122"/>
+                <a:cs typeface="Arial" pitchFamily="34" charset="-120"/>
+              </a:rPr>
+              <a:t>Middle ·  · IKS Curriculum</a:t>
+            </a:r>
+            <a:endParaRPr lang="en-US" sz="1200" dirty="0"/>
+          </a:p>
+        </p:txBody>
+      </p:sp>
+    </p:spTree>
+  </p:cSld>
+  <p:clrMapOvr>
+    <a:masterClrMapping/>
+  </p:clrMapOvr>
+</p:sld>
+</file>
+
+<file path=ppt/slides/slide18.xml><?xml version="1.0" encoding="utf-8"?>
+<p:sld xmlns:a="http://schemas.openxmlformats.org/drawingml/2006/main" xmlns:r="http://schemas.openxmlformats.org/officeDocument/2006/relationships" xmlns:p="http://schemas.openxmlformats.org/presentationml/2006/main">
+  <p:cSld name="Slide 18">
+    <p:bg>
+      <p:bgPr>
+        <a:solidFill>
+          <a:srgbClr val="FFFFFF"/>
+        </a:solidFill>
+      </p:bgPr>
+    </p:bg>
+    <p:spTree>
+      <p:nvGrpSpPr>
+        <p:cNvPr id="1" name=""/>
+        <p:cNvGrpSpPr/>
+        <p:nvPr/>
+      </p:nvGrpSpPr>
+      <p:grpSpPr>
+        <a:xfrm>
+          <a:off x="0" y="0"/>
+          <a:ext cx="0" cy="0"/>
+          <a:chOff x="0" y="0"/>
+          <a:chExt cx="0" cy="0"/>
+        </a:xfrm>
+      </p:grpSpPr>
+      <p:sp>
+        <p:nvSpPr>
+          <p:cNvPr id="2" name="Text 0"/>
+          <p:cNvSpPr/>
+          <p:nvPr/>
+        </p:nvSpPr>
+        <p:spPr>
+          <a:xfrm>
+            <a:off x="0" y="0"/>
+            <a:ext cx="9144000" cy="101501"/>
+          </a:xfrm>
+          <a:prstGeom prst="rect">
+            <a:avLst/>
+          </a:prstGeom>
+          <a:solidFill>
+            <a:srgbClr val="277884"/>
+          </a:solidFill>
+          <a:ln/>
+        </p:spPr>
+        <p:txBody>
+          <a:bodyPr wrap="square" rtlCol="0" anchor="ctr"/>
+          <a:lstStyle/>
+          <a:p>
+            <a:pPr indent="0" marL="0">
+              <a:buNone/>
+            </a:pPr>
+            <a:endParaRPr lang="en-US" dirty="0"/>
+          </a:p>
+        </p:txBody>
+      </p:sp>
+      <p:sp>
+        <p:nvSpPr>
+          <p:cNvPr id="3" name="Text 1"/>
+          <p:cNvSpPr/>
+          <p:nvPr/>
+        </p:nvSpPr>
+        <p:spPr>
+          <a:xfrm>
+            <a:off x="406301" y="457051"/>
+            <a:ext cx="8498026" cy="274290"/>
+          </a:xfrm>
+          <a:prstGeom prst="rect">
+            <a:avLst/>
+          </a:prstGeom>
+          <a:noFill/>
+          <a:ln/>
+        </p:spPr>
+        <p:txBody>
+          <a:bodyPr wrap="square" lIns="0" tIns="0" rIns="0" bIns="0" rtlCol="0" anchor="t"/>
+          <a:lstStyle/>
+          <a:p>
+            <a:pPr algn="l" indent="0" marL="0">
+              <a:lnSpc>
+                <a:spcPts val="2160"/>
+              </a:lnSpc>
+              <a:spcBef>
+                <a:spcPts val="600"/>
+              </a:spcBef>
+              <a:spcAft>
+                <a:spcPts val="800"/>
+              </a:spcAft>
+              <a:buNone/>
+            </a:pPr>
+            <a:r>
+              <a:rPr lang="en-US" sz="1800" b="1" dirty="0">
+                <a:solidFill>
+                  <a:srgbClr val="FE4447"/>
+                </a:solidFill>
+                <a:latin typeface="Georgia" pitchFamily="34" charset="0"/>
+                <a:ea typeface="Georgia" pitchFamily="34" charset="-122"/>
+                <a:cs typeface="Georgia" pitchFamily="34" charset="-120"/>
+              </a:rPr>
+              <a:t>Homework</a:t>
+            </a:r>
+            <a:endParaRPr lang="en-US" sz="1800" dirty="0"/>
+          </a:p>
+        </p:txBody>
+      </p:sp>
+      <p:sp>
+        <p:nvSpPr>
+          <p:cNvPr id="4" name="Text 2"/>
+          <p:cNvSpPr/>
+          <p:nvPr/>
+        </p:nvSpPr>
+        <p:spPr>
+          <a:xfrm>
+            <a:off x="634901" y="883593"/>
+            <a:ext cx="8102798" cy="487561"/>
+          </a:xfrm>
+          <a:prstGeom prst="rect">
+            <a:avLst/>
+          </a:prstGeom>
+          <a:noFill/>
+          <a:ln/>
+        </p:spPr>
+        <p:txBody>
+          <a:bodyPr wrap="square" lIns="0" tIns="0" rIns="0" bIns="0" rtlCol="0" anchor="t"/>
+          <a:lstStyle/>
+          <a:p>
+            <a:pPr algn="l" marL="342900" indent="-342900">
+              <a:lnSpc>
+                <a:spcPts val="1620"/>
+              </a:lnSpc>
+              <a:spcAft>
+                <a:spcPts val="300"/>
+              </a:spcAft>
+              <a:buSzPct val="100000"/>
+              <a:buChar char="•"/>
+            </a:pPr>
+            <a:r>
+              <a:rPr lang="en-US" sz="1200" dirty="0">
+                <a:solidFill>
+                  <a:srgbClr val="1C2833"/>
+                </a:solidFill>
+                <a:latin typeface="Arial" pitchFamily="34" charset="0"/>
+                <a:ea typeface="Arial" pitchFamily="34" charset="-122"/>
+                <a:cs typeface="Arial" pitchFamily="34" charset="-120"/>
+              </a:rPr>
+              <a:t>Pick one </a:t>
+            </a:r>
+            <a:pPr algn="l" indent="0" marL="0">
+              <a:lnSpc>
+                <a:spcPts val="1620"/>
+              </a:lnSpc>
+              <a:spcAft>
+                <a:spcPts val="300"/>
+              </a:spcAft>
+              <a:buNone/>
+            </a:pPr>
+            <a:r>
+              <a:rPr lang="en-US" sz="1200" i="1" dirty="0">
+                <a:solidFill>
+                  <a:srgbClr val="1C2833"/>
+                </a:solidFill>
+                <a:latin typeface="Arial" pitchFamily="34" charset="0"/>
+                <a:ea typeface="Arial" pitchFamily="34" charset="-122"/>
+                <a:cs typeface="Arial" pitchFamily="34" charset="-120"/>
+              </a:rPr>
+              <a:t>grab</a:t>
+            </a:r>
+            <a:pPr algn="l" indent="0" marL="0">
+              <a:lnSpc>
+                <a:spcPts val="1620"/>
+              </a:lnSpc>
+              <a:spcAft>
+                <a:spcPts val="300"/>
+              </a:spcAft>
+              <a:buNone/>
+            </a:pPr>
+            <a:r>
+              <a:rPr lang="en-US" sz="1200" dirty="0">
+                <a:solidFill>
+                  <a:srgbClr val="1C2833"/>
+                </a:solidFill>
+                <a:latin typeface="Arial" pitchFamily="34" charset="0"/>
+                <a:ea typeface="Arial" pitchFamily="34" charset="-122"/>
+                <a:cs typeface="Arial" pitchFamily="34" charset="-120"/>
+              </a:rPr>
+              <a:t> from your list today. For 24 hours, replace it with a </a:t>
+            </a:r>
+            <a:pPr algn="l" indent="0" marL="0">
+              <a:lnSpc>
+                <a:spcPts val="1620"/>
+              </a:lnSpc>
+              <a:spcAft>
+                <a:spcPts val="300"/>
+              </a:spcAft>
+              <a:buNone/>
+            </a:pPr>
+            <a:r>
+              <a:rPr lang="en-US" sz="1200" i="1" dirty="0">
+                <a:solidFill>
+                  <a:srgbClr val="1C2833"/>
+                </a:solidFill>
+                <a:latin typeface="Arial" pitchFamily="34" charset="0"/>
+                <a:ea typeface="Arial" pitchFamily="34" charset="-122"/>
+                <a:cs typeface="Arial" pitchFamily="34" charset="-120"/>
+              </a:rPr>
+              <a:t>use</a:t>
+            </a:r>
+            <a:pPr algn="l" indent="0" marL="0">
+              <a:lnSpc>
+                <a:spcPts val="1620"/>
+              </a:lnSpc>
+              <a:spcAft>
+                <a:spcPts val="300"/>
+              </a:spcAft>
+              <a:buNone/>
+            </a:pPr>
+            <a:r>
+              <a:rPr lang="en-US" sz="1200" dirty="0">
+                <a:solidFill>
+                  <a:srgbClr val="1C2833"/>
+                </a:solidFill>
+                <a:latin typeface="Arial" pitchFamily="34" charset="0"/>
+                <a:ea typeface="Arial" pitchFamily="34" charset="-122"/>
+                <a:cs typeface="Arial" pitchFamily="34" charset="-120"/>
+              </a:rPr>
+              <a:t>. Be specific. Bring tomorrow a 3-sentence note on whether it worked.</a:t>
+            </a:r>
+            <a:endParaRPr lang="en-US" sz="1200" dirty="0"/>
+          </a:p>
+        </p:txBody>
+      </p:sp>
+      <p:sp>
+        <p:nvSpPr>
+          <p:cNvPr id="5" name="Text 3"/>
+          <p:cNvSpPr/>
+          <p:nvPr/>
+        </p:nvSpPr>
+        <p:spPr>
+          <a:xfrm>
+            <a:off x="406301" y="4434929"/>
+            <a:ext cx="8498026" cy="213271"/>
+          </a:xfrm>
+          <a:prstGeom prst="rect">
+            <a:avLst/>
+          </a:prstGeom>
+          <a:noFill/>
+          <a:ln/>
+        </p:spPr>
+        <p:txBody>
+          <a:bodyPr wrap="square" lIns="0" tIns="0" rIns="0" bIns="0" rtlCol="0" anchor="t"/>
+          <a:lstStyle/>
+          <a:p>
+            <a:pPr algn="l" indent="0" marL="0">
+              <a:lnSpc>
+                <a:spcPts val="1680"/>
+              </a:lnSpc>
+              <a:spcBef>
+                <a:spcPts val="300"/>
+              </a:spcBef>
+              <a:spcAft>
+                <a:spcPts val="300"/>
+              </a:spcAft>
+              <a:buNone/>
+            </a:pPr>
+            <a:r>
+              <a:rPr lang="en-US" sz="1200" dirty="0">
+                <a:solidFill>
+                  <a:srgbClr val="1C2833"/>
+                </a:solidFill>
+                <a:latin typeface="Arial" pitchFamily="34" charset="0"/>
+                <a:ea typeface="Arial" pitchFamily="34" charset="-122"/>
+                <a:cs typeface="Arial" pitchFamily="34" charset="-120"/>
+              </a:rPr>
+              <a:t>Middle ·  · IKS Curriculum</a:t>
+            </a:r>
+            <a:endParaRPr lang="en-US" sz="1200" dirty="0"/>
+          </a:p>
+        </p:txBody>
+      </p:sp>
+    </p:spTree>
+  </p:cSld>
+  <p:clrMapOvr>
+    <a:masterClrMapping/>
+  </p:clrMapOvr>
+</p:sld>
+</file>
+
+<file path=ppt/slides/slide19.xml><?xml version="1.0" encoding="utf-8"?>
+<p:sld xmlns:a="http://schemas.openxmlformats.org/drawingml/2006/main" xmlns:r="http://schemas.openxmlformats.org/officeDocument/2006/relationships" xmlns:p="http://schemas.openxmlformats.org/presentationml/2006/main">
+  <p:cSld name="Slide 19">
+    <p:bg>
+      <p:bgPr>
+        <a:solidFill>
+          <a:srgbClr val="FFFFFF"/>
+        </a:solidFill>
+      </p:bgPr>
+    </p:bg>
+    <p:spTree>
+      <p:nvGrpSpPr>
+        <p:cNvPr id="1" name=""/>
+        <p:cNvGrpSpPr/>
+        <p:nvPr/>
+      </p:nvGrpSpPr>
+      <p:grpSpPr>
+        <a:xfrm>
+          <a:off x="0" y="0"/>
+          <a:ext cx="0" cy="0"/>
+          <a:chOff x="0" y="0"/>
+          <a:chExt cx="0" cy="0"/>
+        </a:xfrm>
+      </p:grpSpPr>
+      <p:sp>
+        <p:nvSpPr>
+          <p:cNvPr id="2" name="Text 0"/>
+          <p:cNvSpPr/>
+          <p:nvPr/>
+        </p:nvSpPr>
+        <p:spPr>
+          <a:xfrm>
+            <a:off x="0" y="0"/>
+            <a:ext cx="9144000" cy="101501"/>
+          </a:xfrm>
+          <a:prstGeom prst="rect">
+            <a:avLst/>
+          </a:prstGeom>
+          <a:solidFill>
+            <a:srgbClr val="277884"/>
+          </a:solidFill>
+          <a:ln/>
+        </p:spPr>
+        <p:txBody>
+          <a:bodyPr wrap="square" rtlCol="0" anchor="ctr"/>
+          <a:lstStyle/>
+          <a:p>
+            <a:pPr indent="0" marL="0">
+              <a:buNone/>
+            </a:pPr>
+            <a:endParaRPr lang="en-US" dirty="0"/>
+          </a:p>
+        </p:txBody>
+      </p:sp>
+      <p:sp>
+        <p:nvSpPr>
+          <p:cNvPr id="3" name="Text 1"/>
+          <p:cNvSpPr/>
+          <p:nvPr/>
+        </p:nvSpPr>
+        <p:spPr>
+          <a:xfrm>
+            <a:off x="406301" y="457051"/>
+            <a:ext cx="8498026" cy="274290"/>
+          </a:xfrm>
+          <a:prstGeom prst="rect">
+            <a:avLst/>
+          </a:prstGeom>
+          <a:noFill/>
+          <a:ln/>
+        </p:spPr>
+        <p:txBody>
+          <a:bodyPr wrap="square" lIns="0" tIns="0" rIns="0" bIns="0" rtlCol="0" anchor="t"/>
+          <a:lstStyle/>
+          <a:p>
+            <a:pPr algn="l" indent="0" marL="0">
+              <a:lnSpc>
+                <a:spcPts val="2160"/>
+              </a:lnSpc>
+              <a:spcBef>
+                <a:spcPts val="600"/>
+              </a:spcBef>
+              <a:spcAft>
+                <a:spcPts val="800"/>
+              </a:spcAft>
+              <a:buNone/>
+            </a:pPr>
+            <a:r>
+              <a:rPr lang="en-US" sz="1800" b="1" dirty="0">
+                <a:solidFill>
+                  <a:srgbClr val="FE4447"/>
+                </a:solidFill>
+                <a:latin typeface="Georgia" pitchFamily="34" charset="0"/>
+                <a:ea typeface="Georgia" pitchFamily="34" charset="-122"/>
+                <a:cs typeface="Georgia" pitchFamily="34" charset="-120"/>
+              </a:rPr>
+              <a:t>Differentiation</a:t>
+            </a:r>
+            <a:endParaRPr lang="en-US" sz="1800" dirty="0"/>
+          </a:p>
+        </p:txBody>
+      </p:sp>
+      <p:sp>
+        <p:nvSpPr>
+          <p:cNvPr id="4" name="Text 2"/>
+          <p:cNvSpPr/>
+          <p:nvPr/>
+        </p:nvSpPr>
+        <p:spPr>
+          <a:xfrm>
+            <a:off x="634901" y="883593"/>
+            <a:ext cx="8102798" cy="1142702"/>
+          </a:xfrm>
+          <a:prstGeom prst="rect">
+            <a:avLst/>
+          </a:prstGeom>
+          <a:noFill/>
+          <a:ln/>
+        </p:spPr>
+        <p:txBody>
+          <a:bodyPr wrap="square" lIns="0" tIns="0" rIns="0" bIns="0" rtlCol="0" anchor="t"/>
+          <a:lstStyle/>
+          <a:p>
+            <a:pPr algn="l" marL="342900" indent="-342900">
+              <a:lnSpc>
+                <a:spcPts val="1620"/>
+              </a:lnSpc>
+              <a:spcAft>
+                <a:spcPts val="300"/>
+              </a:spcAft>
+              <a:buSzPct val="100000"/>
+              <a:buChar char="•"/>
+            </a:pPr>
+            <a:r>
+              <a:rPr lang="en-US" sz="1200" b="1" dirty="0">
+                <a:solidFill>
+                  <a:srgbClr val="1C2833"/>
+                </a:solidFill>
+                <a:latin typeface="Arial" pitchFamily="34" charset="0"/>
+                <a:ea typeface="Arial" pitchFamily="34" charset="-122"/>
+                <a:cs typeface="Arial" pitchFamily="34" charset="-120"/>
+              </a:rPr>
+              <a:t>One tier up:</a:t>
+            </a:r>
+            <a:pPr algn="l" indent="0" marL="0">
+              <a:lnSpc>
+                <a:spcPts val="1620"/>
+              </a:lnSpc>
+              <a:spcAft>
+                <a:spcPts val="300"/>
+              </a:spcAft>
+              <a:buNone/>
+            </a:pPr>
+            <a:r>
+              <a:rPr lang="en-US" sz="1200" dirty="0">
+                <a:solidFill>
+                  <a:srgbClr val="1C2833"/>
+                </a:solidFill>
+                <a:latin typeface="Arial" pitchFamily="34" charset="0"/>
+                <a:ea typeface="Arial" pitchFamily="34" charset="-122"/>
+                <a:cs typeface="Arial" pitchFamily="34" charset="-120"/>
+              </a:rPr>
+              <a:t> Compare </a:t>
+            </a:r>
+            <a:pPr algn="l" indent="0" marL="0">
+              <a:lnSpc>
+                <a:spcPts val="1620"/>
+              </a:lnSpc>
+              <a:spcAft>
+                <a:spcPts val="300"/>
+              </a:spcAft>
+              <a:buNone/>
+            </a:pPr>
+            <a:r>
+              <a:rPr lang="en-US" sz="1200" i="1" dirty="0">
+                <a:solidFill>
+                  <a:srgbClr val="1C2833"/>
+                </a:solidFill>
+                <a:latin typeface="Arial" pitchFamily="34" charset="0"/>
+                <a:ea typeface="Arial" pitchFamily="34" charset="-122"/>
+                <a:cs typeface="Arial" pitchFamily="34" charset="-120"/>
+              </a:rPr>
+              <a:t>tena tyaktena bhuñjīthāḥ</a:t>
+            </a:r>
+            <a:pPr algn="l" indent="0" marL="0">
+              <a:lnSpc>
+                <a:spcPts val="1620"/>
+              </a:lnSpc>
+              <a:spcAft>
+                <a:spcPts val="300"/>
+              </a:spcAft>
+              <a:buNone/>
+            </a:pPr>
+            <a:r>
+              <a:rPr lang="en-US" sz="1200" dirty="0">
+                <a:solidFill>
+                  <a:srgbClr val="1C2833"/>
+                </a:solidFill>
+                <a:latin typeface="Arial" pitchFamily="34" charset="0"/>
+                <a:ea typeface="Arial" pitchFamily="34" charset="-122"/>
+                <a:cs typeface="Arial" pitchFamily="34" charset="-120"/>
+              </a:rPr>
+              <a:t> with the modern concept of "the commons" (a resource shared by a community, with rules against private grabbing). Elinor Ostrom won the 2009 Nobel in Economics for showing how communities self-organise to manage commons. What does the Upaniṣad add that economics doesn't?</a:t>
+            </a:r>
+            <a:endParaRPr lang="en-US" sz="1200" dirty="0"/>
+          </a:p>
+          <a:p>
+            <a:pPr algn="l" marL="342900" indent="-342900">
+              <a:lnSpc>
+                <a:spcPts val="1620"/>
+              </a:lnSpc>
+              <a:spcAft>
+                <a:spcPts val="300"/>
+              </a:spcAft>
+              <a:buSzPct val="100000"/>
+              <a:buChar char="•"/>
+            </a:pPr>
+            <a:r>
+              <a:rPr lang="en-US" sz="1200" b="1" dirty="0">
+                <a:solidFill>
+                  <a:srgbClr val="1C2833"/>
+                </a:solidFill>
+                <a:latin typeface="Arial" pitchFamily="34" charset="0"/>
+                <a:ea typeface="Arial" pitchFamily="34" charset="-122"/>
+                <a:cs typeface="Arial" pitchFamily="34" charset="-120"/>
+              </a:rPr>
+              <a:t>One tier down:</a:t>
+            </a:r>
+            <a:pPr algn="l" indent="0" marL="0">
+              <a:lnSpc>
+                <a:spcPts val="1620"/>
+              </a:lnSpc>
+              <a:spcAft>
+                <a:spcPts val="300"/>
+              </a:spcAft>
+              <a:buNone/>
+            </a:pPr>
+            <a:r>
+              <a:rPr lang="en-US" sz="1200" dirty="0">
+                <a:solidFill>
+                  <a:srgbClr val="1C2833"/>
+                </a:solidFill>
+                <a:latin typeface="Arial" pitchFamily="34" charset="0"/>
+                <a:ea typeface="Arial" pitchFamily="34" charset="-122"/>
+                <a:cs typeface="Arial" pitchFamily="34" charset="-120"/>
+              </a:rPr>
+              <a:t> Memorise just the second half of the mantra: </a:t>
+            </a:r>
+            <a:pPr algn="l" indent="0" marL="0">
+              <a:lnSpc>
+                <a:spcPts val="1620"/>
+              </a:lnSpc>
+              <a:spcAft>
+                <a:spcPts val="300"/>
+              </a:spcAft>
+              <a:buNone/>
+            </a:pPr>
+            <a:r>
+              <a:rPr lang="en-US" sz="1200" i="1" dirty="0">
+                <a:solidFill>
+                  <a:srgbClr val="1C2833"/>
+                </a:solidFill>
+                <a:latin typeface="Arial" pitchFamily="34" charset="0"/>
+                <a:ea typeface="Arial" pitchFamily="34" charset="-122"/>
+                <a:cs typeface="Arial" pitchFamily="34" charset="-120"/>
+              </a:rPr>
+              <a:t>"By renouncing, enjoy. Do not covet anyone's wealth."</a:t>
+            </a:r>
+            <a:pPr algn="l" indent="0" marL="0">
+              <a:lnSpc>
+                <a:spcPts val="1620"/>
+              </a:lnSpc>
+              <a:spcAft>
+                <a:spcPts val="300"/>
+              </a:spcAft>
+              <a:buNone/>
+            </a:pPr>
+            <a:r>
+              <a:rPr lang="en-US" sz="1200" dirty="0">
+                <a:solidFill>
+                  <a:srgbClr val="1C2833"/>
+                </a:solidFill>
+                <a:latin typeface="Arial" pitchFamily="34" charset="0"/>
+                <a:ea typeface="Arial" pitchFamily="34" charset="-122"/>
+                <a:cs typeface="Arial" pitchFamily="34" charset="-120"/>
+              </a:rPr>
+              <a:t> That's the practical rule.</a:t>
+            </a:r>
+            <a:endParaRPr lang="en-US" sz="1200" dirty="0"/>
+          </a:p>
+        </p:txBody>
+      </p:sp>
+      <p:sp>
+        <p:nvSpPr>
+          <p:cNvPr id="5" name="Text 3"/>
           <p:cNvSpPr/>
           <p:nvPr/>
         </p:nvSpPr>
@@ -3728,7 +6861,7 @@
                 <a:ea typeface="Georgia" pitchFamily="34" charset="-122"/>
                 <a:cs typeface="Georgia" pitchFamily="34" charset="-120"/>
               </a:rPr>
-              <a:t>Materials</a:t>
+              <a:t>Learning objective</a:t>
             </a:r>
             <a:endParaRPr lang="en-US" sz="1800" dirty="0"/>
           </a:p>
@@ -3743,7 +6876,7 @@
         <p:spPr>
           <a:xfrm>
             <a:off x="406301" y="870942"/>
-            <a:ext cx="8498026" cy="213271"/>
+            <a:ext cx="8498026" cy="426541"/>
           </a:xfrm>
           <a:prstGeom prst="rect">
             <a:avLst/>
@@ -3776,7 +6909,7 @@
                 <a:ea typeface="Arial" pitchFamily="34" charset="-122"/>
                 <a:cs typeface="Arial" pitchFamily="34" charset="-120"/>
               </a:rPr>
-              <a:t>– Printed handout: </a:t>
+              <a:t>Students recite </a:t>
             </a:r>
             <a:pPr algn="l" indent="0" marL="0">
               <a:lnSpc>
@@ -3822,7 +6955,1051 @@
                 <a:ea typeface="Arial" pitchFamily="34" charset="-122"/>
                 <a:cs typeface="Arial" pitchFamily="34" charset="-120"/>
               </a:rPr>
-              <a:t> mantra 1 in IAST + translation, one per student – Notebook – Whiteboard</a:t>
+              <a:t> mantra 1, identify the three injunctions it contains (treat all as enveloped by the divine; enjoy by renouncing; do not covet), and apply the "use, don't grab" ethic to one specific consumption habit of their own.</a:t>
+            </a:r>
+            <a:endParaRPr lang="en-US" sz="1200" dirty="0"/>
+          </a:p>
+        </p:txBody>
+      </p:sp>
+      <p:sp>
+        <p:nvSpPr>
+          <p:cNvPr id="5" name="Text 3"/>
+          <p:cNvSpPr/>
+          <p:nvPr/>
+        </p:nvSpPr>
+        <p:spPr>
+          <a:xfrm>
+            <a:off x="406301" y="4434929"/>
+            <a:ext cx="8498026" cy="213271"/>
+          </a:xfrm>
+          <a:prstGeom prst="rect">
+            <a:avLst/>
+          </a:prstGeom>
+          <a:noFill/>
+          <a:ln/>
+        </p:spPr>
+        <p:txBody>
+          <a:bodyPr wrap="square" lIns="0" tIns="0" rIns="0" bIns="0" rtlCol="0" anchor="t"/>
+          <a:lstStyle/>
+          <a:p>
+            <a:pPr algn="l" indent="0" marL="0">
+              <a:lnSpc>
+                <a:spcPts val="1680"/>
+              </a:lnSpc>
+              <a:spcBef>
+                <a:spcPts val="300"/>
+              </a:spcBef>
+              <a:spcAft>
+                <a:spcPts val="300"/>
+              </a:spcAft>
+              <a:buNone/>
+            </a:pPr>
+            <a:r>
+              <a:rPr lang="en-US" sz="1200" dirty="0">
+                <a:solidFill>
+                  <a:srgbClr val="1C2833"/>
+                </a:solidFill>
+                <a:latin typeface="Arial" pitchFamily="34" charset="0"/>
+                <a:ea typeface="Arial" pitchFamily="34" charset="-122"/>
+                <a:cs typeface="Arial" pitchFamily="34" charset="-120"/>
+              </a:rPr>
+              <a:t>Middle ·  · IKS Curriculum</a:t>
+            </a:r>
+            <a:endParaRPr lang="en-US" sz="1200" dirty="0"/>
+          </a:p>
+        </p:txBody>
+      </p:sp>
+    </p:spTree>
+  </p:cSld>
+  <p:clrMapOvr>
+    <a:masterClrMapping/>
+  </p:clrMapOvr>
+</p:sld>
+</file>
+
+<file path=ppt/slides/slide20.xml><?xml version="1.0" encoding="utf-8"?>
+<p:sld xmlns:a="http://schemas.openxmlformats.org/drawingml/2006/main" xmlns:r="http://schemas.openxmlformats.org/officeDocument/2006/relationships" xmlns:p="http://schemas.openxmlformats.org/presentationml/2006/main">
+  <p:cSld name="Slide 20">
+    <p:bg>
+      <p:bgPr>
+        <a:solidFill>
+          <a:srgbClr val="FFFFFF"/>
+        </a:solidFill>
+      </p:bgPr>
+    </p:bg>
+    <p:spTree>
+      <p:nvGrpSpPr>
+        <p:cNvPr id="1" name=""/>
+        <p:cNvGrpSpPr/>
+        <p:nvPr/>
+      </p:nvGrpSpPr>
+      <p:grpSpPr>
+        <a:xfrm>
+          <a:off x="0" y="0"/>
+          <a:ext cx="0" cy="0"/>
+          <a:chOff x="0" y="0"/>
+          <a:chExt cx="0" cy="0"/>
+        </a:xfrm>
+      </p:grpSpPr>
+      <p:sp>
+        <p:nvSpPr>
+          <p:cNvPr id="2" name="Text 0"/>
+          <p:cNvSpPr/>
+          <p:nvPr/>
+        </p:nvSpPr>
+        <p:spPr>
+          <a:xfrm>
+            <a:off x="0" y="0"/>
+            <a:ext cx="9144000" cy="101501"/>
+          </a:xfrm>
+          <a:prstGeom prst="rect">
+            <a:avLst/>
+          </a:prstGeom>
+          <a:solidFill>
+            <a:srgbClr val="277884"/>
+          </a:solidFill>
+          <a:ln/>
+        </p:spPr>
+        <p:txBody>
+          <a:bodyPr wrap="square" rtlCol="0" anchor="ctr"/>
+          <a:lstStyle/>
+          <a:p>
+            <a:pPr indent="0" marL="0">
+              <a:buNone/>
+            </a:pPr>
+            <a:endParaRPr lang="en-US" dirty="0"/>
+          </a:p>
+        </p:txBody>
+      </p:sp>
+      <p:sp>
+        <p:nvSpPr>
+          <p:cNvPr id="3" name="Text 1"/>
+          <p:cNvSpPr/>
+          <p:nvPr/>
+        </p:nvSpPr>
+        <p:spPr>
+          <a:xfrm>
+            <a:off x="406301" y="457051"/>
+            <a:ext cx="8498026" cy="274290"/>
+          </a:xfrm>
+          <a:prstGeom prst="rect">
+            <a:avLst/>
+          </a:prstGeom>
+          <a:noFill/>
+          <a:ln/>
+        </p:spPr>
+        <p:txBody>
+          <a:bodyPr wrap="square" lIns="0" tIns="0" rIns="0" bIns="0" rtlCol="0" anchor="t"/>
+          <a:lstStyle/>
+          <a:p>
+            <a:pPr algn="l" indent="0" marL="0">
+              <a:lnSpc>
+                <a:spcPts val="2160"/>
+              </a:lnSpc>
+              <a:spcBef>
+                <a:spcPts val="600"/>
+              </a:spcBef>
+              <a:spcAft>
+                <a:spcPts val="800"/>
+              </a:spcAft>
+              <a:buNone/>
+            </a:pPr>
+            <a:r>
+              <a:rPr lang="en-US" sz="1800" b="1" dirty="0">
+                <a:solidFill>
+                  <a:srgbClr val="FE4447"/>
+                </a:solidFill>
+                <a:latin typeface="Georgia" pitchFamily="34" charset="0"/>
+                <a:ea typeface="Georgia" pitchFamily="34" charset="-122"/>
+                <a:cs typeface="Georgia" pitchFamily="34" charset="-120"/>
+              </a:rPr>
+              <a:t>Teacher notes</a:t>
+            </a:r>
+            <a:endParaRPr lang="en-US" sz="1800" dirty="0"/>
+          </a:p>
+        </p:txBody>
+      </p:sp>
+      <p:sp>
+        <p:nvSpPr>
+          <p:cNvPr id="4" name="Text 2"/>
+          <p:cNvSpPr/>
+          <p:nvPr/>
+        </p:nvSpPr>
+        <p:spPr>
+          <a:xfrm>
+            <a:off x="634901" y="883593"/>
+            <a:ext cx="8102798" cy="1592163"/>
+          </a:xfrm>
+          <a:prstGeom prst="rect">
+            <a:avLst/>
+          </a:prstGeom>
+          <a:noFill/>
+          <a:ln/>
+        </p:spPr>
+        <p:txBody>
+          <a:bodyPr wrap="square" lIns="0" tIns="0" rIns="0" bIns="0" rtlCol="0" anchor="t"/>
+          <a:lstStyle/>
+          <a:p>
+            <a:pPr algn="l" marL="342900" indent="-342900">
+              <a:lnSpc>
+                <a:spcPts val="1620"/>
+              </a:lnSpc>
+              <a:spcAft>
+                <a:spcPts val="300"/>
+              </a:spcAft>
+              <a:buSzPct val="100000"/>
+              <a:buChar char="•"/>
+            </a:pPr>
+            <a:r>
+              <a:rPr lang="en-US" sz="1200" dirty="0">
+                <a:solidFill>
+                  <a:srgbClr val="1C2833"/>
+                </a:solidFill>
+                <a:latin typeface="Arial" pitchFamily="34" charset="0"/>
+                <a:ea typeface="Arial" pitchFamily="34" charset="-122"/>
+                <a:cs typeface="Arial" pitchFamily="34" charset="-120"/>
+              </a:rPr>
+              <a:t>The Sanskrit </a:t>
+            </a:r>
+            <a:pPr algn="l" indent="0" marL="0">
+              <a:lnSpc>
+                <a:spcPts val="1620"/>
+              </a:lnSpc>
+              <a:spcAft>
+                <a:spcPts val="300"/>
+              </a:spcAft>
+              <a:buNone/>
+            </a:pPr>
+            <a:r>
+              <a:rPr lang="en-US" sz="1200" i="1" dirty="0">
+                <a:solidFill>
+                  <a:srgbClr val="1C2833"/>
+                </a:solidFill>
+                <a:latin typeface="Arial" pitchFamily="34" charset="0"/>
+                <a:ea typeface="Arial" pitchFamily="34" charset="-122"/>
+                <a:cs typeface="Arial" pitchFamily="34" charset="-120"/>
+              </a:rPr>
+              <a:t>bhuñjīthāḥ</a:t>
+            </a:r>
+            <a:pPr algn="l" indent="0" marL="0">
+              <a:lnSpc>
+                <a:spcPts val="1620"/>
+              </a:lnSpc>
+              <a:spcAft>
+                <a:spcPts val="300"/>
+              </a:spcAft>
+              <a:buNone/>
+            </a:pPr>
+            <a:r>
+              <a:rPr lang="en-US" sz="1200" dirty="0">
+                <a:solidFill>
+                  <a:srgbClr val="1C2833"/>
+                </a:solidFill>
+                <a:latin typeface="Arial" pitchFamily="34" charset="0"/>
+                <a:ea typeface="Arial" pitchFamily="34" charset="-122"/>
+                <a:cs typeface="Arial" pitchFamily="34" charset="-120"/>
+              </a:rPr>
+              <a:t> is the optative form of </a:t>
+            </a:r>
+            <a:pPr algn="l" indent="0" marL="0">
+              <a:lnSpc>
+                <a:spcPts val="1620"/>
+              </a:lnSpc>
+              <a:spcAft>
+                <a:spcPts val="300"/>
+              </a:spcAft>
+              <a:buNone/>
+            </a:pPr>
+            <a:r>
+              <a:rPr lang="en-US" sz="1200" i="1" dirty="0">
+                <a:solidFill>
+                  <a:srgbClr val="1C2833"/>
+                </a:solidFill>
+                <a:latin typeface="Arial" pitchFamily="34" charset="0"/>
+                <a:ea typeface="Arial" pitchFamily="34" charset="-122"/>
+                <a:cs typeface="Arial" pitchFamily="34" charset="-120"/>
+              </a:rPr>
+              <a:t>bhuj</a:t>
+            </a:r>
+            <a:pPr algn="l" indent="0" marL="0">
+              <a:lnSpc>
+                <a:spcPts val="1620"/>
+              </a:lnSpc>
+              <a:spcAft>
+                <a:spcPts val="300"/>
+              </a:spcAft>
+              <a:buNone/>
+            </a:pPr>
+            <a:r>
+              <a:rPr lang="en-US" sz="1200" dirty="0">
+                <a:solidFill>
+                  <a:srgbClr val="1C2833"/>
+                </a:solidFill>
+                <a:latin typeface="Arial" pitchFamily="34" charset="0"/>
+                <a:ea typeface="Arial" pitchFamily="34" charset="-122"/>
+                <a:cs typeface="Arial" pitchFamily="34" charset="-120"/>
+              </a:rPr>
+              <a:t> — "to enjoy, eat, partake." Translators often use "enjoy"; "use" or "partake" works equally well.</a:t>
+            </a:r>
+            <a:endParaRPr lang="en-US" sz="1200" dirty="0"/>
+          </a:p>
+          <a:p>
+            <a:pPr algn="l" marL="342900" indent="-342900">
+              <a:lnSpc>
+                <a:spcPts val="1620"/>
+              </a:lnSpc>
+              <a:spcAft>
+                <a:spcPts val="300"/>
+              </a:spcAft>
+              <a:buSzPct val="100000"/>
+              <a:buChar char="•"/>
+            </a:pPr>
+            <a:r>
+              <a:rPr lang="en-US" sz="1200" dirty="0">
+                <a:solidFill>
+                  <a:srgbClr val="1C2833"/>
+                </a:solidFill>
+                <a:latin typeface="Arial" pitchFamily="34" charset="0"/>
+                <a:ea typeface="Arial" pitchFamily="34" charset="-122"/>
+                <a:cs typeface="Arial" pitchFamily="34" charset="-120"/>
+              </a:rPr>
+              <a:t>Some students will ask, "But this is asking me to give up things — isn't that asceticism?" Push back gently: no, the verse says </a:t>
+            </a:r>
+            <a:pPr algn="l" indent="0" marL="0">
+              <a:lnSpc>
+                <a:spcPts val="1620"/>
+              </a:lnSpc>
+              <a:spcAft>
+                <a:spcPts val="300"/>
+              </a:spcAft>
+              <a:buNone/>
+            </a:pPr>
+            <a:r>
+              <a:rPr lang="en-US" sz="1200" i="1" dirty="0">
+                <a:solidFill>
+                  <a:srgbClr val="1C2833"/>
+                </a:solidFill>
+                <a:latin typeface="Arial" pitchFamily="34" charset="0"/>
+                <a:ea typeface="Arial" pitchFamily="34" charset="-122"/>
+                <a:cs typeface="Arial" pitchFamily="34" charset="-120"/>
+              </a:rPr>
+              <a:t>enjoy</a:t>
+            </a:r>
+            <a:pPr algn="l" indent="0" marL="0">
+              <a:lnSpc>
+                <a:spcPts val="1620"/>
+              </a:lnSpc>
+              <a:spcAft>
+                <a:spcPts val="300"/>
+              </a:spcAft>
+              <a:buNone/>
+            </a:pPr>
+            <a:r>
+              <a:rPr lang="en-US" sz="1200" dirty="0">
+                <a:solidFill>
+                  <a:srgbClr val="1C2833"/>
+                </a:solidFill>
+                <a:latin typeface="Arial" pitchFamily="34" charset="0"/>
+                <a:ea typeface="Arial" pitchFamily="34" charset="-122"/>
+                <a:cs typeface="Arial" pitchFamily="34" charset="-120"/>
+              </a:rPr>
+              <a:t>. The renunciation is of </a:t>
+            </a:r>
+            <a:pPr algn="l" indent="0" marL="0">
+              <a:lnSpc>
+                <a:spcPts val="1620"/>
+              </a:lnSpc>
+              <a:spcAft>
+                <a:spcPts val="300"/>
+              </a:spcAft>
+              <a:buNone/>
+            </a:pPr>
+            <a:r>
+              <a:rPr lang="en-US" sz="1200" i="1" dirty="0">
+                <a:solidFill>
+                  <a:srgbClr val="1C2833"/>
+                </a:solidFill>
+                <a:latin typeface="Arial" pitchFamily="34" charset="0"/>
+                <a:ea typeface="Arial" pitchFamily="34" charset="-122"/>
+                <a:cs typeface="Arial" pitchFamily="34" charset="-120"/>
+              </a:rPr>
+              <a:t>grasping</a:t>
+            </a:r>
+            <a:pPr algn="l" indent="0" marL="0">
+              <a:lnSpc>
+                <a:spcPts val="1620"/>
+              </a:lnSpc>
+              <a:spcAft>
+                <a:spcPts val="300"/>
+              </a:spcAft>
+              <a:buNone/>
+            </a:pPr>
+            <a:r>
+              <a:rPr lang="en-US" sz="1200" dirty="0">
+                <a:solidFill>
+                  <a:srgbClr val="1C2833"/>
+                </a:solidFill>
+                <a:latin typeface="Arial" pitchFamily="34" charset="0"/>
+                <a:ea typeface="Arial" pitchFamily="34" charset="-122"/>
+                <a:cs typeface="Arial" pitchFamily="34" charset="-120"/>
+              </a:rPr>
+              <a:t>, not of using. You can enjoy your meal; the renunciation is the </a:t>
+            </a:r>
+            <a:pPr algn="l" indent="0" marL="0">
+              <a:lnSpc>
+                <a:spcPts val="1620"/>
+              </a:lnSpc>
+              <a:spcAft>
+                <a:spcPts val="300"/>
+              </a:spcAft>
+              <a:buNone/>
+            </a:pPr>
+            <a:r>
+              <a:rPr lang="en-US" sz="1200" i="1" dirty="0">
+                <a:solidFill>
+                  <a:srgbClr val="1C2833"/>
+                </a:solidFill>
+                <a:latin typeface="Arial" pitchFamily="34" charset="0"/>
+                <a:ea typeface="Arial" pitchFamily="34" charset="-122"/>
+                <a:cs typeface="Arial" pitchFamily="34" charset="-120"/>
+              </a:rPr>
+              <a:t>attitude</a:t>
+            </a:r>
+            <a:pPr algn="l" indent="0" marL="0">
+              <a:lnSpc>
+                <a:spcPts val="1620"/>
+              </a:lnSpc>
+              <a:spcAft>
+                <a:spcPts val="300"/>
+              </a:spcAft>
+              <a:buNone/>
+            </a:pPr>
+            <a:r>
+              <a:rPr lang="en-US" sz="1200" dirty="0">
+                <a:solidFill>
+                  <a:srgbClr val="1C2833"/>
+                </a:solidFill>
+                <a:latin typeface="Arial" pitchFamily="34" charset="0"/>
+                <a:ea typeface="Arial" pitchFamily="34" charset="-122"/>
+                <a:cs typeface="Arial" pitchFamily="34" charset="-120"/>
+              </a:rPr>
+              <a:t> that says "this is mine and only mine."</a:t>
+            </a:r>
+            <a:endParaRPr lang="en-US" sz="1200" dirty="0"/>
+          </a:p>
+          <a:p>
+            <a:pPr algn="l" marL="342900" indent="-342900">
+              <a:lnSpc>
+                <a:spcPts val="1620"/>
+              </a:lnSpc>
+              <a:spcAft>
+                <a:spcPts val="300"/>
+              </a:spcAft>
+              <a:buSzPct val="100000"/>
+              <a:buChar char="•"/>
+            </a:pPr>
+            <a:r>
+              <a:rPr lang="en-US" sz="1200" i="1" dirty="0">
+                <a:solidFill>
+                  <a:srgbClr val="1C2833"/>
+                </a:solidFill>
+                <a:latin typeface="Arial" pitchFamily="34" charset="0"/>
+                <a:ea typeface="Arial" pitchFamily="34" charset="-122"/>
+                <a:cs typeface="Arial" pitchFamily="34" charset="-120"/>
+              </a:rPr>
+              <a:t>gṛdhaḥ</a:t>
+            </a:r>
+            <a:pPr algn="l" indent="0" marL="0">
+              <a:lnSpc>
+                <a:spcPts val="1620"/>
+              </a:lnSpc>
+              <a:spcAft>
+                <a:spcPts val="300"/>
+              </a:spcAft>
+              <a:buNone/>
+            </a:pPr>
+            <a:r>
+              <a:rPr lang="en-US" sz="1200" dirty="0">
+                <a:solidFill>
+                  <a:srgbClr val="1C2833"/>
+                </a:solidFill>
+                <a:latin typeface="Arial" pitchFamily="34" charset="0"/>
+                <a:ea typeface="Arial" pitchFamily="34" charset="-122"/>
+                <a:cs typeface="Arial" pitchFamily="34" charset="-120"/>
+              </a:rPr>
+              <a:t> (the second-person prohibition: "do not grab") shares a root with "vulture" (</a:t>
+            </a:r>
+            <a:pPr algn="l" indent="0" marL="0">
+              <a:lnSpc>
+                <a:spcPts val="1620"/>
+              </a:lnSpc>
+              <a:spcAft>
+                <a:spcPts val="300"/>
+              </a:spcAft>
+              <a:buNone/>
+            </a:pPr>
+            <a:r>
+              <a:rPr lang="en-US" sz="1200" i="1" dirty="0">
+                <a:solidFill>
+                  <a:srgbClr val="1C2833"/>
+                </a:solidFill>
+                <a:latin typeface="Arial" pitchFamily="34" charset="0"/>
+                <a:ea typeface="Arial" pitchFamily="34" charset="-122"/>
+                <a:cs typeface="Arial" pitchFamily="34" charset="-120"/>
+              </a:rPr>
+              <a:t>gṛdhra</a:t>
+            </a:r>
+            <a:pPr algn="l" indent="0" marL="0">
+              <a:lnSpc>
+                <a:spcPts val="1620"/>
+              </a:lnSpc>
+              <a:spcAft>
+                <a:spcPts val="300"/>
+              </a:spcAft>
+              <a:buNone/>
+            </a:pPr>
+            <a:r>
+              <a:rPr lang="en-US" sz="1200" dirty="0">
+                <a:solidFill>
+                  <a:srgbClr val="1C2833"/>
+                </a:solidFill>
+                <a:latin typeface="Arial" pitchFamily="34" charset="0"/>
+                <a:ea typeface="Arial" pitchFamily="34" charset="-122"/>
+                <a:cs typeface="Arial" pitchFamily="34" charset="-120"/>
+              </a:rPr>
+              <a:t>). The image is sharp. You can use it.</a:t>
+            </a:r>
+            <a:endParaRPr lang="en-US" sz="1200" dirty="0"/>
+          </a:p>
+        </p:txBody>
+      </p:sp>
+      <p:sp>
+        <p:nvSpPr>
+          <p:cNvPr id="5" name="Text 3"/>
+          <p:cNvSpPr/>
+          <p:nvPr/>
+        </p:nvSpPr>
+        <p:spPr>
+          <a:xfrm>
+            <a:off x="406301" y="4434929"/>
+            <a:ext cx="8498026" cy="213271"/>
+          </a:xfrm>
+          <a:prstGeom prst="rect">
+            <a:avLst/>
+          </a:prstGeom>
+          <a:noFill/>
+          <a:ln/>
+        </p:spPr>
+        <p:txBody>
+          <a:bodyPr wrap="square" lIns="0" tIns="0" rIns="0" bIns="0" rtlCol="0" anchor="t"/>
+          <a:lstStyle/>
+          <a:p>
+            <a:pPr algn="l" indent="0" marL="0">
+              <a:lnSpc>
+                <a:spcPts val="1680"/>
+              </a:lnSpc>
+              <a:spcBef>
+                <a:spcPts val="300"/>
+              </a:spcBef>
+              <a:spcAft>
+                <a:spcPts val="300"/>
+              </a:spcAft>
+              <a:buNone/>
+            </a:pPr>
+            <a:r>
+              <a:rPr lang="en-US" sz="1200" dirty="0">
+                <a:solidFill>
+                  <a:srgbClr val="1C2833"/>
+                </a:solidFill>
+                <a:latin typeface="Arial" pitchFamily="34" charset="0"/>
+                <a:ea typeface="Arial" pitchFamily="34" charset="-122"/>
+                <a:cs typeface="Arial" pitchFamily="34" charset="-120"/>
+              </a:rPr>
+              <a:t>Middle ·  · IKS Curriculum</a:t>
+            </a:r>
+            <a:endParaRPr lang="en-US" sz="1200" dirty="0"/>
+          </a:p>
+        </p:txBody>
+      </p:sp>
+    </p:spTree>
+  </p:cSld>
+  <p:clrMapOvr>
+    <a:masterClrMapping/>
+  </p:clrMapOvr>
+</p:sld>
+</file>
+
+<file path=ppt/slides/slide21.xml><?xml version="1.0" encoding="utf-8"?>
+<p:sld xmlns:a="http://schemas.openxmlformats.org/drawingml/2006/main" xmlns:r="http://schemas.openxmlformats.org/officeDocument/2006/relationships" xmlns:p="http://schemas.openxmlformats.org/presentationml/2006/main">
+  <p:cSld name="Slide 21">
+    <p:bg>
+      <p:bgPr>
+        <a:solidFill>
+          <a:srgbClr val="FFFFFF"/>
+        </a:solidFill>
+      </p:bgPr>
+    </p:bg>
+    <p:spTree>
+      <p:nvGrpSpPr>
+        <p:cNvPr id="1" name=""/>
+        <p:cNvGrpSpPr/>
+        <p:nvPr/>
+      </p:nvGrpSpPr>
+      <p:grpSpPr>
+        <a:xfrm>
+          <a:off x="0" y="0"/>
+          <a:ext cx="0" cy="0"/>
+          <a:chOff x="0" y="0"/>
+          <a:chExt cx="0" cy="0"/>
+        </a:xfrm>
+      </p:grpSpPr>
+      <p:sp>
+        <p:nvSpPr>
+          <p:cNvPr id="2" name="Text 0"/>
+          <p:cNvSpPr/>
+          <p:nvPr/>
+        </p:nvSpPr>
+        <p:spPr>
+          <a:xfrm>
+            <a:off x="0" y="0"/>
+            <a:ext cx="9144000" cy="101501"/>
+          </a:xfrm>
+          <a:prstGeom prst="rect">
+            <a:avLst/>
+          </a:prstGeom>
+          <a:solidFill>
+            <a:srgbClr val="277884"/>
+          </a:solidFill>
+          <a:ln/>
+        </p:spPr>
+        <p:txBody>
+          <a:bodyPr wrap="square" rtlCol="0" anchor="ctr"/>
+          <a:lstStyle/>
+          <a:p>
+            <a:pPr indent="0" marL="0">
+              <a:buNone/>
+            </a:pPr>
+            <a:endParaRPr lang="en-US" dirty="0"/>
+          </a:p>
+        </p:txBody>
+      </p:sp>
+      <p:sp>
+        <p:nvSpPr>
+          <p:cNvPr id="3" name="Text 1"/>
+          <p:cNvSpPr/>
+          <p:nvPr/>
+        </p:nvSpPr>
+        <p:spPr>
+          <a:xfrm>
+            <a:off x="406301" y="457051"/>
+            <a:ext cx="8498026" cy="274290"/>
+          </a:xfrm>
+          <a:prstGeom prst="rect">
+            <a:avLst/>
+          </a:prstGeom>
+          <a:noFill/>
+          <a:ln/>
+        </p:spPr>
+        <p:txBody>
+          <a:bodyPr wrap="square" lIns="0" tIns="0" rIns="0" bIns="0" rtlCol="0" anchor="t"/>
+          <a:lstStyle/>
+          <a:p>
+            <a:pPr algn="l" indent="0" marL="0">
+              <a:lnSpc>
+                <a:spcPts val="2160"/>
+              </a:lnSpc>
+              <a:spcBef>
+                <a:spcPts val="600"/>
+              </a:spcBef>
+              <a:spcAft>
+                <a:spcPts val="800"/>
+              </a:spcAft>
+              <a:buNone/>
+            </a:pPr>
+            <a:r>
+              <a:rPr lang="en-US" sz="1800" b="1" dirty="0">
+                <a:solidFill>
+                  <a:srgbClr val="FE4447"/>
+                </a:solidFill>
+                <a:latin typeface="Georgia" pitchFamily="34" charset="0"/>
+                <a:ea typeface="Georgia" pitchFamily="34" charset="-122"/>
+                <a:cs typeface="Georgia" pitchFamily="34" charset="-120"/>
+              </a:rPr>
+              <a:t>Teacher notes (cont.)</a:t>
+            </a:r>
+            <a:endParaRPr lang="en-US" sz="1800" dirty="0"/>
+          </a:p>
+        </p:txBody>
+      </p:sp>
+      <p:sp>
+        <p:nvSpPr>
+          <p:cNvPr id="4" name="Text 2"/>
+          <p:cNvSpPr/>
+          <p:nvPr/>
+        </p:nvSpPr>
+        <p:spPr>
+          <a:xfrm>
+            <a:off x="634901" y="883593"/>
+            <a:ext cx="8102798" cy="487561"/>
+          </a:xfrm>
+          <a:prstGeom prst="rect">
+            <a:avLst/>
+          </a:prstGeom>
+          <a:noFill/>
+          <a:ln/>
+        </p:spPr>
+        <p:txBody>
+          <a:bodyPr wrap="square" lIns="0" tIns="0" rIns="0" bIns="0" rtlCol="0" anchor="t"/>
+          <a:lstStyle/>
+          <a:p>
+            <a:pPr algn="l" marL="342900" indent="-342900">
+              <a:lnSpc>
+                <a:spcPts val="1620"/>
+              </a:lnSpc>
+              <a:spcAft>
+                <a:spcPts val="300"/>
+              </a:spcAft>
+              <a:buSzPct val="100000"/>
+              <a:buChar char="•"/>
+            </a:pPr>
+            <a:r>
+              <a:rPr lang="en-US" sz="1200" dirty="0">
+                <a:solidFill>
+                  <a:srgbClr val="1C2833"/>
+                </a:solidFill>
+                <a:latin typeface="Arial" pitchFamily="34" charset="0"/>
+                <a:ea typeface="Arial" pitchFamily="34" charset="-122"/>
+                <a:cs typeface="Arial" pitchFamily="34" charset="-120"/>
+              </a:rPr>
+              <a:t>Avoid moralising. The exercise is about </a:t>
+            </a:r>
+            <a:pPr algn="l" indent="0" marL="0">
+              <a:lnSpc>
+                <a:spcPts val="1620"/>
+              </a:lnSpc>
+              <a:spcAft>
+                <a:spcPts val="300"/>
+              </a:spcAft>
+              <a:buNone/>
+            </a:pPr>
+            <a:r>
+              <a:rPr lang="en-US" sz="1200" i="1" dirty="0">
+                <a:solidFill>
+                  <a:srgbClr val="1C2833"/>
+                </a:solidFill>
+                <a:latin typeface="Arial" pitchFamily="34" charset="0"/>
+                <a:ea typeface="Arial" pitchFamily="34" charset="-122"/>
+                <a:cs typeface="Arial" pitchFamily="34" charset="-120"/>
+              </a:rPr>
+              <a:t>noticing</a:t>
+            </a:r>
+            <a:pPr algn="l" indent="0" marL="0">
+              <a:lnSpc>
+                <a:spcPts val="1620"/>
+              </a:lnSpc>
+              <a:spcAft>
+                <a:spcPts val="300"/>
+              </a:spcAft>
+              <a:buNone/>
+            </a:pPr>
+            <a:r>
+              <a:rPr lang="en-US" sz="1200" dirty="0">
+                <a:solidFill>
+                  <a:srgbClr val="1C2833"/>
+                </a:solidFill>
+                <a:latin typeface="Arial" pitchFamily="34" charset="0"/>
+                <a:ea typeface="Arial" pitchFamily="34" charset="-122"/>
+                <a:cs typeface="Arial" pitchFamily="34" charset="-120"/>
+              </a:rPr>
+              <a:t> the distinction between use and grab. Most adults haven't done this exercise. The students will do it more honestly than we will.</a:t>
+            </a:r>
+            <a:endParaRPr lang="en-US" sz="1200" dirty="0"/>
+          </a:p>
+        </p:txBody>
+      </p:sp>
+      <p:sp>
+        <p:nvSpPr>
+          <p:cNvPr id="5" name="Text 3"/>
+          <p:cNvSpPr/>
+          <p:nvPr/>
+        </p:nvSpPr>
+        <p:spPr>
+          <a:xfrm>
+            <a:off x="406301" y="4434929"/>
+            <a:ext cx="8498026" cy="213271"/>
+          </a:xfrm>
+          <a:prstGeom prst="rect">
+            <a:avLst/>
+          </a:prstGeom>
+          <a:noFill/>
+          <a:ln/>
+        </p:spPr>
+        <p:txBody>
+          <a:bodyPr wrap="square" lIns="0" tIns="0" rIns="0" bIns="0" rtlCol="0" anchor="t"/>
+          <a:lstStyle/>
+          <a:p>
+            <a:pPr algn="l" indent="0" marL="0">
+              <a:lnSpc>
+                <a:spcPts val="1680"/>
+              </a:lnSpc>
+              <a:spcBef>
+                <a:spcPts val="300"/>
+              </a:spcBef>
+              <a:spcAft>
+                <a:spcPts val="300"/>
+              </a:spcAft>
+              <a:buNone/>
+            </a:pPr>
+            <a:r>
+              <a:rPr lang="en-US" sz="1200" dirty="0">
+                <a:solidFill>
+                  <a:srgbClr val="1C2833"/>
+                </a:solidFill>
+                <a:latin typeface="Arial" pitchFamily="34" charset="0"/>
+                <a:ea typeface="Arial" pitchFamily="34" charset="-122"/>
+                <a:cs typeface="Arial" pitchFamily="34" charset="-120"/>
+              </a:rPr>
+              <a:t>Middle ·  · IKS Curriculum</a:t>
+            </a:r>
+            <a:endParaRPr lang="en-US" sz="1200" dirty="0"/>
+          </a:p>
+        </p:txBody>
+      </p:sp>
+    </p:spTree>
+  </p:cSld>
+  <p:clrMapOvr>
+    <a:masterClrMapping/>
+  </p:clrMapOvr>
+</p:sld>
+</file>
+
+<file path=ppt/slides/slide22.xml><?xml version="1.0" encoding="utf-8"?>
+<p:sld xmlns:a="http://schemas.openxmlformats.org/drawingml/2006/main" xmlns:r="http://schemas.openxmlformats.org/officeDocument/2006/relationships" xmlns:p="http://schemas.openxmlformats.org/presentationml/2006/main">
+  <p:cSld name="Slide 22">
+    <p:bg>
+      <p:bgPr>
+        <a:solidFill>
+          <a:srgbClr val="FFFFFF"/>
+        </a:solidFill>
+      </p:bgPr>
+    </p:bg>
+    <p:spTree>
+      <p:nvGrpSpPr>
+        <p:cNvPr id="1" name=""/>
+        <p:cNvGrpSpPr/>
+        <p:nvPr/>
+      </p:nvGrpSpPr>
+      <p:grpSpPr>
+        <a:xfrm>
+          <a:off x="0" y="0"/>
+          <a:ext cx="0" cy="0"/>
+          <a:chOff x="0" y="0"/>
+          <a:chExt cx="0" cy="0"/>
+        </a:xfrm>
+      </p:grpSpPr>
+      <p:sp>
+        <p:nvSpPr>
+          <p:cNvPr id="2" name="Text 0"/>
+          <p:cNvSpPr/>
+          <p:nvPr/>
+        </p:nvSpPr>
+        <p:spPr>
+          <a:xfrm>
+            <a:off x="0" y="0"/>
+            <a:ext cx="9144000" cy="101501"/>
+          </a:xfrm>
+          <a:prstGeom prst="rect">
+            <a:avLst/>
+          </a:prstGeom>
+          <a:solidFill>
+            <a:srgbClr val="277884"/>
+          </a:solidFill>
+          <a:ln/>
+        </p:spPr>
+        <p:txBody>
+          <a:bodyPr wrap="square" rtlCol="0" anchor="ctr"/>
+          <a:lstStyle/>
+          <a:p>
+            <a:pPr indent="0" marL="0">
+              <a:buNone/>
+            </a:pPr>
+            <a:endParaRPr lang="en-US" dirty="0"/>
+          </a:p>
+        </p:txBody>
+      </p:sp>
+      <p:sp>
+        <p:nvSpPr>
+          <p:cNvPr id="3" name="Text 1"/>
+          <p:cNvSpPr/>
+          <p:nvPr/>
+        </p:nvSpPr>
+        <p:spPr>
+          <a:xfrm>
+            <a:off x="406301" y="457051"/>
+            <a:ext cx="8498026" cy="274290"/>
+          </a:xfrm>
+          <a:prstGeom prst="rect">
+            <a:avLst/>
+          </a:prstGeom>
+          <a:noFill/>
+          <a:ln/>
+        </p:spPr>
+        <p:txBody>
+          <a:bodyPr wrap="square" lIns="0" tIns="0" rIns="0" bIns="0" rtlCol="0" anchor="t"/>
+          <a:lstStyle/>
+          <a:p>
+            <a:pPr algn="l" indent="0" marL="0">
+              <a:lnSpc>
+                <a:spcPts val="2160"/>
+              </a:lnSpc>
+              <a:spcBef>
+                <a:spcPts val="600"/>
+              </a:spcBef>
+              <a:spcAft>
+                <a:spcPts val="800"/>
+              </a:spcAft>
+              <a:buNone/>
+            </a:pPr>
+            <a:r>
+              <a:rPr lang="en-US" sz="1800" b="1" dirty="0">
+                <a:solidFill>
+                  <a:srgbClr val="FE4447"/>
+                </a:solidFill>
+                <a:latin typeface="Georgia" pitchFamily="34" charset="0"/>
+                <a:ea typeface="Georgia" pitchFamily="34" charset="-122"/>
+                <a:cs typeface="Georgia" pitchFamily="34" charset="-120"/>
+              </a:rPr>
+              <a:t>Citation(s) used in this lesson</a:t>
+            </a:r>
+            <a:endParaRPr lang="en-US" sz="1800" dirty="0"/>
+          </a:p>
+        </p:txBody>
+      </p:sp>
+      <p:sp>
+        <p:nvSpPr>
+          <p:cNvPr id="4" name="Text 2"/>
+          <p:cNvSpPr/>
+          <p:nvPr/>
+        </p:nvSpPr>
+        <p:spPr>
+          <a:xfrm>
+            <a:off x="634901" y="883593"/>
+            <a:ext cx="8102798" cy="750391"/>
+          </a:xfrm>
+          <a:prstGeom prst="rect">
+            <a:avLst/>
+          </a:prstGeom>
+          <a:noFill/>
+          <a:ln/>
+        </p:spPr>
+        <p:txBody>
+          <a:bodyPr wrap="square" lIns="0" tIns="0" rIns="0" bIns="0" rtlCol="0" anchor="t"/>
+          <a:lstStyle/>
+          <a:p>
+            <a:pPr algn="l" marL="342900" indent="-342900">
+              <a:lnSpc>
+                <a:spcPts val="1620"/>
+              </a:lnSpc>
+              <a:spcAft>
+                <a:spcPts val="300"/>
+              </a:spcAft>
+              <a:buSzPct val="100000"/>
+              <a:buChar char="•"/>
+            </a:pPr>
+            <a:r>
+              <a:rPr lang="en-US" sz="1200" b="1" dirty="0">
+                <a:solidFill>
+                  <a:srgbClr val="1C2833"/>
+                </a:solidFill>
+                <a:latin typeface="Arial" pitchFamily="34" charset="0"/>
+                <a:ea typeface="Arial" pitchFamily="34" charset="-122"/>
+                <a:cs typeface="Arial" pitchFamily="34" charset="-120"/>
+              </a:rPr>
+              <a:t>Īśa Upaniṣad mantra 1</a:t>
+            </a:r>
+            <a:pPr algn="l" indent="0" marL="0">
+              <a:lnSpc>
+                <a:spcPts val="1620"/>
+              </a:lnSpc>
+              <a:spcAft>
+                <a:spcPts val="300"/>
+              </a:spcAft>
+              <a:buNone/>
+            </a:pPr>
+            <a:r>
+              <a:rPr lang="en-US" sz="1200" dirty="0">
+                <a:solidFill>
+                  <a:srgbClr val="1C2833"/>
+                </a:solidFill>
+                <a:latin typeface="Arial" pitchFamily="34" charset="0"/>
+                <a:ea typeface="Arial" pitchFamily="34" charset="-122"/>
+                <a:cs typeface="Arial" pitchFamily="34" charset="-120"/>
+              </a:rPr>
+              <a:t> — quoted in IAST with translation. Text per the standard Mādhyandina recension; identical to Śukla Yajur Veda 40.1.</a:t>
+            </a:r>
+            <a:endParaRPr lang="en-US" sz="1200" dirty="0"/>
+          </a:p>
+          <a:p>
+            <a:pPr algn="l" marL="342900" indent="-342900">
+              <a:lnSpc>
+                <a:spcPts val="1620"/>
+              </a:lnSpc>
+              <a:spcAft>
+                <a:spcPts val="300"/>
+              </a:spcAft>
+              <a:buSzPct val="100000"/>
+              <a:buChar char="•"/>
+            </a:pPr>
+            <a:r>
+              <a:rPr lang="en-US" sz="1200" dirty="0">
+                <a:solidFill>
+                  <a:srgbClr val="1C2833"/>
+                </a:solidFill>
+                <a:latin typeface="Arial" pitchFamily="34" charset="0"/>
+                <a:ea typeface="Arial" pitchFamily="34" charset="-122"/>
+                <a:cs typeface="Arial" pitchFamily="34" charset="-120"/>
+              </a:rPr>
+              <a:t>See </a:t>
+            </a:r>
+            <a:pPr algn="l" indent="0" marL="0">
+              <a:lnSpc>
+                <a:spcPts val="1620"/>
+              </a:lnSpc>
+              <a:spcAft>
+                <a:spcPts val="300"/>
+              </a:spcAft>
+              <a:buNone/>
+            </a:pPr>
+            <a:r>
+              <a:rPr lang="en-US" sz="1200" dirty="0">
+                <a:solidFill>
+                  <a:srgbClr val="1C2833"/>
+                </a:solidFill>
+                <a:latin typeface="Arial" pitchFamily="34" charset="0"/>
+                <a:ea typeface="Arial" pitchFamily="34" charset="-122"/>
+                <a:cs typeface="Arial" pitchFamily="34" charset="-120"/>
+              </a:rPr>
+              <a:t>sources.md</a:t>
+            </a:r>
+            <a:pPr algn="l" indent="0" marL="0">
+              <a:lnSpc>
+                <a:spcPts val="1620"/>
+              </a:lnSpc>
+              <a:spcAft>
+                <a:spcPts val="300"/>
+              </a:spcAft>
+              <a:buNone/>
+            </a:pPr>
+            <a:r>
+              <a:rPr lang="en-US" sz="1200" dirty="0">
+                <a:solidFill>
+                  <a:srgbClr val="1C2833"/>
+                </a:solidFill>
+                <a:latin typeface="Arial" pitchFamily="34" charset="0"/>
+                <a:ea typeface="Arial" pitchFamily="34" charset="-122"/>
+                <a:cs typeface="Arial" pitchFamily="34" charset="-120"/>
+              </a:rPr>
+              <a:t> for editions used.</a:t>
             </a:r>
             <a:endParaRPr lang="en-US" sz="1200" dirty="0"/>
           </a:p>
@@ -3980,7 +8157,7 @@
                 <a:ea typeface="Georgia" pitchFamily="34" charset="-122"/>
                 <a:cs typeface="Georgia" pitchFamily="34" charset="-120"/>
               </a:rPr>
-              <a:t>Vocabulary</a:t>
+              <a:t>Materials</a:t>
             </a:r>
             <a:endParaRPr lang="en-US" sz="1800" dirty="0"/>
           </a:p>
@@ -3995,7 +8172,7 @@
         <p:spPr>
           <a:xfrm>
             <a:off x="634901" y="883593"/>
-            <a:ext cx="8102798" cy="2155924"/>
+            <a:ext cx="8102798" cy="769441"/>
           </a:xfrm>
           <a:prstGeom prst="rect">
             <a:avLst/>
@@ -4018,6 +8195,26 @@
               <a:buChar char="•"/>
             </a:pPr>
             <a:r>
+              <a:rPr lang="en-US" sz="1200" dirty="0">
+                <a:solidFill>
+                  <a:srgbClr val="1C2833"/>
+                </a:solidFill>
+                <a:latin typeface="Arial" pitchFamily="34" charset="0"/>
+                <a:ea typeface="Arial" pitchFamily="34" charset="-122"/>
+                <a:cs typeface="Arial" pitchFamily="34" charset="-120"/>
+              </a:rPr>
+              <a:t>Printed handout: </a:t>
+            </a:r>
+            <a:pPr algn="l" indent="0" marL="0">
+              <a:lnSpc>
+                <a:spcPts val="1620"/>
+              </a:lnSpc>
+              <a:spcAft>
+                <a:spcPts val="300"/>
+              </a:spcAft>
+              <a:buNone/>
+            </a:pPr>
+            <a:r>
               <a:rPr lang="en-US" sz="1200" i="1" dirty="0">
                 <a:solidFill>
                   <a:srgbClr val="1C2833"/>
@@ -4026,7 +8223,7 @@
                 <a:ea typeface="Arial" pitchFamily="34" charset="-122"/>
                 <a:cs typeface="Arial" pitchFamily="34" charset="-120"/>
               </a:rPr>
-              <a:t>īśa</a:t>
+              <a:t>Iṣopaniṣad</a:t>
             </a:r>
             <a:pPr algn="l" indent="0" marL="0">
               <a:lnSpc>
@@ -4046,7 +8243,7 @@
                 <a:ea typeface="Arial" pitchFamily="34" charset="-122"/>
                 <a:cs typeface="Arial" pitchFamily="34" charset="-120"/>
               </a:rPr>
-              <a:t> (IAST: īśa; lit. "lord, controller") — the supreme principle / divinity. The Upaniṣad is named after the first word of mantra 1.</a:t>
+              <a:t> mantra 1 in IAST + translation, one per student</a:t>
             </a:r>
             <a:endParaRPr lang="en-US" sz="1200" dirty="0"/>
           </a:p>
@@ -4062,26 +8259,6 @@
               <a:buChar char="•"/>
             </a:pPr>
             <a:r>
-              <a:rPr lang="en-US" sz="1200" i="1" dirty="0">
-                <a:solidFill>
-                  <a:srgbClr val="1C2833"/>
-                </a:solidFill>
-                <a:latin typeface="Arial" pitchFamily="34" charset="0"/>
-                <a:ea typeface="Arial" pitchFamily="34" charset="-122"/>
-                <a:cs typeface="Arial" pitchFamily="34" charset="-120"/>
-              </a:rPr>
-              <a:t>īśāvāsya</a:t>
-            </a:r>
-            <a:pPr algn="l" indent="0" marL="0">
-              <a:lnSpc>
-                <a:spcPts val="1620"/>
-              </a:lnSpc>
-              <a:spcAft>
-                <a:spcPts val="300"/>
-              </a:spcAft>
-              <a:buNone/>
-            </a:pPr>
-            <a:r>
               <a:rPr lang="en-US" sz="1200" dirty="0">
                 <a:solidFill>
                   <a:srgbClr val="1C2833"/>
@@ -4090,7 +8267,7 @@
                 <a:ea typeface="Arial" pitchFamily="34" charset="-122"/>
                 <a:cs typeface="Arial" pitchFamily="34" charset="-120"/>
               </a:rPr>
-              <a:t> (IAST: īśāvāsya) — "to-be-enveloped-by-the-lord," i.e. permeated by the divine.</a:t>
+              <a:t>Notebook</a:t>
             </a:r>
             <a:endParaRPr lang="en-US" sz="1200" dirty="0"/>
           </a:p>
@@ -4106,26 +8283,6 @@
               <a:buChar char="•"/>
             </a:pPr>
             <a:r>
-              <a:rPr lang="en-US" sz="1200" i="1" dirty="0">
-                <a:solidFill>
-                  <a:srgbClr val="1C2833"/>
-                </a:solidFill>
-                <a:latin typeface="Arial" pitchFamily="34" charset="0"/>
-                <a:ea typeface="Arial" pitchFamily="34" charset="-122"/>
-                <a:cs typeface="Arial" pitchFamily="34" charset="-120"/>
-              </a:rPr>
-              <a:t>jagat</a:t>
-            </a:r>
-            <a:pPr algn="l" indent="0" marL="0">
-              <a:lnSpc>
-                <a:spcPts val="1620"/>
-              </a:lnSpc>
-              <a:spcAft>
-                <a:spcPts val="300"/>
-              </a:spcAft>
-              <a:buNone/>
-            </a:pPr>
-            <a:r>
               <a:rPr lang="en-US" sz="1200" dirty="0">
                 <a:solidFill>
                   <a:srgbClr val="1C2833"/>
@@ -4134,223 +8291,7 @@
                 <a:ea typeface="Arial" pitchFamily="34" charset="-122"/>
                 <a:cs typeface="Arial" pitchFamily="34" charset="-120"/>
               </a:rPr>
-              <a:t> (IAST: jagat; lit. "what moves") — the moving / changing world.</a:t>
-            </a:r>
-            <a:endParaRPr lang="en-US" sz="1200" dirty="0"/>
-          </a:p>
-          <a:p>
-            <a:pPr algn="l" marL="342900" indent="-342900">
-              <a:lnSpc>
-                <a:spcPts val="1620"/>
-              </a:lnSpc>
-              <a:spcAft>
-                <a:spcPts val="300"/>
-              </a:spcAft>
-              <a:buSzPct val="100000"/>
-              <a:buChar char="•"/>
-            </a:pPr>
-            <a:r>
-              <a:rPr lang="en-US" sz="1200" i="1" dirty="0">
-                <a:solidFill>
-                  <a:srgbClr val="1C2833"/>
-                </a:solidFill>
-                <a:latin typeface="Arial" pitchFamily="34" charset="0"/>
-                <a:ea typeface="Arial" pitchFamily="34" charset="-122"/>
-                <a:cs typeface="Arial" pitchFamily="34" charset="-120"/>
-              </a:rPr>
-              <a:t>tyakta</a:t>
-            </a:r>
-            <a:pPr algn="l" indent="0" marL="0">
-              <a:lnSpc>
-                <a:spcPts val="1620"/>
-              </a:lnSpc>
-              <a:spcAft>
-                <a:spcPts val="300"/>
-              </a:spcAft>
-              <a:buNone/>
-            </a:pPr>
-            <a:r>
-              <a:rPr lang="en-US" sz="1200" dirty="0">
-                <a:solidFill>
-                  <a:srgbClr val="1C2833"/>
-                </a:solidFill>
-                <a:latin typeface="Arial" pitchFamily="34" charset="0"/>
-                <a:ea typeface="Arial" pitchFamily="34" charset="-122"/>
-                <a:cs typeface="Arial" pitchFamily="34" charset="-120"/>
-              </a:rPr>
-              <a:t> (IAST: tyakta; lit. "renounced, given up") — what is given up, set aside, surrendered.</a:t>
-            </a:r>
-            <a:endParaRPr lang="en-US" sz="1200" dirty="0"/>
-          </a:p>
-          <a:p>
-            <a:pPr algn="l" marL="342900" indent="-342900">
-              <a:lnSpc>
-                <a:spcPts val="1620"/>
-              </a:lnSpc>
-              <a:spcAft>
-                <a:spcPts val="300"/>
-              </a:spcAft>
-              <a:buSzPct val="100000"/>
-              <a:buChar char="•"/>
-            </a:pPr>
-            <a:r>
-              <a:rPr lang="en-US" sz="1200" i="1" dirty="0">
-                <a:solidFill>
-                  <a:srgbClr val="1C2833"/>
-                </a:solidFill>
-                <a:latin typeface="Arial" pitchFamily="34" charset="0"/>
-                <a:ea typeface="Arial" pitchFamily="34" charset="-122"/>
-                <a:cs typeface="Arial" pitchFamily="34" charset="-120"/>
-              </a:rPr>
-              <a:t>bhuñjīthāḥ</a:t>
-            </a:r>
-            <a:pPr algn="l" indent="0" marL="0">
-              <a:lnSpc>
-                <a:spcPts val="1620"/>
-              </a:lnSpc>
-              <a:spcAft>
-                <a:spcPts val="300"/>
-              </a:spcAft>
-              <a:buNone/>
-            </a:pPr>
-            <a:r>
-              <a:rPr lang="en-US" sz="1200" dirty="0">
-                <a:solidFill>
-                  <a:srgbClr val="1C2833"/>
-                </a:solidFill>
-                <a:latin typeface="Arial" pitchFamily="34" charset="0"/>
-                <a:ea typeface="Arial" pitchFamily="34" charset="-122"/>
-                <a:cs typeface="Arial" pitchFamily="34" charset="-120"/>
-              </a:rPr>
-              <a:t> (IAST: bhuñjīthāḥ) — "you may enjoy / partake / use."</a:t>
-            </a:r>
-            <a:endParaRPr lang="en-US" sz="1200" dirty="0"/>
-          </a:p>
-          <a:p>
-            <a:pPr algn="l" marL="342900" indent="-342900">
-              <a:lnSpc>
-                <a:spcPts val="1620"/>
-              </a:lnSpc>
-              <a:spcAft>
-                <a:spcPts val="300"/>
-              </a:spcAft>
-              <a:buSzPct val="100000"/>
-              <a:buChar char="•"/>
-            </a:pPr>
-            <a:r>
-              <a:rPr lang="en-US" sz="1200" i="1" dirty="0">
-                <a:solidFill>
-                  <a:srgbClr val="1C2833"/>
-                </a:solidFill>
-                <a:latin typeface="Arial" pitchFamily="34" charset="0"/>
-                <a:ea typeface="Arial" pitchFamily="34" charset="-122"/>
-                <a:cs typeface="Arial" pitchFamily="34" charset="-120"/>
-              </a:rPr>
-              <a:t>gṛdhaḥ</a:t>
-            </a:r>
-            <a:pPr algn="l" indent="0" marL="0">
-              <a:lnSpc>
-                <a:spcPts val="1620"/>
-              </a:lnSpc>
-              <a:spcAft>
-                <a:spcPts val="300"/>
-              </a:spcAft>
-              <a:buNone/>
-            </a:pPr>
-            <a:r>
-              <a:rPr lang="en-US" sz="1200" dirty="0">
-                <a:solidFill>
-                  <a:srgbClr val="1C2833"/>
-                </a:solidFill>
-                <a:latin typeface="Arial" pitchFamily="34" charset="0"/>
-                <a:ea typeface="Arial" pitchFamily="34" charset="-122"/>
-                <a:cs typeface="Arial" pitchFamily="34" charset="-120"/>
-              </a:rPr>
-              <a:t> (IAST: gṛdhaḥ; lit. "grasping, coveting") — greed, desire to grab.</a:t>
-            </a:r>
-            <a:endParaRPr lang="en-US" sz="1200" dirty="0"/>
-          </a:p>
-          <a:p>
-            <a:pPr algn="l" marL="342900" indent="-342900">
-              <a:lnSpc>
-                <a:spcPts val="1620"/>
-              </a:lnSpc>
-              <a:spcAft>
-                <a:spcPts val="300"/>
-              </a:spcAft>
-              <a:buSzPct val="100000"/>
-              <a:buChar char="•"/>
-            </a:pPr>
-            <a:r>
-              <a:rPr lang="en-US" sz="1200" i="1" dirty="0">
-                <a:solidFill>
-                  <a:srgbClr val="1C2833"/>
-                </a:solidFill>
-                <a:latin typeface="Arial" pitchFamily="34" charset="0"/>
-                <a:ea typeface="Arial" pitchFamily="34" charset="-122"/>
-                <a:cs typeface="Arial" pitchFamily="34" charset="-120"/>
-              </a:rPr>
-              <a:t>ahiṁsā</a:t>
-            </a:r>
-            <a:pPr algn="l" indent="0" marL="0">
-              <a:lnSpc>
-                <a:spcPts val="1620"/>
-              </a:lnSpc>
-              <a:spcAft>
-                <a:spcPts val="300"/>
-              </a:spcAft>
-              <a:buNone/>
-            </a:pPr>
-            <a:r>
-              <a:rPr lang="en-US" sz="1200" dirty="0">
-                <a:solidFill>
-                  <a:srgbClr val="1C2833"/>
-                </a:solidFill>
-                <a:latin typeface="Arial" pitchFamily="34" charset="0"/>
-                <a:ea typeface="Arial" pitchFamily="34" charset="-122"/>
-                <a:cs typeface="Arial" pitchFamily="34" charset="-120"/>
-              </a:rPr>
-              <a:t> (IAST: ahiṁsā; lit. "non-harm") — non-injury to living beings; the first of Patañjali's five </a:t>
-            </a:r>
-            <a:pPr algn="l" indent="0" marL="0">
-              <a:lnSpc>
-                <a:spcPts val="1620"/>
-              </a:lnSpc>
-              <a:spcAft>
-                <a:spcPts val="300"/>
-              </a:spcAft>
-              <a:buNone/>
-            </a:pPr>
-            <a:r>
-              <a:rPr lang="en-US" sz="1200" i="1" dirty="0">
-                <a:solidFill>
-                  <a:srgbClr val="1C2833"/>
-                </a:solidFill>
-                <a:latin typeface="Arial" pitchFamily="34" charset="0"/>
-                <a:ea typeface="Arial" pitchFamily="34" charset="-122"/>
-                <a:cs typeface="Arial" pitchFamily="34" charset="-120"/>
-              </a:rPr>
-              <a:t>yamas</a:t>
-            </a:r>
-            <a:pPr algn="l" indent="0" marL="0">
-              <a:lnSpc>
-                <a:spcPts val="1620"/>
-              </a:lnSpc>
-              <a:spcAft>
-                <a:spcPts val="300"/>
-              </a:spcAft>
-              <a:buNone/>
-            </a:pPr>
-            <a:r>
-              <a:rPr lang="en-US" sz="1200" dirty="0">
-                <a:solidFill>
-                  <a:srgbClr val="1C2833"/>
-                </a:solidFill>
-                <a:latin typeface="Arial" pitchFamily="34" charset="0"/>
-                <a:ea typeface="Arial" pitchFamily="34" charset="-122"/>
-                <a:cs typeface="Arial" pitchFamily="34" charset="-120"/>
-              </a:rPr>
-              <a:t>. (Bridge from Module 8.)</a:t>
+              <a:t>Whiteboard</a:t>
             </a:r>
             <a:endParaRPr lang="en-US" sz="1200" dirty="0"/>
           </a:p>
@@ -4508,7 +8449,7 @@
                 <a:ea typeface="Georgia" pitchFamily="34" charset="-122"/>
                 <a:cs typeface="Georgia" pitchFamily="34" charset="-120"/>
               </a:rPr>
-              <a:t>Lesson flow</a:t>
+              <a:t>Vocabulary</a:t>
             </a:r>
             <a:endParaRPr lang="en-US" sz="1800" dirty="0"/>
           </a:p>
@@ -4517,6 +8458,292 @@
       <p:sp>
         <p:nvSpPr>
           <p:cNvPr id="4" name="Text 2"/>
+          <p:cNvSpPr/>
+          <p:nvPr/>
+        </p:nvSpPr>
+        <p:spPr>
+          <a:xfrm>
+            <a:off x="634901" y="883593"/>
+            <a:ext cx="8102798" cy="1706463"/>
+          </a:xfrm>
+          <a:prstGeom prst="rect">
+            <a:avLst/>
+          </a:prstGeom>
+          <a:noFill/>
+          <a:ln/>
+        </p:spPr>
+        <p:txBody>
+          <a:bodyPr wrap="square" lIns="0" tIns="0" rIns="0" bIns="0" rtlCol="0" anchor="t"/>
+          <a:lstStyle/>
+          <a:p>
+            <a:pPr algn="l" marL="342900" indent="-342900">
+              <a:lnSpc>
+                <a:spcPts val="1620"/>
+              </a:lnSpc>
+              <a:spcAft>
+                <a:spcPts val="300"/>
+              </a:spcAft>
+              <a:buSzPct val="100000"/>
+              <a:buChar char="•"/>
+            </a:pPr>
+            <a:r>
+              <a:rPr lang="en-US" sz="1200" i="1" dirty="0">
+                <a:solidFill>
+                  <a:srgbClr val="1C2833"/>
+                </a:solidFill>
+                <a:latin typeface="Arial" pitchFamily="34" charset="0"/>
+                <a:ea typeface="Arial" pitchFamily="34" charset="-122"/>
+                <a:cs typeface="Arial" pitchFamily="34" charset="-120"/>
+              </a:rPr>
+              <a:t>īśa</a:t>
+            </a:r>
+            <a:pPr algn="l" indent="0" marL="0">
+              <a:lnSpc>
+                <a:spcPts val="1620"/>
+              </a:lnSpc>
+              <a:spcAft>
+                <a:spcPts val="300"/>
+              </a:spcAft>
+              <a:buNone/>
+            </a:pPr>
+            <a:r>
+              <a:rPr lang="en-US" sz="1200" dirty="0">
+                <a:solidFill>
+                  <a:srgbClr val="1C2833"/>
+                </a:solidFill>
+                <a:latin typeface="Arial" pitchFamily="34" charset="0"/>
+                <a:ea typeface="Arial" pitchFamily="34" charset="-122"/>
+                <a:cs typeface="Arial" pitchFamily="34" charset="-120"/>
+              </a:rPr>
+              <a:t> (IAST: īśa; lit. "lord, controller") — the supreme principle / divinity. The Upaniṣad is named after the first word of mantra 1.</a:t>
+            </a:r>
+            <a:endParaRPr lang="en-US" sz="1200" dirty="0"/>
+          </a:p>
+          <a:p>
+            <a:pPr algn="l" marL="342900" indent="-342900">
+              <a:lnSpc>
+                <a:spcPts val="1620"/>
+              </a:lnSpc>
+              <a:spcAft>
+                <a:spcPts val="300"/>
+              </a:spcAft>
+              <a:buSzPct val="100000"/>
+              <a:buChar char="•"/>
+            </a:pPr>
+            <a:r>
+              <a:rPr lang="en-US" sz="1200" i="1" dirty="0">
+                <a:solidFill>
+                  <a:srgbClr val="1C2833"/>
+                </a:solidFill>
+                <a:latin typeface="Arial" pitchFamily="34" charset="0"/>
+                <a:ea typeface="Arial" pitchFamily="34" charset="-122"/>
+                <a:cs typeface="Arial" pitchFamily="34" charset="-120"/>
+              </a:rPr>
+              <a:t>īśāvāsya</a:t>
+            </a:r>
+            <a:pPr algn="l" indent="0" marL="0">
+              <a:lnSpc>
+                <a:spcPts val="1620"/>
+              </a:lnSpc>
+              <a:spcAft>
+                <a:spcPts val="300"/>
+              </a:spcAft>
+              <a:buNone/>
+            </a:pPr>
+            <a:r>
+              <a:rPr lang="en-US" sz="1200" dirty="0">
+                <a:solidFill>
+                  <a:srgbClr val="1C2833"/>
+                </a:solidFill>
+                <a:latin typeface="Arial" pitchFamily="34" charset="0"/>
+                <a:ea typeface="Arial" pitchFamily="34" charset="-122"/>
+                <a:cs typeface="Arial" pitchFamily="34" charset="-120"/>
+              </a:rPr>
+              <a:t> (IAST: īśāvāsya) — "to-be-enveloped-by-the-lord," i.e. permeated by the divine.</a:t>
+            </a:r>
+            <a:endParaRPr lang="en-US" sz="1200" dirty="0"/>
+          </a:p>
+          <a:p>
+            <a:pPr algn="l" marL="342900" indent="-342900">
+              <a:lnSpc>
+                <a:spcPts val="1620"/>
+              </a:lnSpc>
+              <a:spcAft>
+                <a:spcPts val="300"/>
+              </a:spcAft>
+              <a:buSzPct val="100000"/>
+              <a:buChar char="•"/>
+            </a:pPr>
+            <a:r>
+              <a:rPr lang="en-US" sz="1200" i="1" dirty="0">
+                <a:solidFill>
+                  <a:srgbClr val="1C2833"/>
+                </a:solidFill>
+                <a:latin typeface="Arial" pitchFamily="34" charset="0"/>
+                <a:ea typeface="Arial" pitchFamily="34" charset="-122"/>
+                <a:cs typeface="Arial" pitchFamily="34" charset="-120"/>
+              </a:rPr>
+              <a:t>jagat</a:t>
+            </a:r>
+            <a:pPr algn="l" indent="0" marL="0">
+              <a:lnSpc>
+                <a:spcPts val="1620"/>
+              </a:lnSpc>
+              <a:spcAft>
+                <a:spcPts val="300"/>
+              </a:spcAft>
+              <a:buNone/>
+            </a:pPr>
+            <a:r>
+              <a:rPr lang="en-US" sz="1200" dirty="0">
+                <a:solidFill>
+                  <a:srgbClr val="1C2833"/>
+                </a:solidFill>
+                <a:latin typeface="Arial" pitchFamily="34" charset="0"/>
+                <a:ea typeface="Arial" pitchFamily="34" charset="-122"/>
+                <a:cs typeface="Arial" pitchFamily="34" charset="-120"/>
+              </a:rPr>
+              <a:t> (IAST: jagat; lit. "what moves") — the moving / changing world.</a:t>
+            </a:r>
+            <a:endParaRPr lang="en-US" sz="1200" dirty="0"/>
+          </a:p>
+          <a:p>
+            <a:pPr algn="l" marL="342900" indent="-342900">
+              <a:lnSpc>
+                <a:spcPts val="1620"/>
+              </a:lnSpc>
+              <a:spcAft>
+                <a:spcPts val="300"/>
+              </a:spcAft>
+              <a:buSzPct val="100000"/>
+              <a:buChar char="•"/>
+            </a:pPr>
+            <a:r>
+              <a:rPr lang="en-US" sz="1200" i="1" dirty="0">
+                <a:solidFill>
+                  <a:srgbClr val="1C2833"/>
+                </a:solidFill>
+                <a:latin typeface="Arial" pitchFamily="34" charset="0"/>
+                <a:ea typeface="Arial" pitchFamily="34" charset="-122"/>
+                <a:cs typeface="Arial" pitchFamily="34" charset="-120"/>
+              </a:rPr>
+              <a:t>tyakta</a:t>
+            </a:r>
+            <a:pPr algn="l" indent="0" marL="0">
+              <a:lnSpc>
+                <a:spcPts val="1620"/>
+              </a:lnSpc>
+              <a:spcAft>
+                <a:spcPts val="300"/>
+              </a:spcAft>
+              <a:buNone/>
+            </a:pPr>
+            <a:r>
+              <a:rPr lang="en-US" sz="1200" dirty="0">
+                <a:solidFill>
+                  <a:srgbClr val="1C2833"/>
+                </a:solidFill>
+                <a:latin typeface="Arial" pitchFamily="34" charset="0"/>
+                <a:ea typeface="Arial" pitchFamily="34" charset="-122"/>
+                <a:cs typeface="Arial" pitchFamily="34" charset="-120"/>
+              </a:rPr>
+              <a:t> (IAST: tyakta; lit. "renounced, given up") — what is given up, set aside, surrendered.</a:t>
+            </a:r>
+            <a:endParaRPr lang="en-US" sz="1200" dirty="0"/>
+          </a:p>
+          <a:p>
+            <a:pPr algn="l" marL="342900" indent="-342900">
+              <a:lnSpc>
+                <a:spcPts val="1620"/>
+              </a:lnSpc>
+              <a:spcAft>
+                <a:spcPts val="300"/>
+              </a:spcAft>
+              <a:buSzPct val="100000"/>
+              <a:buChar char="•"/>
+            </a:pPr>
+            <a:r>
+              <a:rPr lang="en-US" sz="1200" i="1" dirty="0">
+                <a:solidFill>
+                  <a:srgbClr val="1C2833"/>
+                </a:solidFill>
+                <a:latin typeface="Arial" pitchFamily="34" charset="0"/>
+                <a:ea typeface="Arial" pitchFamily="34" charset="-122"/>
+                <a:cs typeface="Arial" pitchFamily="34" charset="-120"/>
+              </a:rPr>
+              <a:t>bhuñjīthāḥ</a:t>
+            </a:r>
+            <a:pPr algn="l" indent="0" marL="0">
+              <a:lnSpc>
+                <a:spcPts val="1620"/>
+              </a:lnSpc>
+              <a:spcAft>
+                <a:spcPts val="300"/>
+              </a:spcAft>
+              <a:buNone/>
+            </a:pPr>
+            <a:r>
+              <a:rPr lang="en-US" sz="1200" dirty="0">
+                <a:solidFill>
+                  <a:srgbClr val="1C2833"/>
+                </a:solidFill>
+                <a:latin typeface="Arial" pitchFamily="34" charset="0"/>
+                <a:ea typeface="Arial" pitchFamily="34" charset="-122"/>
+                <a:cs typeface="Arial" pitchFamily="34" charset="-120"/>
+              </a:rPr>
+              <a:t> (IAST: bhuñjīthāḥ) — "you may enjoy / partake / use."</a:t>
+            </a:r>
+            <a:endParaRPr lang="en-US" sz="1200" dirty="0"/>
+          </a:p>
+          <a:p>
+            <a:pPr algn="l" marL="342900" indent="-342900">
+              <a:lnSpc>
+                <a:spcPts val="1620"/>
+              </a:lnSpc>
+              <a:spcAft>
+                <a:spcPts val="300"/>
+              </a:spcAft>
+              <a:buSzPct val="100000"/>
+              <a:buChar char="•"/>
+            </a:pPr>
+            <a:r>
+              <a:rPr lang="en-US" sz="1200" i="1" dirty="0">
+                <a:solidFill>
+                  <a:srgbClr val="1C2833"/>
+                </a:solidFill>
+                <a:latin typeface="Arial" pitchFamily="34" charset="0"/>
+                <a:ea typeface="Arial" pitchFamily="34" charset="-122"/>
+                <a:cs typeface="Arial" pitchFamily="34" charset="-120"/>
+              </a:rPr>
+              <a:t>gṛdhaḥ</a:t>
+            </a:r>
+            <a:pPr algn="l" indent="0" marL="0">
+              <a:lnSpc>
+                <a:spcPts val="1620"/>
+              </a:lnSpc>
+              <a:spcAft>
+                <a:spcPts val="300"/>
+              </a:spcAft>
+              <a:buNone/>
+            </a:pPr>
+            <a:r>
+              <a:rPr lang="en-US" sz="1200" dirty="0">
+                <a:solidFill>
+                  <a:srgbClr val="1C2833"/>
+                </a:solidFill>
+                <a:latin typeface="Arial" pitchFamily="34" charset="0"/>
+                <a:ea typeface="Arial" pitchFamily="34" charset="-122"/>
+                <a:cs typeface="Arial" pitchFamily="34" charset="-120"/>
+              </a:rPr>
+              <a:t> (IAST: gṛdhaḥ; lit. "grasping, coveting") — greed, desire to grab.</a:t>
+            </a:r>
+            <a:endParaRPr lang="en-US" sz="1200" dirty="0"/>
+          </a:p>
+        </p:txBody>
+      </p:sp>
+      <p:sp>
+        <p:nvSpPr>
+          <p:cNvPr id="5" name="Text 3"/>
           <p:cNvSpPr/>
           <p:nvPr/>
         </p:nvSpPr>
@@ -4666,7 +8893,7 @@
                 <a:ea typeface="Georgia" pitchFamily="34" charset="-122"/>
                 <a:cs typeface="Georgia" pitchFamily="34" charset="-120"/>
               </a:rPr>
-              <a:t>Warm-up (5 min)</a:t>
+              <a:t>Vocabulary (cont.)</a:t>
             </a:r>
             <a:endParaRPr lang="en-US" sz="1800" dirty="0"/>
           </a:p>
@@ -4680,8 +8907,8 @@
         </p:nvSpPr>
         <p:spPr>
           <a:xfrm>
-            <a:off x="406301" y="870942"/>
-            <a:ext cx="8498026" cy="426541"/>
+            <a:off x="634901" y="883593"/>
+            <a:ext cx="8102798" cy="487561"/>
           </a:xfrm>
           <a:prstGeom prst="rect">
             <a:avLst/>
@@ -4693,100 +8920,6 @@
           <a:bodyPr wrap="square" lIns="0" tIns="0" rIns="0" bIns="0" rtlCol="0" anchor="t"/>
           <a:lstStyle/>
           <a:p>
-            <a:pPr algn="l" indent="0" marL="0">
-              <a:lnSpc>
-                <a:spcPts val="1680"/>
-              </a:lnSpc>
-              <a:spcBef>
-                <a:spcPts val="300"/>
-              </a:spcBef>
-              <a:spcAft>
-                <a:spcPts val="300"/>
-              </a:spcAft>
-              <a:buNone/>
-            </a:pPr>
-            <a:r>
-              <a:rPr lang="en-US" sz="1200" dirty="0">
-                <a:solidFill>
-                  <a:srgbClr val="1C2833"/>
-                </a:solidFill>
-                <a:latin typeface="Arial" pitchFamily="34" charset="0"/>
-                <a:ea typeface="Arial" pitchFamily="34" charset="-122"/>
-                <a:cs typeface="Arial" pitchFamily="34" charset="-120"/>
-              </a:rPr>
-              <a:t>– On the board: </a:t>
-            </a:r>
-            <a:pPr algn="l" indent="0" marL="0">
-              <a:lnSpc>
-                <a:spcPts val="1680"/>
-              </a:lnSpc>
-              <a:spcBef>
-                <a:spcPts val="300"/>
-              </a:spcBef>
-              <a:spcAft>
-                <a:spcPts val="300"/>
-              </a:spcAft>
-              <a:buNone/>
-            </a:pPr>
-            <a:r>
-              <a:rPr lang="en-US" sz="1200" i="1" dirty="0">
-                <a:solidFill>
-                  <a:srgbClr val="1C2833"/>
-                </a:solidFill>
-                <a:latin typeface="Arial" pitchFamily="34" charset="0"/>
-                <a:ea typeface="Arial" pitchFamily="34" charset="-122"/>
-                <a:cs typeface="Arial" pitchFamily="34" charset="-120"/>
-              </a:rPr>
-              <a:t>"Name one thing you used today that wasn't yours."</a:t>
-            </a:r>
-            <a:pPr algn="l" indent="0" marL="0">
-              <a:lnSpc>
-                <a:spcPts val="1680"/>
-              </a:lnSpc>
-              <a:spcBef>
-                <a:spcPts val="300"/>
-              </a:spcBef>
-              <a:spcAft>
-                <a:spcPts val="300"/>
-              </a:spcAft>
-              <a:buNone/>
-            </a:pPr>
-            <a:r>
-              <a:rPr lang="en-US" sz="1200" dirty="0">
-                <a:solidFill>
-                  <a:srgbClr val="1C2833"/>
-                </a:solidFill>
-                <a:latin typeface="Arial" pitchFamily="34" charset="0"/>
-                <a:ea typeface="Arial" pitchFamily="34" charset="-122"/>
-                <a:cs typeface="Arial" pitchFamily="34" charset="-120"/>
-              </a:rPr>
-              <a:t> (Air. Sunlight. The road. The bench. The teacher's time.) – Take 4–5 quick answers.</a:t>
-            </a:r>
-            <a:endParaRPr lang="en-US" sz="1200" dirty="0"/>
-          </a:p>
-        </p:txBody>
-      </p:sp>
-      <p:sp>
-        <p:nvSpPr>
-          <p:cNvPr id="5" name="Text 3"/>
-          <p:cNvSpPr/>
-          <p:nvPr/>
-        </p:nvSpPr>
-        <p:spPr>
-          <a:xfrm>
-            <a:off x="634901" y="1386334"/>
-            <a:ext cx="8102798" cy="281880"/>
-          </a:xfrm>
-          <a:prstGeom prst="rect">
-            <a:avLst/>
-          </a:prstGeom>
-          <a:noFill/>
-          <a:ln/>
-        </p:spPr>
-        <p:txBody>
-          <a:bodyPr wrap="square" lIns="0" tIns="0" rIns="0" bIns="0" rtlCol="0" anchor="t"/>
-          <a:lstStyle/>
-          <a:p>
             <a:pPr algn="l" marL="342900" indent="-342900">
               <a:lnSpc>
                 <a:spcPts val="1620"/>
@@ -4806,7 +8939,7 @@
                 <a:ea typeface="Arial" pitchFamily="34" charset="-122"/>
                 <a:cs typeface="Arial" pitchFamily="34" charset="-120"/>
               </a:rPr>
-              <a:t>"Now — did you 'grab' it, or 'use' it? What's the difference?"</a:t>
+              <a:t>ahiṁsā</a:t>
             </a:r>
             <a:pPr algn="l" indent="0" marL="0">
               <a:lnSpc>
@@ -4826,7 +8959,47 @@
                 <a:ea typeface="Arial" pitchFamily="34" charset="-122"/>
                 <a:cs typeface="Arial" pitchFamily="34" charset="-120"/>
               </a:rPr>
-              <a:t> Don't resolve. The mantra resolves it.</a:t>
+              <a:t> (IAST: ahiṁsā; lit. "non-harm") — non-injury to living beings; the first of Patañjali's five </a:t>
+            </a:r>
+            <a:pPr algn="l" indent="0" marL="0">
+              <a:lnSpc>
+                <a:spcPts val="1620"/>
+              </a:lnSpc>
+              <a:spcAft>
+                <a:spcPts val="300"/>
+              </a:spcAft>
+              <a:buNone/>
+            </a:pPr>
+            <a:r>
+              <a:rPr lang="en-US" sz="1200" i="1" dirty="0">
+                <a:solidFill>
+                  <a:srgbClr val="1C2833"/>
+                </a:solidFill>
+                <a:latin typeface="Arial" pitchFamily="34" charset="0"/>
+                <a:ea typeface="Arial" pitchFamily="34" charset="-122"/>
+                <a:cs typeface="Arial" pitchFamily="34" charset="-120"/>
+              </a:rPr>
+              <a:t>yamas</a:t>
+            </a:r>
+            <a:pPr algn="l" indent="0" marL="0">
+              <a:lnSpc>
+                <a:spcPts val="1620"/>
+              </a:lnSpc>
+              <a:spcAft>
+                <a:spcPts val="300"/>
+              </a:spcAft>
+              <a:buNone/>
+            </a:pPr>
+            <a:r>
+              <a:rPr lang="en-US" sz="1200" dirty="0">
+                <a:solidFill>
+                  <a:srgbClr val="1C2833"/>
+                </a:solidFill>
+                <a:latin typeface="Arial" pitchFamily="34" charset="0"/>
+                <a:ea typeface="Arial" pitchFamily="34" charset="-122"/>
+                <a:cs typeface="Arial" pitchFamily="34" charset="-120"/>
+              </a:rPr>
+              <a:t>. (Bridge from Module 8.)</a:t>
             </a:r>
             <a:endParaRPr lang="en-US" sz="1200" dirty="0"/>
           </a:p>
@@ -4834,7 +9007,7 @@
       </p:sp>
       <p:sp>
         <p:nvSpPr>
-          <p:cNvPr id="6" name="Text 4"/>
+          <p:cNvPr id="5" name="Text 3"/>
           <p:cNvSpPr/>
           <p:nvPr/>
         </p:nvSpPr>
@@ -4984,7 +9157,7 @@
                 <a:ea typeface="Georgia" pitchFamily="34" charset="-122"/>
                 <a:cs typeface="Georgia" pitchFamily="34" charset="-120"/>
               </a:rPr>
-              <a:t>Activity (15 min) — "What do I grab without asking?"</a:t>
+              <a:t>Lesson flow</a:t>
             </a:r>
             <a:endParaRPr lang="en-US" sz="1800" dirty="0"/>
           </a:p>
@@ -4993,234 +9166,6 @@
       <p:sp>
         <p:nvSpPr>
           <p:cNvPr id="4" name="Text 2"/>
-          <p:cNvSpPr/>
-          <p:nvPr/>
-        </p:nvSpPr>
-        <p:spPr>
-          <a:xfrm>
-            <a:off x="406301" y="870942"/>
-            <a:ext cx="8498026" cy="853083"/>
-          </a:xfrm>
-          <a:prstGeom prst="rect">
-            <a:avLst/>
-          </a:prstGeom>
-          <a:noFill/>
-          <a:ln/>
-        </p:spPr>
-        <p:txBody>
-          <a:bodyPr wrap="square" lIns="0" tIns="0" rIns="0" bIns="0" rtlCol="0" anchor="t"/>
-          <a:lstStyle/>
-          <a:p>
-            <a:pPr algn="l" indent="0" marL="0">
-              <a:lnSpc>
-                <a:spcPts val="1680"/>
-              </a:lnSpc>
-              <a:spcBef>
-                <a:spcPts val="300"/>
-              </a:spcBef>
-              <a:spcAft>
-                <a:spcPts val="300"/>
-              </a:spcAft>
-              <a:buNone/>
-            </a:pPr>
-            <a:r>
-              <a:rPr lang="en-US" sz="1200" dirty="0">
-                <a:solidFill>
-                  <a:srgbClr val="1C2833"/>
-                </a:solidFill>
-                <a:latin typeface="Arial" pitchFamily="34" charset="0"/>
-                <a:ea typeface="Arial" pitchFamily="34" charset="-122"/>
-                <a:cs typeface="Arial" pitchFamily="34" charset="-120"/>
-              </a:rPr>
-              <a:t>– Each student takes 5 minutes alone with their notebook. – Prompt: </a:t>
-            </a:r>
-            <a:pPr algn="l" indent="0" marL="0">
-              <a:lnSpc>
-                <a:spcPts val="1680"/>
-              </a:lnSpc>
-              <a:spcBef>
-                <a:spcPts val="300"/>
-              </a:spcBef>
-              <a:spcAft>
-                <a:spcPts val="300"/>
-              </a:spcAft>
-              <a:buNone/>
-            </a:pPr>
-            <a:r>
-              <a:rPr lang="en-US" sz="1200" i="1" dirty="0">
-                <a:solidFill>
-                  <a:srgbClr val="1C2833"/>
-                </a:solidFill>
-                <a:latin typeface="Arial" pitchFamily="34" charset="0"/>
-                <a:ea typeface="Arial" pitchFamily="34" charset="-122"/>
-                <a:cs typeface="Arial" pitchFamily="34" charset="-120"/>
-              </a:rPr>
-              <a:t>"List five specific things you took today without asking — and decide, for each, whether you 'used' it or 'grabbed' it."</a:t>
-            </a:r>
-            <a:pPr algn="l" indent="0" marL="0">
-              <a:lnSpc>
-                <a:spcPts val="1680"/>
-              </a:lnSpc>
-              <a:spcBef>
-                <a:spcPts val="300"/>
-              </a:spcBef>
-              <a:spcAft>
-                <a:spcPts val="300"/>
-              </a:spcAft>
-              <a:buNone/>
-            </a:pPr>
-            <a:r>
-              <a:rPr lang="en-US" sz="1200" dirty="0">
-                <a:solidFill>
-                  <a:srgbClr val="1C2833"/>
-                </a:solidFill>
-                <a:latin typeface="Arial" pitchFamily="34" charset="0"/>
-                <a:ea typeface="Arial" pitchFamily="34" charset="-122"/>
-                <a:cs typeface="Arial" pitchFamily="34" charset="-120"/>
-              </a:rPr>
-              <a:t> – Examples to seed: – Took 5 sheets of printer paper for 2 sheets of work. ← Grab. – Drank a glass of water at the school cooler. ← Use. – Threw away half a plate of food at lunch. ← Grab. – Listened to a teacher's full explanation. ← Use. – Cut a flower off the plant for fun. ← Grab.</a:t>
-            </a:r>
-            <a:endParaRPr lang="en-US" sz="1200" dirty="0"/>
-          </a:p>
-        </p:txBody>
-      </p:sp>
-      <p:sp>
-        <p:nvSpPr>
-          <p:cNvPr id="5" name="Text 3"/>
-          <p:cNvSpPr/>
-          <p:nvPr/>
-        </p:nvSpPr>
-        <p:spPr>
-          <a:xfrm>
-            <a:off x="406301" y="1800225"/>
-            <a:ext cx="8498026" cy="213271"/>
-          </a:xfrm>
-          <a:prstGeom prst="rect">
-            <a:avLst/>
-          </a:prstGeom>
-          <a:noFill/>
-          <a:ln/>
-        </p:spPr>
-        <p:txBody>
-          <a:bodyPr wrap="square" lIns="0" tIns="0" rIns="0" bIns="0" rtlCol="0" anchor="t"/>
-          <a:lstStyle/>
-          <a:p>
-            <a:pPr algn="l" indent="0" marL="0">
-              <a:lnSpc>
-                <a:spcPts val="1680"/>
-              </a:lnSpc>
-              <a:spcBef>
-                <a:spcPts val="300"/>
-              </a:spcBef>
-              <a:spcAft>
-                <a:spcPts val="300"/>
-              </a:spcAft>
-              <a:buNone/>
-            </a:pPr>
-            <a:r>
-              <a:rPr lang="en-US" sz="1200" dirty="0">
-                <a:solidFill>
-                  <a:srgbClr val="1C2833"/>
-                </a:solidFill>
-                <a:latin typeface="Arial" pitchFamily="34" charset="0"/>
-                <a:ea typeface="Arial" pitchFamily="34" charset="-122"/>
-                <a:cs typeface="Arial" pitchFamily="34" charset="-120"/>
-              </a:rPr>
-              <a:t>– Pairs share two from their list. Pairs help each other classify.</a:t>
-            </a:r>
-            <a:endParaRPr lang="en-US" sz="1200" dirty="0"/>
-          </a:p>
-        </p:txBody>
-      </p:sp>
-      <p:sp>
-        <p:nvSpPr>
-          <p:cNvPr id="6" name="Text 4"/>
-          <p:cNvSpPr/>
-          <p:nvPr/>
-        </p:nvSpPr>
-        <p:spPr>
-          <a:xfrm>
-            <a:off x="634901" y="2102346"/>
-            <a:ext cx="8102798" cy="487561"/>
-          </a:xfrm>
-          <a:prstGeom prst="rect">
-            <a:avLst/>
-          </a:prstGeom>
-          <a:noFill/>
-          <a:ln/>
-        </p:spPr>
-        <p:txBody>
-          <a:bodyPr wrap="square" lIns="0" tIns="0" rIns="0" bIns="0" rtlCol="0" anchor="t"/>
-          <a:lstStyle/>
-          <a:p>
-            <a:pPr algn="l" marL="342900" indent="-342900">
-              <a:lnSpc>
-                <a:spcPts val="1620"/>
-              </a:lnSpc>
-              <a:spcAft>
-                <a:spcPts val="300"/>
-              </a:spcAft>
-              <a:buSzPct val="100000"/>
-              <a:buChar char="•"/>
-            </a:pPr>
-            <a:r>
-              <a:rPr lang="en-US" sz="1200" b="1" dirty="0">
-                <a:solidFill>
-                  <a:srgbClr val="1C2833"/>
-                </a:solidFill>
-                <a:latin typeface="Arial" pitchFamily="34" charset="0"/>
-                <a:ea typeface="Arial" pitchFamily="34" charset="-122"/>
-                <a:cs typeface="Arial" pitchFamily="34" charset="-120"/>
-              </a:rPr>
-              <a:t>Whole-class discussion (5 min):</a:t>
-            </a:r>
-            <a:pPr algn="l" indent="0" marL="0">
-              <a:lnSpc>
-                <a:spcPts val="1620"/>
-              </a:lnSpc>
-              <a:spcAft>
-                <a:spcPts val="300"/>
-              </a:spcAft>
-              <a:buNone/>
-            </a:pPr>
-            <a:r>
-              <a:rPr lang="en-US" sz="1200" dirty="0">
-                <a:solidFill>
-                  <a:srgbClr val="1C2833"/>
-                </a:solidFill>
-                <a:latin typeface="Arial" pitchFamily="34" charset="0"/>
-                <a:ea typeface="Arial" pitchFamily="34" charset="-122"/>
-                <a:cs typeface="Arial" pitchFamily="34" charset="-120"/>
-              </a:rPr>
-              <a:t> </a:t>
-            </a:r>
-            <a:pPr algn="l" indent="0" marL="0">
-              <a:lnSpc>
-                <a:spcPts val="1620"/>
-              </a:lnSpc>
-              <a:spcAft>
-                <a:spcPts val="300"/>
-              </a:spcAft>
-              <a:buNone/>
-            </a:pPr>
-            <a:r>
-              <a:rPr lang="en-US" sz="1200" i="1" dirty="0">
-                <a:solidFill>
-                  <a:srgbClr val="1C2833"/>
-                </a:solidFill>
-                <a:latin typeface="Arial" pitchFamily="34" charset="0"/>
-                <a:ea typeface="Arial" pitchFamily="34" charset="-122"/>
-                <a:cs typeface="Arial" pitchFamily="34" charset="-120"/>
-              </a:rPr>
-              <a:t>"Of the grabs we listed — which is the easiest one to stop? Which is the hardest? Why?"</a:t>
-            </a:r>
-            <a:endParaRPr lang="en-US" sz="1200" dirty="0"/>
-          </a:p>
-        </p:txBody>
-      </p:sp>
-      <p:sp>
-        <p:nvSpPr>
-          <p:cNvPr id="7" name="Text 5"/>
           <p:cNvSpPr/>
           <p:nvPr/>
         </p:nvSpPr>
@@ -5370,7 +9315,7 @@
                 <a:ea typeface="Georgia" pitchFamily="34" charset="-122"/>
                 <a:cs typeface="Georgia" pitchFamily="34" charset="-120"/>
               </a:rPr>
-              <a:t>Wrap-up (5 min)</a:t>
+              <a:t>Warm-up (5 min)</a:t>
             </a:r>
             <a:endParaRPr lang="en-US" sz="1800" dirty="0"/>
           </a:p>
@@ -5385,7 +9330,7 @@
         <p:spPr>
           <a:xfrm>
             <a:off x="634901" y="883593"/>
-            <a:ext cx="8102798" cy="487561"/>
+            <a:ext cx="8102798" cy="975122"/>
           </a:xfrm>
           <a:prstGeom prst="rect">
             <a:avLst/>
@@ -5408,26 +9353,6 @@
               <a:buChar char="•"/>
             </a:pPr>
             <a:r>
-              <a:rPr lang="en-US" sz="1200" b="1" dirty="0">
-                <a:solidFill>
-                  <a:srgbClr val="1C2833"/>
-                </a:solidFill>
-                <a:latin typeface="Arial" pitchFamily="34" charset="0"/>
-                <a:ea typeface="Arial" pitchFamily="34" charset="-122"/>
-                <a:cs typeface="Arial" pitchFamily="34" charset="-120"/>
-              </a:rPr>
-              <a:t>Exit ticket</a:t>
-            </a:r>
-            <a:pPr algn="l" indent="0" marL="0">
-              <a:lnSpc>
-                <a:spcPts val="1620"/>
-              </a:lnSpc>
-              <a:spcAft>
-                <a:spcPts val="300"/>
-              </a:spcAft>
-              <a:buNone/>
-            </a:pPr>
-            <a:r>
               <a:rPr lang="en-US" sz="1200" dirty="0">
                 <a:solidFill>
                   <a:srgbClr val="1C2833"/>
@@ -5436,7 +9361,7 @@
                 <a:ea typeface="Arial" pitchFamily="34" charset="-122"/>
                 <a:cs typeface="Arial" pitchFamily="34" charset="-120"/>
               </a:rPr>
-              <a:t> (slip of paper): </a:t>
+              <a:t>On the board: </a:t>
             </a:r>
             <a:pPr algn="l" indent="0" marL="0">
               <a:lnSpc>
@@ -5456,86 +9381,103 @@
                 <a:ea typeface="Arial" pitchFamily="34" charset="-122"/>
                 <a:cs typeface="Arial" pitchFamily="34" charset="-120"/>
               </a:rPr>
-              <a:t>"My one specific habit-grab from now on will be a use, not a grab. Specifically: I will _______ instead of _______."</a:t>
+              <a:t>"Name one thing you used today that wasn't yours."</a:t>
+            </a:r>
+            <a:pPr algn="l" indent="0" marL="0">
+              <a:lnSpc>
+                <a:spcPts val="1620"/>
+              </a:lnSpc>
+              <a:spcAft>
+                <a:spcPts val="300"/>
+              </a:spcAft>
+              <a:buNone/>
+            </a:pPr>
+            <a:r>
+              <a:rPr lang="en-US" sz="1200" dirty="0">
+                <a:solidFill>
+                  <a:srgbClr val="1C2833"/>
+                </a:solidFill>
+                <a:latin typeface="Arial" pitchFamily="34" charset="0"/>
+                <a:ea typeface="Arial" pitchFamily="34" charset="-122"/>
+                <a:cs typeface="Arial" pitchFamily="34" charset="-120"/>
+              </a:rPr>
+              <a:t> (Air. Sunlight. The road. The bench. The teacher's time.)</a:t>
             </a:r>
             <a:endParaRPr lang="en-US" sz="1200" dirty="0"/>
           </a:p>
+          <a:p>
+            <a:pPr algn="l" marL="342900" indent="-342900">
+              <a:lnSpc>
+                <a:spcPts val="1620"/>
+              </a:lnSpc>
+              <a:spcAft>
+                <a:spcPts val="300"/>
+              </a:spcAft>
+              <a:buSzPct val="100000"/>
+              <a:buChar char="•"/>
+            </a:pPr>
+            <a:r>
+              <a:rPr lang="en-US" sz="1200" dirty="0">
+                <a:solidFill>
+                  <a:srgbClr val="1C2833"/>
+                </a:solidFill>
+                <a:latin typeface="Arial" pitchFamily="34" charset="0"/>
+                <a:ea typeface="Arial" pitchFamily="34" charset="-122"/>
+                <a:cs typeface="Arial" pitchFamily="34" charset="-120"/>
+              </a:rPr>
+              <a:t>Take 4–5 quick answers.</a:t>
+            </a:r>
+            <a:endParaRPr lang="en-US" sz="1200" dirty="0"/>
+          </a:p>
+          <a:p>
+            <a:pPr algn="l" marL="342900" indent="-342900">
+              <a:lnSpc>
+                <a:spcPts val="1620"/>
+              </a:lnSpc>
+              <a:spcAft>
+                <a:spcPts val="300"/>
+              </a:spcAft>
+              <a:buSzPct val="100000"/>
+              <a:buChar char="•"/>
+            </a:pPr>
+            <a:r>
+              <a:rPr lang="en-US" sz="1200" i="1" dirty="0">
+                <a:solidFill>
+                  <a:srgbClr val="1C2833"/>
+                </a:solidFill>
+                <a:latin typeface="Arial" pitchFamily="34" charset="0"/>
+                <a:ea typeface="Arial" pitchFamily="34" charset="-122"/>
+                <a:cs typeface="Arial" pitchFamily="34" charset="-120"/>
+              </a:rPr>
+              <a:t>"Now — did you 'grab' it, or 'use' it? What's the difference?"</a:t>
+            </a:r>
+            <a:pPr algn="l" indent="0" marL="0">
+              <a:lnSpc>
+                <a:spcPts val="1620"/>
+              </a:lnSpc>
+              <a:spcAft>
+                <a:spcPts val="300"/>
+              </a:spcAft>
+              <a:buNone/>
+            </a:pPr>
+            <a:r>
+              <a:rPr lang="en-US" sz="1200" dirty="0">
+                <a:solidFill>
+                  <a:srgbClr val="1C2833"/>
+                </a:solidFill>
+                <a:latin typeface="Arial" pitchFamily="34" charset="0"/>
+                <a:ea typeface="Arial" pitchFamily="34" charset="-122"/>
+                <a:cs typeface="Arial" pitchFamily="34" charset="-120"/>
+              </a:rPr>
+              <a:t> Don't resolve. The mantra resolves it.</a:t>
+            </a:r>
+            <a:endParaRPr lang="en-US" sz="1200" dirty="0"/>
+          </a:p>
         </p:txBody>
       </p:sp>
       <p:sp>
         <p:nvSpPr>
           <p:cNvPr id="5" name="Text 3"/>
-          <p:cNvSpPr/>
-          <p:nvPr/>
-        </p:nvSpPr>
-        <p:spPr>
-          <a:xfrm>
-            <a:off x="406301" y="1460004"/>
-            <a:ext cx="8498026" cy="426541"/>
-          </a:xfrm>
-          <a:prstGeom prst="rect">
-            <a:avLst/>
-          </a:prstGeom>
-          <a:noFill/>
-          <a:ln/>
-        </p:spPr>
-        <p:txBody>
-          <a:bodyPr wrap="square" lIns="0" tIns="0" rIns="0" bIns="0" rtlCol="0" anchor="t"/>
-          <a:lstStyle/>
-          <a:p>
-            <a:pPr algn="l" indent="0" marL="0">
-              <a:lnSpc>
-                <a:spcPts val="1680"/>
-              </a:lnSpc>
-              <a:spcBef>
-                <a:spcPts val="300"/>
-              </a:spcBef>
-              <a:spcAft>
-                <a:spcPts val="300"/>
-              </a:spcAft>
-              <a:buNone/>
-            </a:pPr>
-            <a:r>
-              <a:rPr lang="en-US" sz="1200" dirty="0">
-                <a:solidFill>
-                  <a:srgbClr val="1C2833"/>
-                </a:solidFill>
-                <a:latin typeface="Arial" pitchFamily="34" charset="0"/>
-                <a:ea typeface="Arial" pitchFamily="34" charset="-122"/>
-                <a:cs typeface="Arial" pitchFamily="34" charset="-120"/>
-              </a:rPr>
-              <a:t>– Preview Day 8: </a:t>
-            </a:r>
-            <a:pPr algn="l" indent="0" marL="0">
-              <a:lnSpc>
-                <a:spcPts val="1680"/>
-              </a:lnSpc>
-              <a:spcBef>
-                <a:spcPts val="300"/>
-              </a:spcBef>
-              <a:spcAft>
-                <a:spcPts val="300"/>
-              </a:spcAft>
-              <a:buNone/>
-            </a:pPr>
-            <a:r>
-              <a:rPr lang="en-US" sz="1200" i="1" dirty="0">
-                <a:solidFill>
-                  <a:srgbClr val="1C2833"/>
-                </a:solidFill>
-                <a:latin typeface="Arial" pitchFamily="34" charset="0"/>
-                <a:ea typeface="Arial" pitchFamily="34" charset="-122"/>
-                <a:cs typeface="Arial" pitchFamily="34" charset="-120"/>
-              </a:rPr>
-              <a:t>"Tomorrow we look at the biggest grab humanity is collectively making — climate change. Then we put the framework to work."</a:t>
-            </a:r>
-            <a:endParaRPr lang="en-US" sz="1200" dirty="0"/>
-          </a:p>
-        </p:txBody>
-      </p:sp>
-      <p:sp>
-        <p:nvSpPr>
-          <p:cNvPr id="6" name="Text 4"/>
           <p:cNvSpPr/>
           <p:nvPr/>
         </p:nvSpPr>
@@ -5685,7 +9627,7 @@
                 <a:ea typeface="Georgia" pitchFamily="34" charset="-122"/>
                 <a:cs typeface="Georgia" pitchFamily="34" charset="-120"/>
               </a:rPr>
-              <a:t>Student-facing content</a:t>
+              <a:t>Core (20 min)</a:t>
             </a:r>
             <a:endParaRPr lang="en-US" sz="1800" dirty="0"/>
           </a:p>
@@ -5699,8 +9641,74 @@
         </p:nvSpPr>
         <p:spPr>
           <a:xfrm>
-            <a:off x="406301" y="883593"/>
-            <a:ext cx="8331398" cy="2612231"/>
+            <a:off x="634901" y="883593"/>
+            <a:ext cx="8102798" cy="281880"/>
+          </a:xfrm>
+          <a:prstGeom prst="rect">
+            <a:avLst/>
+          </a:prstGeom>
+          <a:noFill/>
+          <a:ln/>
+        </p:spPr>
+        <p:txBody>
+          <a:bodyPr wrap="square" lIns="0" tIns="0" rIns="0" bIns="0" rtlCol="0" anchor="t"/>
+          <a:lstStyle/>
+          <a:p>
+            <a:pPr algn="l" marL="342900" indent="-342900">
+              <a:lnSpc>
+                <a:spcPts val="1620"/>
+              </a:lnSpc>
+              <a:spcAft>
+                <a:spcPts val="300"/>
+              </a:spcAft>
+              <a:buSzPct val="100000"/>
+              <a:buChar char="•"/>
+            </a:pPr>
+            <a:r>
+              <a:rPr lang="en-US" sz="1200" b="1" dirty="0">
+                <a:solidFill>
+                  <a:srgbClr val="1C2833"/>
+                </a:solidFill>
+                <a:latin typeface="Arial" pitchFamily="34" charset="0"/>
+                <a:ea typeface="Arial" pitchFamily="34" charset="-122"/>
+                <a:cs typeface="Arial" pitchFamily="34" charset="-120"/>
+              </a:rPr>
+              <a:t>Read the mantra together</a:t>
+            </a:r>
+            <a:pPr algn="l" indent="0" marL="0">
+              <a:lnSpc>
+                <a:spcPts val="1620"/>
+              </a:lnSpc>
+              <a:spcAft>
+                <a:spcPts val="300"/>
+              </a:spcAft>
+              <a:buNone/>
+            </a:pPr>
+            <a:r>
+              <a:rPr lang="en-US" sz="1200" dirty="0">
+                <a:solidFill>
+                  <a:srgbClr val="1C2833"/>
+                </a:solidFill>
+                <a:latin typeface="Arial" pitchFamily="34" charset="0"/>
+                <a:ea typeface="Arial" pitchFamily="34" charset="-122"/>
+                <a:cs typeface="Arial" pitchFamily="34" charset="-120"/>
+              </a:rPr>
+              <a:t> — students follow along on the handout:</a:t>
+            </a:r>
+            <a:endParaRPr lang="en-US" sz="1200" dirty="0"/>
+          </a:p>
+        </p:txBody>
+      </p:sp>
+      <p:sp>
+        <p:nvSpPr>
+          <p:cNvPr id="5" name="Text 3"/>
+          <p:cNvSpPr/>
+          <p:nvPr/>
+        </p:nvSpPr>
+        <p:spPr>
+          <a:xfrm>
+            <a:off x="406301" y="1266974"/>
+            <a:ext cx="8331398" cy="1343025"/>
           </a:xfrm>
           <a:prstGeom prst="rect">
             <a:avLst/>
@@ -5723,14 +9731,14 @@
       </p:sp>
       <p:sp>
         <p:nvSpPr>
-          <p:cNvPr id="5" name="Shape 3"/>
+          <p:cNvPr id="6" name="Shape 4"/>
           <p:cNvSpPr/>
           <p:nvPr/>
         </p:nvSpPr>
         <p:spPr>
           <a:xfrm>
-            <a:off x="434876" y="883593"/>
-            <a:ext cx="0" cy="2612231"/>
+            <a:off x="434876" y="1266974"/>
+            <a:ext cx="0" cy="1343025"/>
           </a:xfrm>
           <a:prstGeom prst="line">
             <a:avLst/>
@@ -5746,14 +9754,14 @@
       </p:sp>
       <p:sp>
         <p:nvSpPr>
-          <p:cNvPr id="6" name="Text 4"/>
+          <p:cNvPr id="7" name="Text 5"/>
           <p:cNvSpPr/>
           <p:nvPr/>
         </p:nvSpPr>
         <p:spPr>
           <a:xfrm>
-            <a:off x="692051" y="1074093"/>
-            <a:ext cx="7973389" cy="230981"/>
+            <a:off x="692051" y="1457474"/>
+            <a:ext cx="7973389" cy="461963"/>
           </a:xfrm>
           <a:prstGeom prst="rect">
             <a:avLst/>
@@ -5778,7 +9786,7 @@
               <a:buNone/>
             </a:pPr>
             <a:r>
-              <a:rPr lang="en-US" sz="1300" b="1" i="1" dirty="0">
+              <a:rPr lang="en-US" sz="1300" dirty="0">
                 <a:solidFill>
                   <a:srgbClr val="1C2833"/>
                 </a:solidFill>
@@ -5786,33 +9794,8 @@
                 <a:ea typeface="Georgia" pitchFamily="34" charset="-122"/>
                 <a:cs typeface="Georgia" pitchFamily="34" charset="-120"/>
               </a:rPr>
-              <a:t>Iṣopaniṣad mantra 1:</a:t>
-            </a:r>
-            <a:endParaRPr lang="en-US" sz="1300" dirty="0"/>
-          </a:p>
-        </p:txBody>
-      </p:sp>
-      <p:sp>
-        <p:nvSpPr>
-          <p:cNvPr id="7" name="Text 5"/>
-          <p:cNvSpPr/>
-          <p:nvPr/>
-        </p:nvSpPr>
-        <p:spPr>
-          <a:xfrm>
-            <a:off x="692051" y="1343174"/>
-            <a:ext cx="7973389" cy="692944"/>
-          </a:xfrm>
-          <a:prstGeom prst="rect">
-            <a:avLst/>
-          </a:prstGeom>
-          <a:noFill/>
-          <a:ln/>
-        </p:spPr>
-        <p:txBody>
-          <a:bodyPr wrap="square" lIns="0" tIns="0" rIns="0" bIns="0" rtlCol="0" anchor="t"/>
-          <a:lstStyle/>
-          <a:p>
+              <a:t>"</a:t>
+            </a:r>
             <a:pPr algn="l" indent="0" marL="0">
               <a:lnSpc>
                 <a:spcPts val="1820"/>
@@ -5826,7 +9809,7 @@
               <a:buNone/>
             </a:pPr>
             <a:r>
-              <a:rPr lang="en-US" sz="1300" dirty="0">
+              <a:rPr lang="en-US" sz="1300" i="1" dirty="0">
                 <a:solidFill>
                   <a:srgbClr val="1C2833"/>
                 </a:solidFill>
@@ -5834,7 +9817,7 @@
                 <a:ea typeface="Georgia" pitchFamily="34" charset="-122"/>
                 <a:cs typeface="Georgia" pitchFamily="34" charset="-120"/>
               </a:rPr>
-              <a:t>&gt; "</a:t>
+              <a:t>īśāvāsyam idaṁ sarvaṁ yat kiñca jagatyāṁ jagat / tena tyaktena bhuñjīthā mā gṛdhaḥ kasya svid dhanam //</a:t>
             </a:r>
             <a:pPr algn="l" indent="0" marL="0">
               <a:lnSpc>
@@ -5849,7 +9832,7 @@
               <a:buNone/>
             </a:pPr>
             <a:r>
-              <a:rPr lang="en-US" sz="1300" i="1" dirty="0">
+              <a:rPr lang="en-US" sz="1300" dirty="0">
                 <a:solidFill>
                   <a:srgbClr val="1C2833"/>
                 </a:solidFill>
@@ -5857,8 +9840,33 @@
                 <a:ea typeface="Georgia" pitchFamily="34" charset="-122"/>
                 <a:cs typeface="Georgia" pitchFamily="34" charset="-120"/>
               </a:rPr>
-              <a:t>īśāvāsyam idaṁ sarvaṁ yat kiñca jagatyāṁ jagat / &gt; tena tyaktena bhuñjīthā mā gṛdhaḥ kasya svid dhanam //</a:t>
-            </a:r>
+              <a:t>"</a:t>
+            </a:r>
+            <a:endParaRPr lang="en-US" sz="1300" dirty="0"/>
+          </a:p>
+        </p:txBody>
+      </p:sp>
+      <p:sp>
+        <p:nvSpPr>
+          <p:cNvPr id="8" name="Text 6"/>
+          <p:cNvSpPr/>
+          <p:nvPr/>
+        </p:nvSpPr>
+        <p:spPr>
+          <a:xfrm>
+            <a:off x="692051" y="1957536"/>
+            <a:ext cx="7973389" cy="461963"/>
+          </a:xfrm>
+          <a:prstGeom prst="rect">
+            <a:avLst/>
+          </a:prstGeom>
+          <a:noFill/>
+          <a:ln/>
+        </p:spPr>
+        <p:txBody>
+          <a:bodyPr wrap="square" lIns="0" tIns="0" rIns="0" bIns="0" rtlCol="0" anchor="t"/>
+          <a:lstStyle/>
+          <a:p>
             <a:pPr algn="l" indent="0" marL="0">
               <a:lnSpc>
                 <a:spcPts val="1820"/>
@@ -5872,7 +9880,7 @@
               <a:buNone/>
             </a:pPr>
             <a:r>
-              <a:rPr lang="en-US" sz="1300" dirty="0">
+              <a:rPr lang="en-US" sz="1300" i="1" dirty="0">
                 <a:solidFill>
                   <a:srgbClr val="1C2833"/>
                 </a:solidFill>
@@ -5880,7 +9888,7 @@
                 <a:ea typeface="Georgia" pitchFamily="34" charset="-122"/>
                 <a:cs typeface="Georgia" pitchFamily="34" charset="-120"/>
               </a:rPr>
-              <a:t>" &gt; &gt; "All this — whatever moves in this moving world — is enveloped by the Lord. &gt; By that renunciation, enjoy. Do not covet anyone's wealth."</a:t>
+              <a:t>"All this — whatever moves in this moving world — is enveloped by the Lord. By that renunciation, enjoy. Do not covet anyone's wealth." — Īśa Upaniṣad, mantra 1</a:t>
             </a:r>
             <a:endParaRPr lang="en-US" sz="1300" dirty="0"/>
           </a:p>
@@ -5888,197 +9896,7 @@
       </p:sp>
       <p:sp>
         <p:nvSpPr>
-          <p:cNvPr id="8" name="Text 6"/>
-          <p:cNvSpPr/>
-          <p:nvPr/>
-        </p:nvSpPr>
-        <p:spPr>
-          <a:xfrm>
-            <a:off x="692051" y="2074218"/>
-            <a:ext cx="7973389" cy="230981"/>
-          </a:xfrm>
-          <a:prstGeom prst="rect">
-            <a:avLst/>
-          </a:prstGeom>
-          <a:noFill/>
-          <a:ln/>
-        </p:spPr>
-        <p:txBody>
-          <a:bodyPr wrap="square" lIns="0" tIns="0" rIns="0" bIns="0" rtlCol="0" anchor="t"/>
-          <a:lstStyle/>
-          <a:p>
-            <a:pPr algn="l" indent="0" marL="0">
-              <a:lnSpc>
-                <a:spcPts val="1820"/>
-              </a:lnSpc>
-              <a:spcBef>
-                <a:spcPts val="300"/>
-              </a:spcBef>
-              <a:spcAft>
-                <a:spcPts val="300"/>
-              </a:spcAft>
-              <a:buNone/>
-            </a:pPr>
-            <a:r>
-              <a:rPr lang="en-US" sz="1300" i="1" dirty="0">
-                <a:solidFill>
-                  <a:srgbClr val="1C2833"/>
-                </a:solidFill>
-                <a:latin typeface="Georgia" pitchFamily="34" charset="0"/>
-                <a:ea typeface="Georgia" pitchFamily="34" charset="-122"/>
-                <a:cs typeface="Georgia" pitchFamily="34" charset="-120"/>
-              </a:rPr>
-              <a:t>The verse gives three rules:</a:t>
-            </a:r>
-            <a:endParaRPr lang="en-US" sz="1300" dirty="0"/>
-          </a:p>
-        </p:txBody>
-      </p:sp>
-      <p:sp>
-        <p:nvSpPr>
           <p:cNvPr id="9" name="Text 7"/>
-          <p:cNvSpPr/>
-          <p:nvPr/>
-        </p:nvSpPr>
-        <p:spPr>
-          <a:xfrm>
-            <a:off x="692051" y="2343299"/>
-            <a:ext cx="7973389" cy="461963"/>
-          </a:xfrm>
-          <a:prstGeom prst="rect">
-            <a:avLst/>
-          </a:prstGeom>
-          <a:noFill/>
-          <a:ln/>
-        </p:spPr>
-        <p:txBody>
-          <a:bodyPr wrap="square" lIns="0" tIns="0" rIns="0" bIns="0" rtlCol="0" anchor="t"/>
-          <a:lstStyle/>
-          <a:p>
-            <a:pPr algn="l" indent="0" marL="0">
-              <a:lnSpc>
-                <a:spcPts val="1820"/>
-              </a:lnSpc>
-              <a:spcBef>
-                <a:spcPts val="300"/>
-              </a:spcBef>
-              <a:spcAft>
-                <a:spcPts val="300"/>
-              </a:spcAft>
-              <a:buNone/>
-            </a:pPr>
-            <a:r>
-              <a:rPr lang="en-US" sz="1300" i="1" dirty="0">
-                <a:solidFill>
-                  <a:srgbClr val="1C2833"/>
-                </a:solidFill>
-                <a:latin typeface="Georgia" pitchFamily="34" charset="0"/>
-                <a:ea typeface="Georgia" pitchFamily="34" charset="-122"/>
-                <a:cs typeface="Georgia" pitchFamily="34" charset="-120"/>
-              </a:rPr>
-              <a:t>1. Nothing is yours by default. 2. Use what is given. Don't claim more. 3. Don't grab from anyone — human, being, or planet.</a:t>
-            </a:r>
-            <a:endParaRPr lang="en-US" sz="1300" dirty="0"/>
-          </a:p>
-        </p:txBody>
-      </p:sp>
-      <p:sp>
-        <p:nvSpPr>
-          <p:cNvPr id="10" name="Text 8"/>
-          <p:cNvSpPr/>
-          <p:nvPr/>
-        </p:nvSpPr>
-        <p:spPr>
-          <a:xfrm>
-            <a:off x="692051" y="2843361"/>
-            <a:ext cx="7973389" cy="461963"/>
-          </a:xfrm>
-          <a:prstGeom prst="rect">
-            <a:avLst/>
-          </a:prstGeom>
-          <a:noFill/>
-          <a:ln/>
-        </p:spPr>
-        <p:txBody>
-          <a:bodyPr wrap="square" lIns="0" tIns="0" rIns="0" bIns="0" rtlCol="0" anchor="t"/>
-          <a:lstStyle/>
-          <a:p>
-            <a:pPr algn="l" indent="0" marL="0">
-              <a:lnSpc>
-                <a:spcPts val="1820"/>
-              </a:lnSpc>
-              <a:spcBef>
-                <a:spcPts val="300"/>
-              </a:spcBef>
-              <a:spcAft>
-                <a:spcPts val="300"/>
-              </a:spcAft>
-              <a:buNone/>
-            </a:pPr>
-            <a:r>
-              <a:rPr lang="en-US" sz="1300" dirty="0">
-                <a:solidFill>
-                  <a:srgbClr val="1C2833"/>
-                </a:solidFill>
-                <a:latin typeface="Georgia" pitchFamily="34" charset="0"/>
-                <a:ea typeface="Georgia" pitchFamily="34" charset="-122"/>
-                <a:cs typeface="Georgia" pitchFamily="34" charset="-120"/>
-              </a:rPr>
-              <a:t>The Indic tradition extended </a:t>
-            </a:r>
-            <a:pPr algn="l" indent="0" marL="0">
-              <a:lnSpc>
-                <a:spcPts val="1820"/>
-              </a:lnSpc>
-              <a:spcBef>
-                <a:spcPts val="300"/>
-              </a:spcBef>
-              <a:spcAft>
-                <a:spcPts val="300"/>
-              </a:spcAft>
-              <a:buNone/>
-            </a:pPr>
-            <a:r>
-              <a:rPr lang="en-US" sz="1300" i="1" dirty="0">
-                <a:solidFill>
-                  <a:srgbClr val="1C2833"/>
-                </a:solidFill>
-                <a:latin typeface="Georgia" pitchFamily="34" charset="0"/>
-                <a:ea typeface="Georgia" pitchFamily="34" charset="-122"/>
-                <a:cs typeface="Georgia" pitchFamily="34" charset="-120"/>
-              </a:rPr>
-              <a:t>ahiṁsā</a:t>
-            </a:r>
-            <a:pPr algn="l" indent="0" marL="0">
-              <a:lnSpc>
-                <a:spcPts val="1820"/>
-              </a:lnSpc>
-              <a:spcBef>
-                <a:spcPts val="300"/>
-              </a:spcBef>
-              <a:spcAft>
-                <a:spcPts val="300"/>
-              </a:spcAft>
-              <a:buNone/>
-            </a:pPr>
-            <a:r>
-              <a:rPr lang="en-US" sz="1300" dirty="0">
-                <a:solidFill>
-                  <a:srgbClr val="1C2833"/>
-                </a:solidFill>
-                <a:latin typeface="Georgia" pitchFamily="34" charset="0"/>
-                <a:ea typeface="Georgia" pitchFamily="34" charset="-122"/>
-                <a:cs typeface="Georgia" pitchFamily="34" charset="-120"/>
-              </a:rPr>
-              <a:t> (non-harm) to all of life. Don't harm what you don't need to harm. Don't waste what you took. Don't take from a being's last resource.</a:t>
-            </a:r>
-            <a:endParaRPr lang="en-US" sz="1300" dirty="0"/>
-          </a:p>
-        </p:txBody>
-      </p:sp>
-      <p:sp>
-        <p:nvSpPr>
-          <p:cNvPr id="11" name="Text 9"/>
           <p:cNvSpPr/>
           <p:nvPr/>
         </p:nvSpPr>
@@ -6228,7 +10046,7 @@
                 <a:ea typeface="Georgia" pitchFamily="34" charset="-122"/>
                 <a:cs typeface="Georgia" pitchFamily="34" charset="-120"/>
               </a:rPr>
-              <a:t>Homework</a:t>
+              <a:t>Core (20 min) (cont.)</a:t>
             </a:r>
             <a:endParaRPr lang="en-US" sz="1800" dirty="0"/>
           </a:p>
@@ -6242,8 +10060,8 @@
         </p:nvSpPr>
         <p:spPr>
           <a:xfrm>
-            <a:off x="406301" y="870942"/>
-            <a:ext cx="8498026" cy="426541"/>
+            <a:off x="634901" y="883593"/>
+            <a:ext cx="8102798" cy="281880"/>
           </a:xfrm>
           <a:prstGeom prst="rect">
             <a:avLst/>
@@ -6255,13 +10073,31 @@
           <a:bodyPr wrap="square" lIns="0" tIns="0" rIns="0" bIns="0" rtlCol="0" anchor="t"/>
           <a:lstStyle/>
           <a:p>
-            <a:pPr algn="l" indent="0" marL="0">
-              <a:lnSpc>
-                <a:spcPts val="1680"/>
-              </a:lnSpc>
-              <a:spcBef>
-                <a:spcPts val="300"/>
-              </a:spcBef>
+            <a:pPr algn="l" marL="342900" indent="-342900">
+              <a:lnSpc>
+                <a:spcPts val="1620"/>
+              </a:lnSpc>
+              <a:spcAft>
+                <a:spcPts val="300"/>
+              </a:spcAft>
+              <a:buSzPct val="100000"/>
+              <a:buChar char="•"/>
+            </a:pPr>
+            <a:r>
+              <a:rPr lang="en-US" sz="1200" b="1" dirty="0">
+                <a:solidFill>
+                  <a:srgbClr val="1C2833"/>
+                </a:solidFill>
+                <a:latin typeface="Arial" pitchFamily="34" charset="0"/>
+                <a:ea typeface="Arial" pitchFamily="34" charset="-122"/>
+                <a:cs typeface="Arial" pitchFamily="34" charset="-120"/>
+              </a:rPr>
+              <a:t>Three injunctions in one verse.</a:t>
+            </a:r>
+            <a:pPr algn="l" indent="0" marL="0">
+              <a:lnSpc>
+                <a:spcPts val="1620"/>
+              </a:lnSpc>
               <a:spcAft>
                 <a:spcPts val="300"/>
               </a:spcAft>
@@ -6276,38 +10112,58 @@
                 <a:ea typeface="Arial" pitchFamily="34" charset="-122"/>
                 <a:cs typeface="Arial" pitchFamily="34" charset="-120"/>
               </a:rPr>
-              <a:t>– Pick one </a:t>
-            </a:r>
-            <a:pPr algn="l" indent="0" marL="0">
-              <a:lnSpc>
-                <a:spcPts val="1680"/>
-              </a:lnSpc>
-              <a:spcBef>
-                <a:spcPts val="300"/>
-              </a:spcBef>
-              <a:spcAft>
-                <a:spcPts val="300"/>
-              </a:spcAft>
-              <a:buNone/>
-            </a:pPr>
-            <a:r>
-              <a:rPr lang="en-US" sz="1200" i="1" dirty="0">
-                <a:solidFill>
-                  <a:srgbClr val="1C2833"/>
-                </a:solidFill>
-                <a:latin typeface="Arial" pitchFamily="34" charset="0"/>
-                <a:ea typeface="Arial" pitchFamily="34" charset="-122"/>
-                <a:cs typeface="Arial" pitchFamily="34" charset="-120"/>
-              </a:rPr>
-              <a:t>grab</a:t>
-            </a:r>
-            <a:pPr algn="l" indent="0" marL="0">
-              <a:lnSpc>
-                <a:spcPts val="1680"/>
-              </a:lnSpc>
-              <a:spcBef>
-                <a:spcPts val="300"/>
-              </a:spcBef>
+              <a:t> Number them on the board:</a:t>
+            </a:r>
+            <a:endParaRPr lang="en-US" sz="1200" dirty="0"/>
+          </a:p>
+        </p:txBody>
+      </p:sp>
+      <p:sp>
+        <p:nvSpPr>
+          <p:cNvPr id="5" name="Text 3"/>
+          <p:cNvSpPr/>
+          <p:nvPr/>
+        </p:nvSpPr>
+        <p:spPr>
+          <a:xfrm>
+            <a:off x="634901" y="1266974"/>
+            <a:ext cx="8102798" cy="1180802"/>
+          </a:xfrm>
+          <a:prstGeom prst="rect">
+            <a:avLst/>
+          </a:prstGeom>
+          <a:noFill/>
+          <a:ln/>
+        </p:spPr>
+        <p:txBody>
+          <a:bodyPr wrap="square" lIns="0" tIns="0" rIns="0" bIns="0" rtlCol="0" anchor="t"/>
+          <a:lstStyle/>
+          <a:p>
+            <a:pPr algn="l" marL="342900" indent="-342900">
+              <a:lnSpc>
+                <a:spcPts val="1620"/>
+              </a:lnSpc>
+              <a:spcAft>
+                <a:spcPts val="300"/>
+              </a:spcAft>
+              <a:buSzPct val="100000"/>
+              <a:buChar char="•"/>
+            </a:pPr>
+            <a:r>
+              <a:rPr lang="en-US" sz="1200" b="1" i="1" dirty="0">
+                <a:solidFill>
+                  <a:srgbClr val="1C2833"/>
+                </a:solidFill>
+                <a:latin typeface="Arial" pitchFamily="34" charset="0"/>
+                <a:ea typeface="Arial" pitchFamily="34" charset="-122"/>
+                <a:cs typeface="Arial" pitchFamily="34" charset="-120"/>
+              </a:rPr>
+              <a:t>All this is enveloped by the Lord.</a:t>
+            </a:r>
+            <a:pPr algn="l" indent="0" marL="0">
+              <a:lnSpc>
+                <a:spcPts val="1620"/>
+              </a:lnSpc>
               <a:spcAft>
                 <a:spcPts val="300"/>
               </a:spcAft>
@@ -6322,38 +10178,36 @@
                 <a:ea typeface="Arial" pitchFamily="34" charset="-122"/>
                 <a:cs typeface="Arial" pitchFamily="34" charset="-120"/>
               </a:rPr>
-              <a:t> from your list today. For 24 hours, replace it with a </a:t>
-            </a:r>
-            <a:pPr algn="l" indent="0" marL="0">
-              <a:lnSpc>
-                <a:spcPts val="1680"/>
-              </a:lnSpc>
-              <a:spcBef>
-                <a:spcPts val="300"/>
-              </a:spcBef>
-              <a:spcAft>
-                <a:spcPts val="300"/>
-              </a:spcAft>
-              <a:buNone/>
-            </a:pPr>
-            <a:r>
-              <a:rPr lang="en-US" sz="1200" i="1" dirty="0">
-                <a:solidFill>
-                  <a:srgbClr val="1C2833"/>
-                </a:solidFill>
-                <a:latin typeface="Arial" pitchFamily="34" charset="0"/>
-                <a:ea typeface="Arial" pitchFamily="34" charset="-122"/>
-                <a:cs typeface="Arial" pitchFamily="34" charset="-120"/>
-              </a:rPr>
-              <a:t>use</a:t>
-            </a:r>
-            <a:pPr algn="l" indent="0" marL="0">
-              <a:lnSpc>
-                <a:spcPts val="1680"/>
-              </a:lnSpc>
-              <a:spcBef>
-                <a:spcPts val="300"/>
-              </a:spcBef>
+              <a:t> Nothing is yours by default. Everything is, in some sense, on loan.</a:t>
+            </a:r>
+            <a:endParaRPr lang="en-US" sz="1200" dirty="0"/>
+          </a:p>
+          <a:p>
+            <a:pPr algn="l" marL="342900" indent="-342900">
+              <a:lnSpc>
+                <a:spcPts val="1620"/>
+              </a:lnSpc>
+              <a:spcAft>
+                <a:spcPts val="300"/>
+              </a:spcAft>
+              <a:buSzPct val="100000"/>
+              <a:buChar char="•"/>
+            </a:pPr>
+            <a:r>
+              <a:rPr lang="en-US" sz="1200" b="1" i="1" dirty="0">
+                <a:solidFill>
+                  <a:srgbClr val="1C2833"/>
+                </a:solidFill>
+                <a:latin typeface="Arial" pitchFamily="34" charset="0"/>
+                <a:ea typeface="Arial" pitchFamily="34" charset="-122"/>
+                <a:cs typeface="Arial" pitchFamily="34" charset="-120"/>
+              </a:rPr>
+              <a:t>By that renunciation, enjoy.</a:t>
+            </a:r>
+            <a:pPr algn="l" indent="0" marL="0">
+              <a:lnSpc>
+                <a:spcPts val="1620"/>
+              </a:lnSpc>
               <a:spcAft>
                 <a:spcPts val="300"/>
               </a:spcAft>
@@ -6368,15 +10222,59 @@
                 <a:ea typeface="Arial" pitchFamily="34" charset="-122"/>
                 <a:cs typeface="Arial" pitchFamily="34" charset="-120"/>
               </a:rPr>
-              <a:t>. Be specific. Bring tomorrow a 3-sentence note on whether it worked.</a:t>
+              <a:t> Use what is given. Take what is needed. Don't claim ownership beyond what you actually use.</a:t>
             </a:r>
             <a:endParaRPr lang="en-US" sz="1200" dirty="0"/>
           </a:p>
-        </p:txBody>
-      </p:sp>
-      <p:sp>
-        <p:nvSpPr>
-          <p:cNvPr id="5" name="Text 3"/>
+          <a:p>
+            <a:pPr algn="l" marL="342900" indent="-342900">
+              <a:lnSpc>
+                <a:spcPts val="1620"/>
+              </a:lnSpc>
+              <a:spcAft>
+                <a:spcPts val="300"/>
+              </a:spcAft>
+              <a:buSzPct val="100000"/>
+              <a:buChar char="•"/>
+            </a:pPr>
+            <a:r>
+              <a:rPr lang="en-US" sz="1200" b="1" i="1" dirty="0">
+                <a:solidFill>
+                  <a:srgbClr val="1C2833"/>
+                </a:solidFill>
+                <a:latin typeface="Arial" pitchFamily="34" charset="0"/>
+                <a:ea typeface="Arial" pitchFamily="34" charset="-122"/>
+                <a:cs typeface="Arial" pitchFamily="34" charset="-120"/>
+              </a:rPr>
+              <a:t>Do not covet anyone's wealth.</a:t>
+            </a:r>
+            <a:pPr algn="l" indent="0" marL="0">
+              <a:lnSpc>
+                <a:spcPts val="1620"/>
+              </a:lnSpc>
+              <a:spcAft>
+                <a:spcPts val="300"/>
+              </a:spcAft>
+              <a:buNone/>
+            </a:pPr>
+            <a:r>
+              <a:rPr lang="en-US" sz="1200" dirty="0">
+                <a:solidFill>
+                  <a:srgbClr val="1C2833"/>
+                </a:solidFill>
+                <a:latin typeface="Arial" pitchFamily="34" charset="0"/>
+                <a:ea typeface="Arial" pitchFamily="34" charset="-122"/>
+                <a:cs typeface="Arial" pitchFamily="34" charset="-120"/>
+              </a:rPr>
+              <a:t> Don't grab what is not yours — neither another person's, nor another being's, nor nature's.</a:t>
+            </a:r>
+            <a:endParaRPr lang="en-US" sz="1200" dirty="0"/>
+          </a:p>
+        </p:txBody>
+      </p:sp>
+      <p:sp>
+        <p:nvSpPr>
+          <p:cNvPr id="6" name="Text 4"/>
           <p:cNvSpPr/>
           <p:nvPr/>
         </p:nvSpPr>
